--- a/docs/CompNinja-Roadmap-12-Weeks.pptx
+++ b/docs/CompNinja-Roadmap-12-Weeks.pptx
@@ -512,7 +512,7 @@
           <a:p>
             <a:r>
               <a:rPr lang="en-US" dirty="0"/>
-              <a:t>This deck restates docs/ROADMAP.md as milestones on a calendar. When the two disagree, the repo file wins — move a line to its Shipped log the same commit it ships.</a:t>
+              <a:t>Four tracks: Development, Users, Relationships, Profit. Three milestones each, one landing a week. This deck restates docs/ROADMAP.md as milestones on a calendar. When the two disagree, the repo file wins — move a line to its Shipped log the same commit it ships.</a:t>
             </a:r>
             <a:endParaRPr lang="en-US" dirty="0"/>
           </a:p>
@@ -864,7 +864,7 @@
           <a:p>
             <a:r>
               <a:rPr lang="en-US" dirty="0"/>
-              <a:t>Milestones are claims, not deliverables — each is worded so it can be shown false. If a milestone cannot be shown false by looking at a dashboard or a database row, it is a feature list wearing a milestone's clothes. Rewrite it.</a:t>
+              <a:t>Three milestones per track is a working default for twelve weeks. The tracks are deliberately unequal in effort — REL is mostly conversations, PRO is mostly a switch and a wait — because effort is not what they measure.</a:t>
             </a:r>
             <a:endParaRPr lang="en-US" dirty="0"/>
           </a:p>
@@ -1890,7 +1890,7 @@
         <p:spPr>
           <a:xfrm>
             <a:off x="566928" y="3035808"/>
-            <a:ext cx="8778240" cy="457200"/>
+            <a:ext cx="9692640" cy="457200"/>
           </a:xfrm>
           <a:prstGeom prst="rect">
             <a:avLst/>
@@ -1914,7 +1914,7 @@
                 <a:ea typeface="Georgia" pitchFamily="34" charset="-122"/>
                 <a:cs typeface="Georgia" pitchFamily="34" charset="-120"/>
               </a:rPr>
-              <a:t>Twelve weeks, six milestones.</a:t>
+              <a:t>Four tracks, twelve weeks, twelve milestones.</a:t>
             </a:r>
             <a:endParaRPr lang="en-US" sz="2400" dirty="0"/>
           </a:p>
@@ -1956,7 +1956,7 @@
                 <a:ea typeface="Calibri" pitchFamily="34" charset="-122"/>
                 <a:cs typeface="Calibri" pitchFamily="34" charset="-120"/>
               </a:rPr>
-              <a:t>Every milestone is a fact about a person outside this company — not a feature that shipped.</a:t>
+              <a:t>A roadmap of shipped features says nothing about whether the business is working. These four tracks each answer a different question, and only one of them is about code.</a:t>
             </a:r>
             <a:endParaRPr lang="en-US" sz="1400" dirty="0"/>
           </a:p>
@@ -1964,30 +1964,96 @@
       </p:sp>
       <p:sp>
         <p:nvSpPr>
-          <p:cNvPr id="7" name="Text 4"/>
-          <p:cNvSpPr/>
-          <p:nvPr/>
-        </p:nvSpPr>
-        <p:spPr>
-          <a:xfrm>
-            <a:off x="566928" y="4709160"/>
-            <a:ext cx="2011680" cy="502920"/>
-          </a:xfrm>
-          <a:prstGeom prst="rect">
-            <a:avLst/>
-          </a:prstGeom>
-          <a:noFill/>
-          <a:ln/>
-        </p:spPr>
-        <p:txBody>
-          <a:bodyPr wrap="square" lIns="0" tIns="0" rIns="0" bIns="0" rtlCol="0" anchor="ctr"/>
-          <a:lstStyle/>
-          <a:p>
-            <a:pPr indent="0" marL="0">
-              <a:buNone/>
-            </a:pPr>
-            <a:r>
-              <a:rPr lang="en-US" sz="2700" dirty="0">
+          <p:cNvPr id="7" name="Shape 4"/>
+          <p:cNvSpPr/>
+          <p:nvPr/>
+        </p:nvSpPr>
+        <p:spPr>
+          <a:xfrm>
+            <a:off x="566928" y="4590288"/>
+            <a:ext cx="585216" cy="274320"/>
+          </a:xfrm>
+          <a:prstGeom prst="roundRect">
+            <a:avLst>
+              <a:gd name="adj" fmla="val 16667"/>
+            </a:avLst>
+          </a:prstGeom>
+          <a:solidFill>
+            <a:srgbClr val="3D4B5F"/>
+          </a:solidFill>
+          <a:ln w="6350">
+            <a:solidFill>
+              <a:srgbClr val="3D4B5F"/>
+            </a:solidFill>
+            <a:prstDash val="solid"/>
+          </a:ln>
+        </p:spPr>
+      </p:sp>
+      <p:sp>
+        <p:nvSpPr>
+          <p:cNvPr id="8" name="Text 5"/>
+          <p:cNvSpPr/>
+          <p:nvPr/>
+        </p:nvSpPr>
+        <p:spPr>
+          <a:xfrm>
+            <a:off x="566928" y="4590288"/>
+            <a:ext cx="585216" cy="274320"/>
+          </a:xfrm>
+          <a:prstGeom prst="rect">
+            <a:avLst/>
+          </a:prstGeom>
+          <a:noFill/>
+          <a:ln/>
+        </p:spPr>
+        <p:txBody>
+          <a:bodyPr wrap="square" lIns="0" tIns="0" rIns="0" bIns="0" rtlCol="0" anchor="ctr"/>
+          <a:lstStyle/>
+          <a:p>
+            <a:pPr algn="ctr" indent="0" marL="0">
+              <a:buNone/>
+            </a:pPr>
+            <a:r>
+              <a:rPr lang="en-US" sz="950" b="1" dirty="0">
+                <a:solidFill>
+                  <a:srgbClr val="FFFFFF"/>
+                </a:solidFill>
+                <a:latin typeface="Calibri" pitchFamily="34" charset="0"/>
+                <a:ea typeface="Calibri" pitchFamily="34" charset="-122"/>
+                <a:cs typeface="Calibri" pitchFamily="34" charset="-120"/>
+              </a:rPr>
+              <a:t>DEV</a:t>
+            </a:r>
+            <a:endParaRPr lang="en-US" sz="950" dirty="0"/>
+          </a:p>
+        </p:txBody>
+      </p:sp>
+      <p:sp>
+        <p:nvSpPr>
+          <p:cNvPr id="9" name="Text 6"/>
+          <p:cNvSpPr/>
+          <p:nvPr/>
+        </p:nvSpPr>
+        <p:spPr>
+          <a:xfrm>
+            <a:off x="1261872" y="4553712"/>
+            <a:ext cx="1920240" cy="347472"/>
+          </a:xfrm>
+          <a:prstGeom prst="rect">
+            <a:avLst/>
+          </a:prstGeom>
+          <a:noFill/>
+          <a:ln/>
+        </p:spPr>
+        <p:txBody>
+          <a:bodyPr wrap="square" lIns="0" tIns="0" rIns="0" bIns="0" rtlCol="0" anchor="ctr"/>
+          <a:lstStyle/>
+          <a:p>
+            <a:pPr indent="0" marL="0">
+              <a:buNone/>
+            </a:pPr>
+            <a:r>
+              <a:rPr lang="en-US" sz="1700" dirty="0">
                 <a:solidFill>
                   <a:srgbClr val="FFFFFF"/>
                 </a:solidFill>
@@ -1995,38 +2061,38 @@
                 <a:ea typeface="Georgia" pitchFamily="34" charset="-122"/>
                 <a:cs typeface="Georgia" pitchFamily="34" charset="-120"/>
               </a:rPr>
-              <a:t>17 AUG</a:t>
-            </a:r>
-            <a:endParaRPr lang="en-US" sz="2700" dirty="0"/>
-          </a:p>
-        </p:txBody>
-      </p:sp>
-      <p:sp>
-        <p:nvSpPr>
-          <p:cNvPr id="8" name="Text 5"/>
-          <p:cNvSpPr/>
-          <p:nvPr/>
-        </p:nvSpPr>
-        <p:spPr>
-          <a:xfrm>
-            <a:off x="566928" y="5230368"/>
-            <a:ext cx="2011680" cy="237744"/>
-          </a:xfrm>
-          <a:prstGeom prst="rect">
-            <a:avLst/>
-          </a:prstGeom>
-          <a:noFill/>
-          <a:ln/>
-        </p:spPr>
-        <p:txBody>
-          <a:bodyPr wrap="square" lIns="0" tIns="0" rIns="0" bIns="0" rtlCol="0" anchor="ctr"/>
-          <a:lstStyle/>
-          <a:p>
-            <a:pPr indent="0" marL="0">
-              <a:buNone/>
-            </a:pPr>
-            <a:r>
-              <a:rPr lang="en-US" sz="900" b="1" spc="130" kern="0" dirty="0">
+              <a:t>Development</a:t>
+            </a:r>
+            <a:endParaRPr lang="en-US" sz="1700" dirty="0"/>
+          </a:p>
+        </p:txBody>
+      </p:sp>
+      <p:sp>
+        <p:nvSpPr>
+          <p:cNvPr id="10" name="Text 7"/>
+          <p:cNvSpPr/>
+          <p:nvPr/>
+        </p:nvSpPr>
+        <p:spPr>
+          <a:xfrm>
+            <a:off x="566928" y="4956048"/>
+            <a:ext cx="2377440" cy="237744"/>
+          </a:xfrm>
+          <a:prstGeom prst="rect">
+            <a:avLst/>
+          </a:prstGeom>
+          <a:noFill/>
+          <a:ln/>
+        </p:spPr>
+        <p:txBody>
+          <a:bodyPr wrap="square" lIns="0" tIns="0" rIns="0" bIns="0" rtlCol="0" anchor="ctr"/>
+          <a:lstStyle/>
+          <a:p>
+            <a:pPr indent="0" marL="0">
+              <a:buNone/>
+            </a:pPr>
+            <a:r>
+              <a:rPr lang="en-US" sz="900" b="1" spc="120" kern="0" dirty="0">
                 <a:solidFill>
                   <a:srgbClr val="8B98A8"/>
                 </a:solidFill>
@@ -2034,7 +2100,7 @@
                 <a:ea typeface="Calibri" pitchFamily="34" charset="-122"/>
                 <a:cs typeface="Calibri" pitchFamily="34" charset="-120"/>
               </a:rPr>
-              <a:t>WEEK 1 BEGINS</a:t>
+              <a:t>three milestones</a:t>
             </a:r>
             <a:endParaRPr lang="en-US" sz="900" dirty="0"/>
           </a:p>
@@ -2042,30 +2108,96 @@
       </p:sp>
       <p:sp>
         <p:nvSpPr>
-          <p:cNvPr id="9" name="Text 6"/>
-          <p:cNvSpPr/>
-          <p:nvPr/>
-        </p:nvSpPr>
-        <p:spPr>
-          <a:xfrm>
-            <a:off x="2715768" y="4709160"/>
-            <a:ext cx="2011680" cy="502920"/>
-          </a:xfrm>
-          <a:prstGeom prst="rect">
-            <a:avLst/>
-          </a:prstGeom>
-          <a:noFill/>
-          <a:ln/>
-        </p:spPr>
-        <p:txBody>
-          <a:bodyPr wrap="square" lIns="0" tIns="0" rIns="0" bIns="0" rtlCol="0" anchor="ctr"/>
-          <a:lstStyle/>
-          <a:p>
-            <a:pPr indent="0" marL="0">
-              <a:buNone/>
-            </a:pPr>
-            <a:r>
-              <a:rPr lang="en-US" sz="2700" dirty="0">
+          <p:cNvPr id="11" name="Shape 8"/>
+          <p:cNvSpPr/>
+          <p:nvPr/>
+        </p:nvSpPr>
+        <p:spPr>
+          <a:xfrm>
+            <a:off x="3355848" y="4590288"/>
+            <a:ext cx="585216" cy="274320"/>
+          </a:xfrm>
+          <a:prstGeom prst="roundRect">
+            <a:avLst>
+              <a:gd name="adj" fmla="val 16667"/>
+            </a:avLst>
+          </a:prstGeom>
+          <a:solidFill>
+            <a:srgbClr val="B91C1C"/>
+          </a:solidFill>
+          <a:ln w="6350">
+            <a:solidFill>
+              <a:srgbClr val="B91C1C"/>
+            </a:solidFill>
+            <a:prstDash val="solid"/>
+          </a:ln>
+        </p:spPr>
+      </p:sp>
+      <p:sp>
+        <p:nvSpPr>
+          <p:cNvPr id="12" name="Text 9"/>
+          <p:cNvSpPr/>
+          <p:nvPr/>
+        </p:nvSpPr>
+        <p:spPr>
+          <a:xfrm>
+            <a:off x="3355848" y="4590288"/>
+            <a:ext cx="585216" cy="274320"/>
+          </a:xfrm>
+          <a:prstGeom prst="rect">
+            <a:avLst/>
+          </a:prstGeom>
+          <a:noFill/>
+          <a:ln/>
+        </p:spPr>
+        <p:txBody>
+          <a:bodyPr wrap="square" lIns="0" tIns="0" rIns="0" bIns="0" rtlCol="0" anchor="ctr"/>
+          <a:lstStyle/>
+          <a:p>
+            <a:pPr algn="ctr" indent="0" marL="0">
+              <a:buNone/>
+            </a:pPr>
+            <a:r>
+              <a:rPr lang="en-US" sz="950" b="1" dirty="0">
+                <a:solidFill>
+                  <a:srgbClr val="FFFFFF"/>
+                </a:solidFill>
+                <a:latin typeface="Calibri" pitchFamily="34" charset="0"/>
+                <a:ea typeface="Calibri" pitchFamily="34" charset="-122"/>
+                <a:cs typeface="Calibri" pitchFamily="34" charset="-120"/>
+              </a:rPr>
+              <a:t>USE</a:t>
+            </a:r>
+            <a:endParaRPr lang="en-US" sz="950" dirty="0"/>
+          </a:p>
+        </p:txBody>
+      </p:sp>
+      <p:sp>
+        <p:nvSpPr>
+          <p:cNvPr id="13" name="Text 10"/>
+          <p:cNvSpPr/>
+          <p:nvPr/>
+        </p:nvSpPr>
+        <p:spPr>
+          <a:xfrm>
+            <a:off x="4050792" y="4553712"/>
+            <a:ext cx="1920240" cy="347472"/>
+          </a:xfrm>
+          <a:prstGeom prst="rect">
+            <a:avLst/>
+          </a:prstGeom>
+          <a:noFill/>
+          <a:ln/>
+        </p:spPr>
+        <p:txBody>
+          <a:bodyPr wrap="square" lIns="0" tIns="0" rIns="0" bIns="0" rtlCol="0" anchor="ctr"/>
+          <a:lstStyle/>
+          <a:p>
+            <a:pPr indent="0" marL="0">
+              <a:buNone/>
+            </a:pPr>
+            <a:r>
+              <a:rPr lang="en-US" sz="1700" dirty="0">
                 <a:solidFill>
                   <a:srgbClr val="FFFFFF"/>
                 </a:solidFill>
@@ -2073,38 +2205,38 @@
                 <a:ea typeface="Georgia" pitchFamily="34" charset="-122"/>
                 <a:cs typeface="Georgia" pitchFamily="34" charset="-120"/>
               </a:rPr>
-              <a:t>08 NOV</a:t>
-            </a:r>
-            <a:endParaRPr lang="en-US" sz="2700" dirty="0"/>
-          </a:p>
-        </p:txBody>
-      </p:sp>
-      <p:sp>
-        <p:nvSpPr>
-          <p:cNvPr id="10" name="Text 7"/>
-          <p:cNvSpPr/>
-          <p:nvPr/>
-        </p:nvSpPr>
-        <p:spPr>
-          <a:xfrm>
-            <a:off x="2715768" y="5230368"/>
-            <a:ext cx="2011680" cy="237744"/>
-          </a:xfrm>
-          <a:prstGeom prst="rect">
-            <a:avLst/>
-          </a:prstGeom>
-          <a:noFill/>
-          <a:ln/>
-        </p:spPr>
-        <p:txBody>
-          <a:bodyPr wrap="square" lIns="0" tIns="0" rIns="0" bIns="0" rtlCol="0" anchor="ctr"/>
-          <a:lstStyle/>
-          <a:p>
-            <a:pPr indent="0" marL="0">
-              <a:buNone/>
-            </a:pPr>
-            <a:r>
-              <a:rPr lang="en-US" sz="900" b="1" spc="130" kern="0" dirty="0">
+              <a:t>Users</a:t>
+            </a:r>
+            <a:endParaRPr lang="en-US" sz="1700" dirty="0"/>
+          </a:p>
+        </p:txBody>
+      </p:sp>
+      <p:sp>
+        <p:nvSpPr>
+          <p:cNvPr id="14" name="Text 11"/>
+          <p:cNvSpPr/>
+          <p:nvPr/>
+        </p:nvSpPr>
+        <p:spPr>
+          <a:xfrm>
+            <a:off x="3355848" y="4956048"/>
+            <a:ext cx="2377440" cy="237744"/>
+          </a:xfrm>
+          <a:prstGeom prst="rect">
+            <a:avLst/>
+          </a:prstGeom>
+          <a:noFill/>
+          <a:ln/>
+        </p:spPr>
+        <p:txBody>
+          <a:bodyPr wrap="square" lIns="0" tIns="0" rIns="0" bIns="0" rtlCol="0" anchor="ctr"/>
+          <a:lstStyle/>
+          <a:p>
+            <a:pPr indent="0" marL="0">
+              <a:buNone/>
+            </a:pPr>
+            <a:r>
+              <a:rPr lang="en-US" sz="900" b="1" spc="120" kern="0" dirty="0">
                 <a:solidFill>
                   <a:srgbClr val="8B98A8"/>
                 </a:solidFill>
@@ -2112,7 +2244,7 @@
                 <a:ea typeface="Calibri" pitchFamily="34" charset="-122"/>
                 <a:cs typeface="Calibri" pitchFamily="34" charset="-120"/>
               </a:rPr>
-              <a:t>WEEK 12 ENDS</a:t>
+              <a:t>three milestones</a:t>
             </a:r>
             <a:endParaRPr lang="en-US" sz="900" dirty="0"/>
           </a:p>
@@ -2120,30 +2252,96 @@
       </p:sp>
       <p:sp>
         <p:nvSpPr>
-          <p:cNvPr id="11" name="Text 8"/>
-          <p:cNvSpPr/>
-          <p:nvPr/>
-        </p:nvSpPr>
-        <p:spPr>
-          <a:xfrm>
-            <a:off x="4864608" y="4709160"/>
-            <a:ext cx="2011680" cy="502920"/>
-          </a:xfrm>
-          <a:prstGeom prst="rect">
-            <a:avLst/>
-          </a:prstGeom>
-          <a:noFill/>
-          <a:ln/>
-        </p:spPr>
-        <p:txBody>
-          <a:bodyPr wrap="square" lIns="0" tIns="0" rIns="0" bIns="0" rtlCol="0" anchor="ctr"/>
-          <a:lstStyle/>
-          <a:p>
-            <a:pPr indent="0" marL="0">
-              <a:buNone/>
-            </a:pPr>
-            <a:r>
-              <a:rPr lang="en-US" sz="2700" dirty="0">
+          <p:cNvPr id="15" name="Shape 12"/>
+          <p:cNvSpPr/>
+          <p:nvPr/>
+        </p:nvSpPr>
+        <p:spPr>
+          <a:xfrm>
+            <a:off x="6144768" y="4590288"/>
+            <a:ext cx="585216" cy="274320"/>
+          </a:xfrm>
+          <a:prstGeom prst="roundRect">
+            <a:avLst>
+              <a:gd name="adj" fmla="val 16667"/>
+            </a:avLst>
+          </a:prstGeom>
+          <a:solidFill>
+            <a:srgbClr val="4C3A8C"/>
+          </a:solidFill>
+          <a:ln w="6350">
+            <a:solidFill>
+              <a:srgbClr val="4C3A8C"/>
+            </a:solidFill>
+            <a:prstDash val="solid"/>
+          </a:ln>
+        </p:spPr>
+      </p:sp>
+      <p:sp>
+        <p:nvSpPr>
+          <p:cNvPr id="16" name="Text 13"/>
+          <p:cNvSpPr/>
+          <p:nvPr/>
+        </p:nvSpPr>
+        <p:spPr>
+          <a:xfrm>
+            <a:off x="6144768" y="4590288"/>
+            <a:ext cx="585216" cy="274320"/>
+          </a:xfrm>
+          <a:prstGeom prst="rect">
+            <a:avLst/>
+          </a:prstGeom>
+          <a:noFill/>
+          <a:ln/>
+        </p:spPr>
+        <p:txBody>
+          <a:bodyPr wrap="square" lIns="0" tIns="0" rIns="0" bIns="0" rtlCol="0" anchor="ctr"/>
+          <a:lstStyle/>
+          <a:p>
+            <a:pPr algn="ctr" indent="0" marL="0">
+              <a:buNone/>
+            </a:pPr>
+            <a:r>
+              <a:rPr lang="en-US" sz="950" b="1" dirty="0">
+                <a:solidFill>
+                  <a:srgbClr val="FFFFFF"/>
+                </a:solidFill>
+                <a:latin typeface="Calibri" pitchFamily="34" charset="0"/>
+                <a:ea typeface="Calibri" pitchFamily="34" charset="-122"/>
+                <a:cs typeface="Calibri" pitchFamily="34" charset="-120"/>
+              </a:rPr>
+              <a:t>REL</a:t>
+            </a:r>
+            <a:endParaRPr lang="en-US" sz="950" dirty="0"/>
+          </a:p>
+        </p:txBody>
+      </p:sp>
+      <p:sp>
+        <p:nvSpPr>
+          <p:cNvPr id="17" name="Text 14"/>
+          <p:cNvSpPr/>
+          <p:nvPr/>
+        </p:nvSpPr>
+        <p:spPr>
+          <a:xfrm>
+            <a:off x="6839712" y="4553712"/>
+            <a:ext cx="1920240" cy="347472"/>
+          </a:xfrm>
+          <a:prstGeom prst="rect">
+            <a:avLst/>
+          </a:prstGeom>
+          <a:noFill/>
+          <a:ln/>
+        </p:spPr>
+        <p:txBody>
+          <a:bodyPr wrap="square" lIns="0" tIns="0" rIns="0" bIns="0" rtlCol="0" anchor="ctr"/>
+          <a:lstStyle/>
+          <a:p>
+            <a:pPr indent="0" marL="0">
+              <a:buNone/>
+            </a:pPr>
+            <a:r>
+              <a:rPr lang="en-US" sz="1700" dirty="0">
                 <a:solidFill>
                   <a:srgbClr val="FFFFFF"/>
                 </a:solidFill>
@@ -2151,38 +2349,38 @@
                 <a:ea typeface="Georgia" pitchFamily="34" charset="-122"/>
                 <a:cs typeface="Georgia" pitchFamily="34" charset="-120"/>
               </a:rPr>
-              <a:t>6</a:t>
-            </a:r>
-            <a:endParaRPr lang="en-US" sz="2700" dirty="0"/>
-          </a:p>
-        </p:txBody>
-      </p:sp>
-      <p:sp>
-        <p:nvSpPr>
-          <p:cNvPr id="12" name="Text 9"/>
-          <p:cNvSpPr/>
-          <p:nvPr/>
-        </p:nvSpPr>
-        <p:spPr>
-          <a:xfrm>
-            <a:off x="4864608" y="5230368"/>
-            <a:ext cx="2011680" cy="237744"/>
-          </a:xfrm>
-          <a:prstGeom prst="rect">
-            <a:avLst/>
-          </a:prstGeom>
-          <a:noFill/>
-          <a:ln/>
-        </p:spPr>
-        <p:txBody>
-          <a:bodyPr wrap="square" lIns="0" tIns="0" rIns="0" bIns="0" rtlCol="0" anchor="ctr"/>
-          <a:lstStyle/>
-          <a:p>
-            <a:pPr indent="0" marL="0">
-              <a:buNone/>
-            </a:pPr>
-            <a:r>
-              <a:rPr lang="en-US" sz="900" b="1" spc="130" kern="0" dirty="0">
+              <a:t>Relationships</a:t>
+            </a:r>
+            <a:endParaRPr lang="en-US" sz="1700" dirty="0"/>
+          </a:p>
+        </p:txBody>
+      </p:sp>
+      <p:sp>
+        <p:nvSpPr>
+          <p:cNvPr id="18" name="Text 15"/>
+          <p:cNvSpPr/>
+          <p:nvPr/>
+        </p:nvSpPr>
+        <p:spPr>
+          <a:xfrm>
+            <a:off x="6144768" y="4956048"/>
+            <a:ext cx="2377440" cy="237744"/>
+          </a:xfrm>
+          <a:prstGeom prst="rect">
+            <a:avLst/>
+          </a:prstGeom>
+          <a:noFill/>
+          <a:ln/>
+        </p:spPr>
+        <p:txBody>
+          <a:bodyPr wrap="square" lIns="0" tIns="0" rIns="0" bIns="0" rtlCol="0" anchor="ctr"/>
+          <a:lstStyle/>
+          <a:p>
+            <a:pPr indent="0" marL="0">
+              <a:buNone/>
+            </a:pPr>
+            <a:r>
+              <a:rPr lang="en-US" sz="900" b="1" spc="120" kern="0" dirty="0">
                 <a:solidFill>
                   <a:srgbClr val="8B98A8"/>
                 </a:solidFill>
@@ -2190,7 +2388,7 @@
                 <a:ea typeface="Calibri" pitchFamily="34" charset="-122"/>
                 <a:cs typeface="Calibri" pitchFamily="34" charset="-120"/>
               </a:rPr>
-              <a:t>MILESTONES</a:t>
+              <a:t>three milestones</a:t>
             </a:r>
             <a:endParaRPr lang="en-US" sz="900" dirty="0"/>
           </a:p>
@@ -2198,7 +2396,151 @@
       </p:sp>
       <p:sp>
         <p:nvSpPr>
-          <p:cNvPr id="13" name="Text 10"/>
+          <p:cNvPr id="19" name="Shape 16"/>
+          <p:cNvSpPr/>
+          <p:nvPr/>
+        </p:nvSpPr>
+        <p:spPr>
+          <a:xfrm>
+            <a:off x="8933688" y="4590288"/>
+            <a:ext cx="585216" cy="274320"/>
+          </a:xfrm>
+          <a:prstGeom prst="roundRect">
+            <a:avLst>
+              <a:gd name="adj" fmla="val 16667"/>
+            </a:avLst>
+          </a:prstGeom>
+          <a:solidFill>
+            <a:srgbClr val="06603A"/>
+          </a:solidFill>
+          <a:ln w="6350">
+            <a:solidFill>
+              <a:srgbClr val="06603A"/>
+            </a:solidFill>
+            <a:prstDash val="solid"/>
+          </a:ln>
+        </p:spPr>
+      </p:sp>
+      <p:sp>
+        <p:nvSpPr>
+          <p:cNvPr id="20" name="Text 17"/>
+          <p:cNvSpPr/>
+          <p:nvPr/>
+        </p:nvSpPr>
+        <p:spPr>
+          <a:xfrm>
+            <a:off x="8933688" y="4590288"/>
+            <a:ext cx="585216" cy="274320"/>
+          </a:xfrm>
+          <a:prstGeom prst="rect">
+            <a:avLst/>
+          </a:prstGeom>
+          <a:noFill/>
+          <a:ln/>
+        </p:spPr>
+        <p:txBody>
+          <a:bodyPr wrap="square" lIns="0" tIns="0" rIns="0" bIns="0" rtlCol="0" anchor="ctr"/>
+          <a:lstStyle/>
+          <a:p>
+            <a:pPr algn="ctr" indent="0" marL="0">
+              <a:buNone/>
+            </a:pPr>
+            <a:r>
+              <a:rPr lang="en-US" sz="950" b="1" dirty="0">
+                <a:solidFill>
+                  <a:srgbClr val="FFFFFF"/>
+                </a:solidFill>
+                <a:latin typeface="Calibri" pitchFamily="34" charset="0"/>
+                <a:ea typeface="Calibri" pitchFamily="34" charset="-122"/>
+                <a:cs typeface="Calibri" pitchFamily="34" charset="-120"/>
+              </a:rPr>
+              <a:t>PRO</a:t>
+            </a:r>
+            <a:endParaRPr lang="en-US" sz="950" dirty="0"/>
+          </a:p>
+        </p:txBody>
+      </p:sp>
+      <p:sp>
+        <p:nvSpPr>
+          <p:cNvPr id="21" name="Text 18"/>
+          <p:cNvSpPr/>
+          <p:nvPr/>
+        </p:nvSpPr>
+        <p:spPr>
+          <a:xfrm>
+            <a:off x="9628632" y="4553712"/>
+            <a:ext cx="1920240" cy="347472"/>
+          </a:xfrm>
+          <a:prstGeom prst="rect">
+            <a:avLst/>
+          </a:prstGeom>
+          <a:noFill/>
+          <a:ln/>
+        </p:spPr>
+        <p:txBody>
+          <a:bodyPr wrap="square" lIns="0" tIns="0" rIns="0" bIns="0" rtlCol="0" anchor="ctr"/>
+          <a:lstStyle/>
+          <a:p>
+            <a:pPr indent="0" marL="0">
+              <a:buNone/>
+            </a:pPr>
+            <a:r>
+              <a:rPr lang="en-US" sz="1700" dirty="0">
+                <a:solidFill>
+                  <a:srgbClr val="FFFFFF"/>
+                </a:solidFill>
+                <a:latin typeface="Georgia" pitchFamily="34" charset="0"/>
+                <a:ea typeface="Georgia" pitchFamily="34" charset="-122"/>
+                <a:cs typeface="Georgia" pitchFamily="34" charset="-120"/>
+              </a:rPr>
+              <a:t>Profit</a:t>
+            </a:r>
+            <a:endParaRPr lang="en-US" sz="1700" dirty="0"/>
+          </a:p>
+        </p:txBody>
+      </p:sp>
+      <p:sp>
+        <p:nvSpPr>
+          <p:cNvPr id="22" name="Text 19"/>
+          <p:cNvSpPr/>
+          <p:nvPr/>
+        </p:nvSpPr>
+        <p:spPr>
+          <a:xfrm>
+            <a:off x="8933688" y="4956048"/>
+            <a:ext cx="2377440" cy="237744"/>
+          </a:xfrm>
+          <a:prstGeom prst="rect">
+            <a:avLst/>
+          </a:prstGeom>
+          <a:noFill/>
+          <a:ln/>
+        </p:spPr>
+        <p:txBody>
+          <a:bodyPr wrap="square" lIns="0" tIns="0" rIns="0" bIns="0" rtlCol="0" anchor="ctr"/>
+          <a:lstStyle/>
+          <a:p>
+            <a:pPr indent="0" marL="0">
+              <a:buNone/>
+            </a:pPr>
+            <a:r>
+              <a:rPr lang="en-US" sz="900" b="1" spc="120" kern="0" dirty="0">
+                <a:solidFill>
+                  <a:srgbClr val="8B98A8"/>
+                </a:solidFill>
+                <a:latin typeface="Calibri" pitchFamily="34" charset="0"/>
+                <a:ea typeface="Calibri" pitchFamily="34" charset="-122"/>
+                <a:cs typeface="Calibri" pitchFamily="34" charset="-120"/>
+              </a:rPr>
+              <a:t>three milestones</a:t>
+            </a:r>
+            <a:endParaRPr lang="en-US" sz="900" dirty="0"/>
+          </a:p>
+        </p:txBody>
+      </p:sp>
+      <p:sp>
+        <p:nvSpPr>
+          <p:cNvPr id="23" name="Text 20"/>
           <p:cNvSpPr/>
           <p:nvPr/>
         </p:nvSpPr>
@@ -4557,7 +4899,7 @@
                 <a:ea typeface="Calibri" pitchFamily="34" charset="-122"/>
                 <a:cs typeface="Calibri" pitchFamily="34" charset="-120"/>
               </a:rPr>
-              <a:t>This is the roadmap's own position, not a new one: “as of 2026-08-06 the product had zero real outside users, so ‘can anyone find this’ is the binding constraint.”</a:t>
+              <a:t>This is the roadmap's own position, not a new one: “as of 2026-08-06 the product had zero real outside users, so ‘can anyone find this’ is the binding constraint.” It is why Development is only one lane of four.</a:t>
             </a:r>
             <a:endParaRPr lang="en-US" sz="1050" dirty="0"/>
           </a:p>
@@ -4628,7 +4970,7 @@
                 <a:ea typeface="Calibri" pitchFamily="34" charset="-122"/>
                 <a:cs typeface="Calibri" pitchFamily="34" charset="-120"/>
               </a:rPr>
-              <a:t>THE TWELVE WEEKS AT A GLANCE</a:t>
+              <a:t>FOUR TRACKS · TWELVE WEEKS · TWELVE MILESTONES</a:t>
             </a:r>
             <a:endParaRPr lang="en-US" sz="1000" dirty="0"/>
           </a:p>
@@ -4667,7 +5009,7 @@
                 <a:ea typeface="Georgia" pitchFamily="34" charset="-122"/>
                 <a:cs typeface="Georgia" pitchFamily="34" charset="-120"/>
               </a:rPr>
-              <a:t>Six milestones, each a claim someone else can check.</a:t>
+              <a:t>Only one of these four lanes is about code.</a:t>
             </a:r>
             <a:endParaRPr lang="en-US" sz="3000" dirty="0"/>
           </a:p>
@@ -4797,12 +5139,186 @@
         </p:nvSpPr>
         <p:spPr>
           <a:xfrm>
-            <a:off x="566928" y="1481328"/>
-            <a:ext cx="3538728" cy="2212848"/>
+            <a:off x="566928" y="1536192"/>
+            <a:ext cx="2157984" cy="1005840"/>
           </a:xfrm>
           <a:prstGeom prst="roundRect">
             <a:avLst>
-              <a:gd name="adj" fmla="val 2479"/>
+              <a:gd name="adj" fmla="val 5455"/>
+            </a:avLst>
+          </a:prstGeom>
+          <a:solidFill>
+            <a:srgbClr val="F5F4EF"/>
+          </a:solidFill>
+          <a:ln w="9525">
+            <a:solidFill>
+              <a:srgbClr val="D8D4C9"/>
+            </a:solidFill>
+            <a:prstDash val="solid"/>
+          </a:ln>
+        </p:spPr>
+      </p:sp>
+      <p:sp>
+        <p:nvSpPr>
+          <p:cNvPr id="8" name="Shape 5"/>
+          <p:cNvSpPr/>
+          <p:nvPr/>
+        </p:nvSpPr>
+        <p:spPr>
+          <a:xfrm>
+            <a:off x="749808" y="1719072"/>
+            <a:ext cx="585216" cy="274320"/>
+          </a:xfrm>
+          <a:prstGeom prst="roundRect">
+            <a:avLst>
+              <a:gd name="adj" fmla="val 16667"/>
+            </a:avLst>
+          </a:prstGeom>
+          <a:solidFill>
+            <a:srgbClr val="1A2433"/>
+          </a:solidFill>
+          <a:ln w="6350">
+            <a:solidFill>
+              <a:srgbClr val="1A2433"/>
+            </a:solidFill>
+            <a:prstDash val="solid"/>
+          </a:ln>
+        </p:spPr>
+      </p:sp>
+      <p:sp>
+        <p:nvSpPr>
+          <p:cNvPr id="9" name="Text 6"/>
+          <p:cNvSpPr/>
+          <p:nvPr/>
+        </p:nvSpPr>
+        <p:spPr>
+          <a:xfrm>
+            <a:off x="749808" y="1719072"/>
+            <a:ext cx="585216" cy="274320"/>
+          </a:xfrm>
+          <a:prstGeom prst="rect">
+            <a:avLst/>
+          </a:prstGeom>
+          <a:noFill/>
+          <a:ln/>
+        </p:spPr>
+        <p:txBody>
+          <a:bodyPr wrap="square" lIns="0" tIns="0" rIns="0" bIns="0" rtlCol="0" anchor="ctr"/>
+          <a:lstStyle/>
+          <a:p>
+            <a:pPr algn="ctr" indent="0" marL="0">
+              <a:buNone/>
+            </a:pPr>
+            <a:r>
+              <a:rPr lang="en-US" sz="950" b="1" dirty="0">
+                <a:solidFill>
+                  <a:srgbClr val="FFFFFF"/>
+                </a:solidFill>
+                <a:latin typeface="Calibri" pitchFamily="34" charset="0"/>
+                <a:ea typeface="Calibri" pitchFamily="34" charset="-122"/>
+                <a:cs typeface="Calibri" pitchFamily="34" charset="-120"/>
+              </a:rPr>
+              <a:t>DEV</a:t>
+            </a:r>
+            <a:endParaRPr lang="en-US" sz="950" dirty="0"/>
+          </a:p>
+        </p:txBody>
+      </p:sp>
+      <p:sp>
+        <p:nvSpPr>
+          <p:cNvPr id="10" name="Text 7"/>
+          <p:cNvSpPr/>
+          <p:nvPr/>
+        </p:nvSpPr>
+        <p:spPr>
+          <a:xfrm>
+            <a:off x="1389888" y="1691640"/>
+            <a:ext cx="1188720" cy="329184"/>
+          </a:xfrm>
+          <a:prstGeom prst="rect">
+            <a:avLst/>
+          </a:prstGeom>
+          <a:noFill/>
+          <a:ln/>
+        </p:spPr>
+        <p:txBody>
+          <a:bodyPr wrap="square" lIns="0" tIns="0" rIns="0" bIns="0" rtlCol="0" anchor="ctr"/>
+          <a:lstStyle/>
+          <a:p>
+            <a:pPr indent="0" marL="0">
+              <a:buNone/>
+            </a:pPr>
+            <a:r>
+              <a:rPr lang="en-US" sz="1350" dirty="0">
+                <a:solidFill>
+                  <a:srgbClr val="1A2433"/>
+                </a:solidFill>
+                <a:latin typeface="Georgia" pitchFamily="34" charset="0"/>
+                <a:ea typeface="Georgia" pitchFamily="34" charset="-122"/>
+                <a:cs typeface="Georgia" pitchFamily="34" charset="-120"/>
+              </a:rPr>
+              <a:t>Development</a:t>
+            </a:r>
+            <a:endParaRPr lang="en-US" sz="1350" dirty="0"/>
+          </a:p>
+        </p:txBody>
+      </p:sp>
+      <p:sp>
+        <p:nvSpPr>
+          <p:cNvPr id="11" name="Text 8"/>
+          <p:cNvSpPr/>
+          <p:nvPr/>
+        </p:nvSpPr>
+        <p:spPr>
+          <a:xfrm>
+            <a:off x="749808" y="2048256"/>
+            <a:ext cx="1810512" cy="420624"/>
+          </a:xfrm>
+          <a:prstGeom prst="rect">
+            <a:avLst/>
+          </a:prstGeom>
+          <a:noFill/>
+          <a:ln/>
+        </p:spPr>
+        <p:txBody>
+          <a:bodyPr wrap="square" lIns="0" tIns="0" rIns="0" bIns="0" rtlCol="0" anchor="t"/>
+          <a:lstStyle/>
+          <a:p>
+            <a:pPr indent="0" marL="0">
+              <a:lnSpc>
+                <a:spcPct val="104000"/>
+              </a:lnSpc>
+              <a:buNone/>
+            </a:pPr>
+            <a:r>
+              <a:rPr lang="en-US" sz="850" dirty="0">
+                <a:solidFill>
+                  <a:srgbClr val="68707E"/>
+                </a:solidFill>
+                <a:latin typeface="Calibri" pitchFamily="34" charset="0"/>
+                <a:ea typeface="Calibri" pitchFamily="34" charset="-122"/>
+                <a:cs typeface="Calibri" pitchFamily="34" charset="-120"/>
+              </a:rPr>
+              <a:t>What must exist before anything else on this page can be true.</a:t>
+            </a:r>
+            <a:endParaRPr lang="en-US" sz="850" dirty="0"/>
+          </a:p>
+        </p:txBody>
+      </p:sp>
+      <p:sp>
+        <p:nvSpPr>
+          <p:cNvPr id="12" name="Shape 9"/>
+          <p:cNvSpPr/>
+          <p:nvPr/>
+        </p:nvSpPr>
+        <p:spPr>
+          <a:xfrm>
+            <a:off x="2871216" y="1536192"/>
+            <a:ext cx="2871216" cy="1005840"/>
+          </a:xfrm>
+          <a:prstGeom prst="roundRect">
+            <a:avLst>
+              <a:gd name="adj" fmla="val 5455"/>
             </a:avLst>
           </a:prstGeom>
           <a:solidFill>
@@ -4818,200 +5334,53 @@
       </p:sp>
       <p:sp>
         <p:nvSpPr>
-          <p:cNvPr id="8" name="Shape 5"/>
-          <p:cNvSpPr/>
-          <p:nvPr/>
-        </p:nvSpPr>
-        <p:spPr>
-          <a:xfrm>
-            <a:off x="804672" y="1719072"/>
-            <a:ext cx="420624" cy="420624"/>
-          </a:xfrm>
-          <a:prstGeom prst="roundRect">
-            <a:avLst>
-              <a:gd name="adj" fmla="val 10870"/>
-            </a:avLst>
-          </a:prstGeom>
-          <a:solidFill>
-            <a:srgbClr val="1A2433"/>
-          </a:solidFill>
-          <a:ln w="6350">
-            <a:solidFill>
-              <a:srgbClr val="1A2433"/>
-            </a:solidFill>
-            <a:prstDash val="solid"/>
-          </a:ln>
-        </p:spPr>
-      </p:sp>
-      <p:sp>
-        <p:nvSpPr>
-          <p:cNvPr id="9" name="Text 6"/>
-          <p:cNvSpPr/>
-          <p:nvPr/>
-        </p:nvSpPr>
-        <p:spPr>
-          <a:xfrm>
-            <a:off x="804672" y="1719072"/>
-            <a:ext cx="420624" cy="420624"/>
-          </a:xfrm>
-          <a:prstGeom prst="rect">
-            <a:avLst/>
-          </a:prstGeom>
-          <a:noFill/>
-          <a:ln/>
-        </p:spPr>
-        <p:txBody>
-          <a:bodyPr wrap="square" lIns="0" tIns="0" rIns="0" bIns="0" rtlCol="0" anchor="ctr"/>
-          <a:lstStyle/>
-          <a:p>
-            <a:pPr algn="ctr" indent="0" marL="0">
-              <a:buNone/>
-            </a:pPr>
-            <a:r>
-              <a:rPr lang="en-US" sz="1150" b="1" dirty="0">
-                <a:solidFill>
-                  <a:srgbClr val="FFFFFF"/>
-                </a:solidFill>
-                <a:latin typeface="Calibri" pitchFamily="34" charset="0"/>
-                <a:ea typeface="Calibri" pitchFamily="34" charset="-122"/>
-                <a:cs typeface="Calibri" pitchFamily="34" charset="-120"/>
-              </a:rPr>
-              <a:t>M1</a:t>
-            </a:r>
-            <a:endParaRPr lang="en-US" sz="1150" dirty="0"/>
-          </a:p>
-        </p:txBody>
-      </p:sp>
-      <p:sp>
-        <p:nvSpPr>
-          <p:cNvPr id="10" name="Text 7"/>
-          <p:cNvSpPr/>
-          <p:nvPr/>
-        </p:nvSpPr>
-        <p:spPr>
-          <a:xfrm>
-            <a:off x="1316736" y="1755648"/>
-            <a:ext cx="2578608" cy="347472"/>
-          </a:xfrm>
-          <a:prstGeom prst="rect">
-            <a:avLst/>
-          </a:prstGeom>
-          <a:noFill/>
-          <a:ln/>
-        </p:spPr>
-        <p:txBody>
-          <a:bodyPr wrap="square" lIns="0" tIns="0" rIns="0" bIns="0" rtlCol="0" anchor="ctr"/>
-          <a:lstStyle/>
-          <a:p>
-            <a:pPr indent="0" marL="0">
-              <a:buNone/>
-            </a:pPr>
-            <a:r>
-              <a:rPr lang="en-US" sz="950" b="1" spc="120" kern="0" dirty="0">
-                <a:solidFill>
-                  <a:srgbClr val="68707E"/>
-                </a:solidFill>
-                <a:latin typeface="Calibri" pitchFamily="34" charset="0"/>
-                <a:ea typeface="Calibri" pitchFamily="34" charset="-122"/>
-                <a:cs typeface="Calibri" pitchFamily="34" charset="-120"/>
-              </a:rPr>
-              <a:t>Weeks 1–2 · Aug 17 – Aug 30</a:t>
-            </a:r>
-            <a:endParaRPr lang="en-US" sz="950" dirty="0"/>
-          </a:p>
-        </p:txBody>
-      </p:sp>
-      <p:sp>
-        <p:nvSpPr>
-          <p:cNvPr id="11" name="Text 8"/>
-          <p:cNvSpPr/>
-          <p:nvPr/>
-        </p:nvSpPr>
-        <p:spPr>
-          <a:xfrm>
-            <a:off x="804672" y="2249424"/>
-            <a:ext cx="3063240" cy="475488"/>
-          </a:xfrm>
-          <a:prstGeom prst="rect">
-            <a:avLst/>
-          </a:prstGeom>
-          <a:noFill/>
-          <a:ln/>
-        </p:spPr>
-        <p:txBody>
-          <a:bodyPr wrap="square" lIns="0" tIns="0" rIns="0" bIns="0" rtlCol="0" anchor="t"/>
-          <a:lstStyle/>
-          <a:p>
-            <a:pPr indent="0" marL="0">
-              <a:lnSpc>
-                <a:spcPct val="100000"/>
-              </a:lnSpc>
-              <a:buNone/>
-            </a:pPr>
-            <a:r>
-              <a:rPr lang="en-US" sz="1700" dirty="0">
+          <p:cNvPr id="13" name="Text 10"/>
+          <p:cNvSpPr/>
+          <p:nvPr/>
+        </p:nvSpPr>
+        <p:spPr>
+          <a:xfrm>
+            <a:off x="3054096" y="1682496"/>
+            <a:ext cx="2505456" cy="219456"/>
+          </a:xfrm>
+          <a:prstGeom prst="rect">
+            <a:avLst/>
+          </a:prstGeom>
+          <a:noFill/>
+          <a:ln/>
+        </p:spPr>
+        <p:txBody>
+          <a:bodyPr wrap="square" lIns="0" tIns="0" rIns="0" bIns="0" rtlCol="0" anchor="ctr"/>
+          <a:lstStyle/>
+          <a:p>
+            <a:pPr indent="0" marL="0">
+              <a:buNone/>
+            </a:pPr>
+            <a:r>
+              <a:rPr lang="en-US" sz="900" b="1" spc="110" kern="0" dirty="0">
                 <a:solidFill>
                   <a:srgbClr val="1A2433"/>
                 </a:solidFill>
-                <a:latin typeface="Georgia" pitchFamily="34" charset="0"/>
-                <a:ea typeface="Georgia" pitchFamily="34" charset="-122"/>
-                <a:cs typeface="Georgia" pitchFamily="34" charset="-120"/>
-              </a:rPr>
-              <a:t>First outside reports</a:t>
-            </a:r>
-            <a:endParaRPr lang="en-US" sz="1700" dirty="0"/>
-          </a:p>
-        </p:txBody>
-      </p:sp>
-      <p:sp>
-        <p:nvSpPr>
-          <p:cNvPr id="12" name="Text 9"/>
-          <p:cNvSpPr/>
-          <p:nvPr/>
-        </p:nvSpPr>
-        <p:spPr>
-          <a:xfrm>
-            <a:off x="804672" y="2779776"/>
-            <a:ext cx="1828800" cy="201168"/>
-          </a:xfrm>
-          <a:prstGeom prst="rect">
-            <a:avLst/>
-          </a:prstGeom>
-          <a:noFill/>
-          <a:ln/>
-        </p:spPr>
-        <p:txBody>
-          <a:bodyPr wrap="square" lIns="0" tIns="0" rIns="0" bIns="0" rtlCol="0" anchor="ctr"/>
-          <a:lstStyle/>
-          <a:p>
-            <a:pPr indent="0" marL="0">
-              <a:buNone/>
-            </a:pPr>
-            <a:r>
-              <a:rPr lang="en-US" sz="950" b="1" spc="130" kern="0" dirty="0">
-                <a:solidFill>
-                  <a:srgbClr val="B91C1C"/>
-                </a:solidFill>
-                <a:latin typeface="Calibri" pitchFamily="34" charset="0"/>
-                <a:ea typeface="Calibri" pitchFamily="34" charset="-122"/>
-                <a:cs typeface="Calibri" pitchFamily="34" charset="-120"/>
-              </a:rPr>
-              <a:t>DONE WHEN</a:t>
-            </a:r>
-            <a:endParaRPr lang="en-US" sz="950" dirty="0"/>
-          </a:p>
-        </p:txBody>
-      </p:sp>
-      <p:sp>
-        <p:nvSpPr>
-          <p:cNvPr id="13" name="Text 10"/>
-          <p:cNvSpPr/>
-          <p:nvPr/>
-        </p:nvSpPr>
-        <p:spPr>
-          <a:xfrm>
-            <a:off x="804672" y="2980944"/>
-            <a:ext cx="3063240" cy="512064"/>
+                <a:latin typeface="Calibri" pitchFamily="34" charset="0"/>
+                <a:ea typeface="Calibri" pitchFamily="34" charset="-122"/>
+                <a:cs typeface="Calibri" pitchFamily="34" charset="-120"/>
+              </a:rPr>
+              <a:t>D1  ·  Week 1</a:t>
+            </a:r>
+            <a:endParaRPr lang="en-US" sz="900" dirty="0"/>
+          </a:p>
+        </p:txBody>
+      </p:sp>
+      <p:sp>
+        <p:nvSpPr>
+          <p:cNvPr id="14" name="Text 11"/>
+          <p:cNvSpPr/>
+          <p:nvPr/>
+        </p:nvSpPr>
+        <p:spPr>
+          <a:xfrm>
+            <a:off x="3054096" y="1901952"/>
+            <a:ext cx="2505456" cy="548640"/>
           </a:xfrm>
           <a:prstGeom prst="rect">
             <a:avLst/>
@@ -5030,34 +5399,34 @@
               <a:buNone/>
             </a:pPr>
             <a:r>
-              <a:rPr lang="en-US" sz="1050" dirty="0">
-                <a:solidFill>
-                  <a:srgbClr val="374253"/>
-                </a:solidFill>
-                <a:latin typeface="Calibri" pitchFamily="34" charset="0"/>
-                <a:ea typeface="Calibri" pitchFamily="34" charset="-122"/>
-                <a:cs typeface="Calibri" pitchFamily="34" charset="-120"/>
-              </a:rPr>
-              <a:t>Ten reports run by people who are not the owner. Read off /admin's visitor funnel by distinct visitor id.</a:t>
-            </a:r>
-            <a:endParaRPr lang="en-US" sz="1050" dirty="0"/>
-          </a:p>
-        </p:txBody>
-      </p:sp>
-      <p:sp>
-        <p:nvSpPr>
-          <p:cNvPr id="14" name="Shape 11"/>
-          <p:cNvSpPr/>
-          <p:nvPr/>
-        </p:nvSpPr>
-        <p:spPr>
-          <a:xfrm>
-            <a:off x="4306824" y="1481328"/>
-            <a:ext cx="3538728" cy="2212848"/>
+              <a:rPr lang="en-US" sz="1100" b="1" dirty="0">
+                <a:solidFill>
+                  <a:srgbClr val="1A2433"/>
+                </a:solidFill>
+                <a:latin typeface="Calibri" pitchFamily="34" charset="0"/>
+                <a:ea typeface="Calibri" pitchFamily="34" charset="-122"/>
+                <a:cs typeface="Calibri" pitchFamily="34" charset="-120"/>
+              </a:rPr>
+              <a:t>Outreach runs live for the first time</a:t>
+            </a:r>
+            <a:endParaRPr lang="en-US" sz="1100" dirty="0"/>
+          </a:p>
+        </p:txBody>
+      </p:sp>
+      <p:sp>
+        <p:nvSpPr>
+          <p:cNvPr id="15" name="Shape 12"/>
+          <p:cNvSpPr/>
+          <p:nvPr/>
+        </p:nvSpPr>
+        <p:spPr>
+          <a:xfrm>
+            <a:off x="5888736" y="1536192"/>
+            <a:ext cx="2871216" cy="1005840"/>
           </a:xfrm>
           <a:prstGeom prst="roundRect">
             <a:avLst>
-              <a:gd name="adj" fmla="val 2479"/>
+              <a:gd name="adj" fmla="val 5455"/>
             </a:avLst>
           </a:prstGeom>
           <a:solidFill>
@@ -5073,67 +5442,40 @@
       </p:sp>
       <p:sp>
         <p:nvSpPr>
-          <p:cNvPr id="15" name="Shape 12"/>
-          <p:cNvSpPr/>
-          <p:nvPr/>
-        </p:nvSpPr>
-        <p:spPr>
-          <a:xfrm>
-            <a:off x="4544568" y="1719072"/>
-            <a:ext cx="420624" cy="420624"/>
-          </a:xfrm>
-          <a:prstGeom prst="roundRect">
-            <a:avLst>
-              <a:gd name="adj" fmla="val 10870"/>
-            </a:avLst>
-          </a:prstGeom>
-          <a:solidFill>
-            <a:srgbClr val="1A2433"/>
-          </a:solidFill>
-          <a:ln w="6350">
-            <a:solidFill>
-              <a:srgbClr val="1A2433"/>
-            </a:solidFill>
-            <a:prstDash val="solid"/>
-          </a:ln>
-        </p:spPr>
-      </p:sp>
-      <p:sp>
-        <p:nvSpPr>
           <p:cNvPr id="16" name="Text 13"/>
           <p:cNvSpPr/>
           <p:nvPr/>
         </p:nvSpPr>
         <p:spPr>
           <a:xfrm>
-            <a:off x="4544568" y="1719072"/>
-            <a:ext cx="420624" cy="420624"/>
-          </a:xfrm>
-          <a:prstGeom prst="rect">
-            <a:avLst/>
-          </a:prstGeom>
-          <a:noFill/>
-          <a:ln/>
-        </p:spPr>
-        <p:txBody>
-          <a:bodyPr wrap="square" lIns="0" tIns="0" rIns="0" bIns="0" rtlCol="0" anchor="ctr"/>
-          <a:lstStyle/>
-          <a:p>
-            <a:pPr algn="ctr" indent="0" marL="0">
-              <a:buNone/>
-            </a:pPr>
-            <a:r>
-              <a:rPr lang="en-US" sz="1150" b="1" dirty="0">
-                <a:solidFill>
-                  <a:srgbClr val="FFFFFF"/>
-                </a:solidFill>
-                <a:latin typeface="Calibri" pitchFamily="34" charset="0"/>
-                <a:ea typeface="Calibri" pitchFamily="34" charset="-122"/>
-                <a:cs typeface="Calibri" pitchFamily="34" charset="-120"/>
-              </a:rPr>
-              <a:t>M2</a:t>
-            </a:r>
-            <a:endParaRPr lang="en-US" sz="1150" dirty="0"/>
+            <a:off x="6071616" y="1682496"/>
+            <a:ext cx="2505456" cy="219456"/>
+          </a:xfrm>
+          <a:prstGeom prst="rect">
+            <a:avLst/>
+          </a:prstGeom>
+          <a:noFill/>
+          <a:ln/>
+        </p:spPr>
+        <p:txBody>
+          <a:bodyPr wrap="square" lIns="0" tIns="0" rIns="0" bIns="0" rtlCol="0" anchor="ctr"/>
+          <a:lstStyle/>
+          <a:p>
+            <a:pPr indent="0" marL="0">
+              <a:buNone/>
+            </a:pPr>
+            <a:r>
+              <a:rPr lang="en-US" sz="900" b="1" spc="110" kern="0" dirty="0">
+                <a:solidFill>
+                  <a:srgbClr val="1A2433"/>
+                </a:solidFill>
+                <a:latin typeface="Calibri" pitchFamily="34" charset="0"/>
+                <a:ea typeface="Calibri" pitchFamily="34" charset="-122"/>
+                <a:cs typeface="Calibri" pitchFamily="34" charset="-120"/>
+              </a:rPr>
+              <a:t>D2  ·  Week 3</a:t>
+            </a:r>
+            <a:endParaRPr lang="en-US" sz="900" dirty="0"/>
           </a:p>
         </p:txBody>
       </p:sp>
@@ -5145,128 +5487,8 @@
         </p:nvSpPr>
         <p:spPr>
           <a:xfrm>
-            <a:off x="5056632" y="1755648"/>
-            <a:ext cx="2578608" cy="347472"/>
-          </a:xfrm>
-          <a:prstGeom prst="rect">
-            <a:avLst/>
-          </a:prstGeom>
-          <a:noFill/>
-          <a:ln/>
-        </p:spPr>
-        <p:txBody>
-          <a:bodyPr wrap="square" lIns="0" tIns="0" rIns="0" bIns="0" rtlCol="0" anchor="ctr"/>
-          <a:lstStyle/>
-          <a:p>
-            <a:pPr indent="0" marL="0">
-              <a:buNone/>
-            </a:pPr>
-            <a:r>
-              <a:rPr lang="en-US" sz="950" b="1" spc="120" kern="0" dirty="0">
-                <a:solidFill>
-                  <a:srgbClr val="68707E"/>
-                </a:solidFill>
-                <a:latin typeface="Calibri" pitchFamily="34" charset="0"/>
-                <a:ea typeface="Calibri" pitchFamily="34" charset="-122"/>
-                <a:cs typeface="Calibri" pitchFamily="34" charset="-120"/>
-              </a:rPr>
-              <a:t>Weeks 3–4 · Aug 31 – Sep 13</a:t>
-            </a:r>
-            <a:endParaRPr lang="en-US" sz="950" dirty="0"/>
-          </a:p>
-        </p:txBody>
-      </p:sp>
-      <p:sp>
-        <p:nvSpPr>
-          <p:cNvPr id="18" name="Text 15"/>
-          <p:cNvSpPr/>
-          <p:nvPr/>
-        </p:nvSpPr>
-        <p:spPr>
-          <a:xfrm>
-            <a:off x="4544568" y="2249424"/>
-            <a:ext cx="3063240" cy="475488"/>
-          </a:xfrm>
-          <a:prstGeom prst="rect">
-            <a:avLst/>
-          </a:prstGeom>
-          <a:noFill/>
-          <a:ln/>
-        </p:spPr>
-        <p:txBody>
-          <a:bodyPr wrap="square" lIns="0" tIns="0" rIns="0" bIns="0" rtlCol="0" anchor="t"/>
-          <a:lstStyle/>
-          <a:p>
-            <a:pPr indent="0" marL="0">
-              <a:lnSpc>
-                <a:spcPct val="100000"/>
-              </a:lnSpc>
-              <a:buNone/>
-            </a:pPr>
-            <a:r>
-              <a:rPr lang="en-US" sz="1700" dirty="0">
-                <a:solidFill>
-                  <a:srgbClr val="1A2433"/>
-                </a:solidFill>
-                <a:latin typeface="Georgia" pitchFamily="34" charset="0"/>
-                <a:ea typeface="Georgia" pitchFamily="34" charset="-122"/>
-                <a:cs typeface="Georgia" pitchFamily="34" charset="-120"/>
-              </a:rPr>
-              <a:t>First outside broker</a:t>
-            </a:r>
-            <a:endParaRPr lang="en-US" sz="1700" dirty="0"/>
-          </a:p>
-        </p:txBody>
-      </p:sp>
-      <p:sp>
-        <p:nvSpPr>
-          <p:cNvPr id="19" name="Text 16"/>
-          <p:cNvSpPr/>
-          <p:nvPr/>
-        </p:nvSpPr>
-        <p:spPr>
-          <a:xfrm>
-            <a:off x="4544568" y="2779776"/>
-            <a:ext cx="1828800" cy="201168"/>
-          </a:xfrm>
-          <a:prstGeom prst="rect">
-            <a:avLst/>
-          </a:prstGeom>
-          <a:noFill/>
-          <a:ln/>
-        </p:spPr>
-        <p:txBody>
-          <a:bodyPr wrap="square" lIns="0" tIns="0" rIns="0" bIns="0" rtlCol="0" anchor="ctr"/>
-          <a:lstStyle/>
-          <a:p>
-            <a:pPr indent="0" marL="0">
-              <a:buNone/>
-            </a:pPr>
-            <a:r>
-              <a:rPr lang="en-US" sz="950" b="1" spc="130" kern="0" dirty="0">
-                <a:solidFill>
-                  <a:srgbClr val="B91C1C"/>
-                </a:solidFill>
-                <a:latin typeface="Calibri" pitchFamily="34" charset="0"/>
-                <a:ea typeface="Calibri" pitchFamily="34" charset="-122"/>
-                <a:cs typeface="Calibri" pitchFamily="34" charset="-120"/>
-              </a:rPr>
-              <a:t>DONE WHEN</a:t>
-            </a:r>
-            <a:endParaRPr lang="en-US" sz="950" dirty="0"/>
-          </a:p>
-        </p:txBody>
-      </p:sp>
-      <p:sp>
-        <p:nvSpPr>
-          <p:cNvPr id="20" name="Text 17"/>
-          <p:cNvSpPr/>
-          <p:nvPr/>
-        </p:nvSpPr>
-        <p:spPr>
-          <a:xfrm>
-            <a:off x="4544568" y="2980944"/>
-            <a:ext cx="3063240" cy="512064"/>
+            <a:off x="6071616" y="1901952"/>
+            <a:ext cx="2505456" cy="548640"/>
           </a:xfrm>
           <a:prstGeom prst="rect">
             <a:avLst/>
@@ -5285,34 +5507,34 @@
               <a:buNone/>
             </a:pPr>
             <a:r>
-              <a:rPr lang="en-US" sz="1050" dirty="0">
-                <a:solidFill>
-                  <a:srgbClr val="374253"/>
-                </a:solidFill>
-                <a:latin typeface="Calibri" pitchFamily="34" charset="0"/>
-                <a:ea typeface="Calibri" pitchFamily="34" charset="-122"/>
-                <a:cs typeface="Calibri" pitchFamily="34" charset="-120"/>
-              </a:rPr>
-              <a:t>One real book in the vault under a user id that is not ours, published under a stated credit name.</a:t>
-            </a:r>
-            <a:endParaRPr lang="en-US" sz="1050" dirty="0"/>
-          </a:p>
-        </p:txBody>
-      </p:sp>
-      <p:sp>
-        <p:nvSpPr>
-          <p:cNvPr id="21" name="Shape 18"/>
-          <p:cNvSpPr/>
-          <p:nvPr/>
-        </p:nvSpPr>
-        <p:spPr>
-          <a:xfrm>
-            <a:off x="8046720" y="1481328"/>
-            <a:ext cx="3538728" cy="2212848"/>
+              <a:rPr lang="en-US" sz="1100" b="1" dirty="0">
+                <a:solidFill>
+                  <a:srgbClr val="1A2433"/>
+                </a:solidFill>
+                <a:latin typeface="Calibri" pitchFamily="34" charset="0"/>
+                <a:ea typeface="Calibri" pitchFamily="34" charset="-122"/>
+                <a:cs typeface="Calibri" pitchFamily="34" charset="-120"/>
+              </a:rPr>
+              <a:t>Publishing refuses without a licence</a:t>
+            </a:r>
+            <a:endParaRPr lang="en-US" sz="1100" dirty="0"/>
+          </a:p>
+        </p:txBody>
+      </p:sp>
+      <p:sp>
+        <p:nvSpPr>
+          <p:cNvPr id="18" name="Shape 15"/>
+          <p:cNvSpPr/>
+          <p:nvPr/>
+        </p:nvSpPr>
+        <p:spPr>
+          <a:xfrm>
+            <a:off x="8906256" y="1536192"/>
+            <a:ext cx="2871216" cy="1005840"/>
           </a:xfrm>
           <a:prstGeom prst="roundRect">
             <a:avLst>
-              <a:gd name="adj" fmla="val 2479"/>
+              <a:gd name="adj" fmla="val 5455"/>
             </a:avLst>
           </a:prstGeom>
           <a:solidFill>
@@ -5328,26 +5550,134 @@
       </p:sp>
       <p:sp>
         <p:nvSpPr>
-          <p:cNvPr id="22" name="Shape 19"/>
-          <p:cNvSpPr/>
-          <p:nvPr/>
-        </p:nvSpPr>
-        <p:spPr>
-          <a:xfrm>
-            <a:off x="8284464" y="1719072"/>
-            <a:ext cx="420624" cy="420624"/>
+          <p:cNvPr id="19" name="Text 16"/>
+          <p:cNvSpPr/>
+          <p:nvPr/>
+        </p:nvSpPr>
+        <p:spPr>
+          <a:xfrm>
+            <a:off x="9089136" y="1682496"/>
+            <a:ext cx="2505456" cy="219456"/>
+          </a:xfrm>
+          <a:prstGeom prst="rect">
+            <a:avLst/>
+          </a:prstGeom>
+          <a:noFill/>
+          <a:ln/>
+        </p:spPr>
+        <p:txBody>
+          <a:bodyPr wrap="square" lIns="0" tIns="0" rIns="0" bIns="0" rtlCol="0" anchor="ctr"/>
+          <a:lstStyle/>
+          <a:p>
+            <a:pPr indent="0" marL="0">
+              <a:buNone/>
+            </a:pPr>
+            <a:r>
+              <a:rPr lang="en-US" sz="900" b="1" spc="110" kern="0" dirty="0">
+                <a:solidFill>
+                  <a:srgbClr val="1A2433"/>
+                </a:solidFill>
+                <a:latin typeface="Calibri" pitchFamily="34" charset="0"/>
+                <a:ea typeface="Calibri" pitchFamily="34" charset="-122"/>
+                <a:cs typeface="Calibri" pitchFamily="34" charset="-120"/>
+              </a:rPr>
+              <a:t>D3  ·  Week 5</a:t>
+            </a:r>
+            <a:endParaRPr lang="en-US" sz="900" dirty="0"/>
+          </a:p>
+        </p:txBody>
+      </p:sp>
+      <p:sp>
+        <p:nvSpPr>
+          <p:cNvPr id="20" name="Text 17"/>
+          <p:cNvSpPr/>
+          <p:nvPr/>
+        </p:nvSpPr>
+        <p:spPr>
+          <a:xfrm>
+            <a:off x="9089136" y="1901952"/>
+            <a:ext cx="2505456" cy="548640"/>
+          </a:xfrm>
+          <a:prstGeom prst="rect">
+            <a:avLst/>
+          </a:prstGeom>
+          <a:noFill/>
+          <a:ln/>
+        </p:spPr>
+        <p:txBody>
+          <a:bodyPr wrap="square" lIns="0" tIns="0" rIns="0" bIns="0" rtlCol="0" anchor="t"/>
+          <a:lstStyle/>
+          <a:p>
+            <a:pPr indent="0" marL="0">
+              <a:lnSpc>
+                <a:spcPct val="106000"/>
+              </a:lnSpc>
+              <a:buNone/>
+            </a:pPr>
+            <a:r>
+              <a:rPr lang="en-US" sz="1100" b="1" dirty="0">
+                <a:solidFill>
+                  <a:srgbClr val="1A2433"/>
+                </a:solidFill>
+                <a:latin typeface="Calibri" pitchFamily="34" charset="0"/>
+                <a:ea typeface="Calibri" pitchFamily="34" charset="-122"/>
+                <a:cs typeface="Calibri" pitchFamily="34" charset="-120"/>
+              </a:rPr>
+              <a:t>The digest sends on a schedule, not by hand</a:t>
+            </a:r>
+            <a:endParaRPr lang="en-US" sz="1100" dirty="0"/>
+          </a:p>
+        </p:txBody>
+      </p:sp>
+      <p:sp>
+        <p:nvSpPr>
+          <p:cNvPr id="21" name="Shape 18"/>
+          <p:cNvSpPr/>
+          <p:nvPr/>
+        </p:nvSpPr>
+        <p:spPr>
+          <a:xfrm>
+            <a:off x="566928" y="2624328"/>
+            <a:ext cx="2157984" cy="1005840"/>
           </a:xfrm>
           <a:prstGeom prst="roundRect">
             <a:avLst>
-              <a:gd name="adj" fmla="val 10870"/>
+              <a:gd name="adj" fmla="val 5455"/>
             </a:avLst>
           </a:prstGeom>
           <a:solidFill>
-            <a:srgbClr val="1A2433"/>
+            <a:srgbClr val="FCF1EF"/>
+          </a:solidFill>
+          <a:ln w="9525">
+            <a:solidFill>
+              <a:srgbClr val="F0C7C7"/>
+            </a:solidFill>
+            <a:prstDash val="solid"/>
+          </a:ln>
+        </p:spPr>
+      </p:sp>
+      <p:sp>
+        <p:nvSpPr>
+          <p:cNvPr id="22" name="Shape 19"/>
+          <p:cNvSpPr/>
+          <p:nvPr/>
+        </p:nvSpPr>
+        <p:spPr>
+          <a:xfrm>
+            <a:off x="749808" y="2807208"/>
+            <a:ext cx="585216" cy="274320"/>
+          </a:xfrm>
+          <a:prstGeom prst="roundRect">
+            <a:avLst>
+              <a:gd name="adj" fmla="val 16667"/>
+            </a:avLst>
+          </a:prstGeom>
+          <a:solidFill>
+            <a:srgbClr val="B91C1C"/>
           </a:solidFill>
           <a:ln w="6350">
             <a:solidFill>
-              <a:srgbClr val="1A2433"/>
+              <a:srgbClr val="B91C1C"/>
             </a:solidFill>
             <a:prstDash val="solid"/>
           </a:ln>
@@ -5361,8 +5691,8 @@
         </p:nvSpPr>
         <p:spPr>
           <a:xfrm>
-            <a:off x="8284464" y="1719072"/>
-            <a:ext cx="420624" cy="420624"/>
+            <a:off x="749808" y="2807208"/>
+            <a:ext cx="585216" cy="274320"/>
           </a:xfrm>
           <a:prstGeom prst="rect">
             <a:avLst/>
@@ -5378,7 +5708,7 @@
               <a:buNone/>
             </a:pPr>
             <a:r>
-              <a:rPr lang="en-US" sz="1150" b="1" dirty="0">
+              <a:rPr lang="en-US" sz="950" b="1" dirty="0">
                 <a:solidFill>
                   <a:srgbClr val="FFFFFF"/>
                 </a:solidFill>
@@ -5386,9 +5716,9 @@
                 <a:ea typeface="Calibri" pitchFamily="34" charset="-122"/>
                 <a:cs typeface="Calibri" pitchFamily="34" charset="-120"/>
               </a:rPr>
-              <a:t>M3</a:t>
-            </a:r>
-            <a:endParaRPr lang="en-US" sz="1150" dirty="0"/>
+              <a:t>USE</a:t>
+            </a:r>
+            <a:endParaRPr lang="en-US" sz="950" dirty="0"/>
           </a:p>
         </p:txBody>
       </p:sp>
@@ -5400,128 +5730,47 @@
         </p:nvSpPr>
         <p:spPr>
           <a:xfrm>
-            <a:off x="8796528" y="1755648"/>
-            <a:ext cx="2578608" cy="347472"/>
-          </a:xfrm>
-          <a:prstGeom prst="rect">
-            <a:avLst/>
-          </a:prstGeom>
-          <a:noFill/>
-          <a:ln/>
-        </p:spPr>
-        <p:txBody>
-          <a:bodyPr wrap="square" lIns="0" tIns="0" rIns="0" bIns="0" rtlCol="0" anchor="ctr"/>
-          <a:lstStyle/>
-          <a:p>
-            <a:pPr indent="0" marL="0">
-              <a:buNone/>
-            </a:pPr>
-            <a:r>
-              <a:rPr lang="en-US" sz="950" b="1" spc="120" kern="0" dirty="0">
-                <a:solidFill>
-                  <a:srgbClr val="68707E"/>
-                </a:solidFill>
-                <a:latin typeface="Calibri" pitchFamily="34" charset="0"/>
-                <a:ea typeface="Calibri" pitchFamily="34" charset="-122"/>
-                <a:cs typeface="Calibri" pitchFamily="34" charset="-120"/>
-              </a:rPr>
-              <a:t>Weeks 5–6 · Sep 14 – Sep 27</a:t>
-            </a:r>
-            <a:endParaRPr lang="en-US" sz="950" dirty="0"/>
-          </a:p>
-        </p:txBody>
-      </p:sp>
-      <p:sp>
-        <p:nvSpPr>
-          <p:cNvPr id="25" name="Text 22"/>
-          <p:cNvSpPr/>
-          <p:nvPr/>
-        </p:nvSpPr>
-        <p:spPr>
-          <a:xfrm>
-            <a:off x="8284464" y="2249424"/>
-            <a:ext cx="3063240" cy="475488"/>
-          </a:xfrm>
-          <a:prstGeom prst="rect">
-            <a:avLst/>
-          </a:prstGeom>
-          <a:noFill/>
-          <a:ln/>
-        </p:spPr>
-        <p:txBody>
-          <a:bodyPr wrap="square" lIns="0" tIns="0" rIns="0" bIns="0" rtlCol="0" anchor="t"/>
-          <a:lstStyle/>
-          <a:p>
-            <a:pPr indent="0" marL="0">
-              <a:lnSpc>
-                <a:spcPct val="100000"/>
-              </a:lnSpc>
-              <a:buNone/>
-            </a:pPr>
-            <a:r>
-              <a:rPr lang="en-US" sz="1700" dirty="0">
-                <a:solidFill>
-                  <a:srgbClr val="1A2433"/>
+            <a:off x="1389888" y="2779776"/>
+            <a:ext cx="1188720" cy="329184"/>
+          </a:xfrm>
+          <a:prstGeom prst="rect">
+            <a:avLst/>
+          </a:prstGeom>
+          <a:noFill/>
+          <a:ln/>
+        </p:spPr>
+        <p:txBody>
+          <a:bodyPr wrap="square" lIns="0" tIns="0" rIns="0" bIns="0" rtlCol="0" anchor="ctr"/>
+          <a:lstStyle/>
+          <a:p>
+            <a:pPr indent="0" marL="0">
+              <a:buNone/>
+            </a:pPr>
+            <a:r>
+              <a:rPr lang="en-US" sz="1350" dirty="0">
+                <a:solidFill>
+                  <a:srgbClr val="7F1D1D"/>
                 </a:solidFill>
                 <a:latin typeface="Georgia" pitchFamily="34" charset="0"/>
                 <a:ea typeface="Georgia" pitchFamily="34" charset="-122"/>
                 <a:cs typeface="Georgia" pitchFamily="34" charset="-120"/>
               </a:rPr>
-              <a:t>Someone comes back</a:t>
-            </a:r>
-            <a:endParaRPr lang="en-US" sz="1700" dirty="0"/>
-          </a:p>
-        </p:txBody>
-      </p:sp>
-      <p:sp>
-        <p:nvSpPr>
-          <p:cNvPr id="26" name="Text 23"/>
-          <p:cNvSpPr/>
-          <p:nvPr/>
-        </p:nvSpPr>
-        <p:spPr>
-          <a:xfrm>
-            <a:off x="8284464" y="2779776"/>
-            <a:ext cx="1828800" cy="201168"/>
-          </a:xfrm>
-          <a:prstGeom prst="rect">
-            <a:avLst/>
-          </a:prstGeom>
-          <a:noFill/>
-          <a:ln/>
-        </p:spPr>
-        <p:txBody>
-          <a:bodyPr wrap="square" lIns="0" tIns="0" rIns="0" bIns="0" rtlCol="0" anchor="ctr"/>
-          <a:lstStyle/>
-          <a:p>
-            <a:pPr indent="0" marL="0">
-              <a:buNone/>
-            </a:pPr>
-            <a:r>
-              <a:rPr lang="en-US" sz="950" b="1" spc="130" kern="0" dirty="0">
-                <a:solidFill>
-                  <a:srgbClr val="B91C1C"/>
-                </a:solidFill>
-                <a:latin typeface="Calibri" pitchFamily="34" charset="0"/>
-                <a:ea typeface="Calibri" pitchFamily="34" charset="-122"/>
-                <a:cs typeface="Calibri" pitchFamily="34" charset="-120"/>
-              </a:rPr>
-              <a:t>DONE WHEN</a:t>
-            </a:r>
-            <a:endParaRPr lang="en-US" sz="950" dirty="0"/>
-          </a:p>
-        </p:txBody>
-      </p:sp>
-      <p:sp>
-        <p:nvSpPr>
-          <p:cNvPr id="27" name="Text 24"/>
-          <p:cNvSpPr/>
-          <p:nvPr/>
-        </p:nvSpPr>
-        <p:spPr>
-          <a:xfrm>
-            <a:off x="8284464" y="2980944"/>
-            <a:ext cx="3063240" cy="512064"/>
+              <a:t>Users</a:t>
+            </a:r>
+            <a:endParaRPr lang="en-US" sz="1350" dirty="0"/>
+          </a:p>
+        </p:txBody>
+      </p:sp>
+      <p:sp>
+        <p:nvSpPr>
+          <p:cNvPr id="25" name="Text 22"/>
+          <p:cNvSpPr/>
+          <p:nvPr/>
+        </p:nvSpPr>
+        <p:spPr>
+          <a:xfrm>
+            <a:off x="749808" y="3136392"/>
+            <a:ext cx="1810512" cy="420624"/>
           </a:xfrm>
           <a:prstGeom prst="rect">
             <a:avLst/>
@@ -5535,39 +5784,39 @@
           <a:p>
             <a:pPr indent="0" marL="0">
               <a:lnSpc>
-                <a:spcPct val="106000"/>
+                <a:spcPct val="104000"/>
               </a:lnSpc>
               <a:buNone/>
             </a:pPr>
             <a:r>
-              <a:rPr lang="en-US" sz="1050" dirty="0">
-                <a:solidFill>
-                  <a:srgbClr val="374253"/>
-                </a:solidFill>
-                <a:latin typeface="Calibri" pitchFamily="34" charset="0"/>
-                <a:ea typeface="Calibri" pitchFamily="34" charset="-122"/>
-                <a:cs typeface="Calibri" pitchFamily="34" charset="-120"/>
-              </a:rPr>
-              <a:t>A person returns and runs a second report without us prompting them. Repeat visitor id across sessions.</a:t>
-            </a:r>
-            <a:endParaRPr lang="en-US" sz="1050" dirty="0"/>
-          </a:p>
-        </p:txBody>
-      </p:sp>
-      <p:sp>
-        <p:nvSpPr>
-          <p:cNvPr id="28" name="Shape 25"/>
-          <p:cNvSpPr/>
-          <p:nvPr/>
-        </p:nvSpPr>
-        <p:spPr>
-          <a:xfrm>
-            <a:off x="566928" y="3877056"/>
-            <a:ext cx="3538728" cy="2212848"/>
+              <a:rPr lang="en-US" sz="850" dirty="0">
+                <a:solidFill>
+                  <a:srgbClr val="68707E"/>
+                </a:solidFill>
+                <a:latin typeface="Calibri" pitchFamily="34" charset="0"/>
+                <a:ea typeface="Calibri" pitchFamily="34" charset="-122"/>
+                <a:cs typeface="Calibri" pitchFamily="34" charset="-120"/>
+              </a:rPr>
+              <a:t>People who are not us, doing the thing without being asked.</a:t>
+            </a:r>
+            <a:endParaRPr lang="en-US" sz="850" dirty="0"/>
+          </a:p>
+        </p:txBody>
+      </p:sp>
+      <p:sp>
+        <p:nvSpPr>
+          <p:cNvPr id="26" name="Shape 23"/>
+          <p:cNvSpPr/>
+          <p:nvPr/>
+        </p:nvSpPr>
+        <p:spPr>
+          <a:xfrm>
+            <a:off x="2871216" y="2624328"/>
+            <a:ext cx="2871216" cy="1005840"/>
           </a:xfrm>
           <a:prstGeom prst="roundRect">
             <a:avLst>
-              <a:gd name="adj" fmla="val 2479"/>
+              <a:gd name="adj" fmla="val 5455"/>
             </a:avLst>
           </a:prstGeom>
           <a:solidFill>
@@ -5583,200 +5832,53 @@
       </p:sp>
       <p:sp>
         <p:nvSpPr>
-          <p:cNvPr id="29" name="Shape 26"/>
-          <p:cNvSpPr/>
-          <p:nvPr/>
-        </p:nvSpPr>
-        <p:spPr>
-          <a:xfrm>
-            <a:off x="804672" y="4114800"/>
-            <a:ext cx="420624" cy="420624"/>
-          </a:xfrm>
-          <a:prstGeom prst="roundRect">
-            <a:avLst>
-              <a:gd name="adj" fmla="val 10870"/>
-            </a:avLst>
-          </a:prstGeom>
-          <a:solidFill>
-            <a:srgbClr val="1A2433"/>
-          </a:solidFill>
-          <a:ln w="6350">
-            <a:solidFill>
-              <a:srgbClr val="1A2433"/>
-            </a:solidFill>
-            <a:prstDash val="solid"/>
-          </a:ln>
-        </p:spPr>
-      </p:sp>
-      <p:sp>
-        <p:nvSpPr>
-          <p:cNvPr id="30" name="Text 27"/>
-          <p:cNvSpPr/>
-          <p:nvPr/>
-        </p:nvSpPr>
-        <p:spPr>
-          <a:xfrm>
-            <a:off x="804672" y="4114800"/>
-            <a:ext cx="420624" cy="420624"/>
-          </a:xfrm>
-          <a:prstGeom prst="rect">
-            <a:avLst/>
-          </a:prstGeom>
-          <a:noFill/>
-          <a:ln/>
-        </p:spPr>
-        <p:txBody>
-          <a:bodyPr wrap="square" lIns="0" tIns="0" rIns="0" bIns="0" rtlCol="0" anchor="ctr"/>
-          <a:lstStyle/>
-          <a:p>
-            <a:pPr algn="ctr" indent="0" marL="0">
-              <a:buNone/>
-            </a:pPr>
-            <a:r>
-              <a:rPr lang="en-US" sz="1150" b="1" dirty="0">
-                <a:solidFill>
-                  <a:srgbClr val="FFFFFF"/>
-                </a:solidFill>
-                <a:latin typeface="Calibri" pitchFamily="34" charset="0"/>
-                <a:ea typeface="Calibri" pitchFamily="34" charset="-122"/>
-                <a:cs typeface="Calibri" pitchFamily="34" charset="-120"/>
-              </a:rPr>
-              <a:t>M4</a:t>
-            </a:r>
-            <a:endParaRPr lang="en-US" sz="1150" dirty="0"/>
-          </a:p>
-        </p:txBody>
-      </p:sp>
-      <p:sp>
-        <p:nvSpPr>
-          <p:cNvPr id="31" name="Text 28"/>
-          <p:cNvSpPr/>
-          <p:nvPr/>
-        </p:nvSpPr>
-        <p:spPr>
-          <a:xfrm>
-            <a:off x="1316736" y="4151376"/>
-            <a:ext cx="2578608" cy="347472"/>
-          </a:xfrm>
-          <a:prstGeom prst="rect">
-            <a:avLst/>
-          </a:prstGeom>
-          <a:noFill/>
-          <a:ln/>
-        </p:spPr>
-        <p:txBody>
-          <a:bodyPr wrap="square" lIns="0" tIns="0" rIns="0" bIns="0" rtlCol="0" anchor="ctr"/>
-          <a:lstStyle/>
-          <a:p>
-            <a:pPr indent="0" marL="0">
-              <a:buNone/>
-            </a:pPr>
-            <a:r>
-              <a:rPr lang="en-US" sz="950" b="1" spc="120" kern="0" dirty="0">
-                <a:solidFill>
-                  <a:srgbClr val="68707E"/>
-                </a:solidFill>
-                <a:latin typeface="Calibri" pitchFamily="34" charset="0"/>
-                <a:ea typeface="Calibri" pitchFamily="34" charset="-122"/>
-                <a:cs typeface="Calibri" pitchFamily="34" charset="-120"/>
-              </a:rPr>
-              <a:t>Weeks 7–8 · Sep 28 – Oct 11</a:t>
-            </a:r>
-            <a:endParaRPr lang="en-US" sz="950" dirty="0"/>
-          </a:p>
-        </p:txBody>
-      </p:sp>
-      <p:sp>
-        <p:nvSpPr>
-          <p:cNvPr id="32" name="Text 29"/>
-          <p:cNvSpPr/>
-          <p:nvPr/>
-        </p:nvSpPr>
-        <p:spPr>
-          <a:xfrm>
-            <a:off x="804672" y="4645152"/>
-            <a:ext cx="3063240" cy="475488"/>
-          </a:xfrm>
-          <a:prstGeom prst="rect">
-            <a:avLst/>
-          </a:prstGeom>
-          <a:noFill/>
-          <a:ln/>
-        </p:spPr>
-        <p:txBody>
-          <a:bodyPr wrap="square" lIns="0" tIns="0" rIns="0" bIns="0" rtlCol="0" anchor="t"/>
-          <a:lstStyle/>
-          <a:p>
-            <a:pPr indent="0" marL="0">
-              <a:lnSpc>
-                <a:spcPct val="100000"/>
-              </a:lnSpc>
-              <a:buNone/>
-            </a:pPr>
-            <a:r>
-              <a:rPr lang="en-US" sz="1700" dirty="0">
-                <a:solidFill>
-                  <a:srgbClr val="1A2433"/>
-                </a:solidFill>
-                <a:latin typeface="Georgia" pitchFamily="34" charset="0"/>
-                <a:ea typeface="Georgia" pitchFamily="34" charset="-122"/>
-                <a:cs typeface="Georgia" pitchFamily="34" charset="-120"/>
-              </a:rPr>
-              <a:t>First paid conversion</a:t>
-            </a:r>
-            <a:endParaRPr lang="en-US" sz="1700" dirty="0"/>
-          </a:p>
-        </p:txBody>
-      </p:sp>
-      <p:sp>
-        <p:nvSpPr>
-          <p:cNvPr id="33" name="Text 30"/>
-          <p:cNvSpPr/>
-          <p:nvPr/>
-        </p:nvSpPr>
-        <p:spPr>
-          <a:xfrm>
-            <a:off x="804672" y="5175504"/>
-            <a:ext cx="1828800" cy="201168"/>
-          </a:xfrm>
-          <a:prstGeom prst="rect">
-            <a:avLst/>
-          </a:prstGeom>
-          <a:noFill/>
-          <a:ln/>
-        </p:spPr>
-        <p:txBody>
-          <a:bodyPr wrap="square" lIns="0" tIns="0" rIns="0" bIns="0" rtlCol="0" anchor="ctr"/>
-          <a:lstStyle/>
-          <a:p>
-            <a:pPr indent="0" marL="0">
-              <a:buNone/>
-            </a:pPr>
-            <a:r>
-              <a:rPr lang="en-US" sz="950" b="1" spc="130" kern="0" dirty="0">
-                <a:solidFill>
-                  <a:srgbClr val="B91C1C"/>
-                </a:solidFill>
-                <a:latin typeface="Calibri" pitchFamily="34" charset="0"/>
-                <a:ea typeface="Calibri" pitchFamily="34" charset="-122"/>
-                <a:cs typeface="Calibri" pitchFamily="34" charset="-120"/>
-              </a:rPr>
-              <a:t>DONE WHEN</a:t>
-            </a:r>
-            <a:endParaRPr lang="en-US" sz="950" dirty="0"/>
-          </a:p>
-        </p:txBody>
-      </p:sp>
-      <p:sp>
-        <p:nvSpPr>
-          <p:cNvPr id="34" name="Text 31"/>
-          <p:cNvSpPr/>
-          <p:nvPr/>
-        </p:nvSpPr>
-        <p:spPr>
-          <a:xfrm>
-            <a:off x="804672" y="5376672"/>
-            <a:ext cx="3063240" cy="512064"/>
+          <p:cNvPr id="27" name="Text 24"/>
+          <p:cNvSpPr/>
+          <p:nvPr/>
+        </p:nvSpPr>
+        <p:spPr>
+          <a:xfrm>
+            <a:off x="3054096" y="2770632"/>
+            <a:ext cx="2505456" cy="219456"/>
+          </a:xfrm>
+          <a:prstGeom prst="rect">
+            <a:avLst/>
+          </a:prstGeom>
+          <a:noFill/>
+          <a:ln/>
+        </p:spPr>
+        <p:txBody>
+          <a:bodyPr wrap="square" lIns="0" tIns="0" rIns="0" bIns="0" rtlCol="0" anchor="ctr"/>
+          <a:lstStyle/>
+          <a:p>
+            <a:pPr indent="0" marL="0">
+              <a:buNone/>
+            </a:pPr>
+            <a:r>
+              <a:rPr lang="en-US" sz="900" b="1" spc="110" kern="0" dirty="0">
+                <a:solidFill>
+                  <a:srgbClr val="7F1D1D"/>
+                </a:solidFill>
+                <a:latin typeface="Calibri" pitchFamily="34" charset="0"/>
+                <a:ea typeface="Calibri" pitchFamily="34" charset="-122"/>
+                <a:cs typeface="Calibri" pitchFamily="34" charset="-120"/>
+              </a:rPr>
+              <a:t>U1  ·  Week 2</a:t>
+            </a:r>
+            <a:endParaRPr lang="en-US" sz="900" dirty="0"/>
+          </a:p>
+        </p:txBody>
+      </p:sp>
+      <p:sp>
+        <p:nvSpPr>
+          <p:cNvPr id="28" name="Text 25"/>
+          <p:cNvSpPr/>
+          <p:nvPr/>
+        </p:nvSpPr>
+        <p:spPr>
+          <a:xfrm>
+            <a:off x="3054096" y="2990088"/>
+            <a:ext cx="2505456" cy="548640"/>
           </a:xfrm>
           <a:prstGeom prst="rect">
             <a:avLst/>
@@ -5795,34 +5897,34 @@
               <a:buNone/>
             </a:pPr>
             <a:r>
-              <a:rPr lang="en-US" sz="1050" dirty="0">
-                <a:solidFill>
-                  <a:srgbClr val="374253"/>
-                </a:solidFill>
-                <a:latin typeface="Calibri" pitchFamily="34" charset="0"/>
-                <a:ea typeface="Calibri" pitchFamily="34" charset="-122"/>
-                <a:cs typeface="Calibri" pitchFamily="34" charset="-120"/>
-              </a:rPr>
-              <a:t>A stranger pays. One subscription or report_purchases row that is not a test card and not staff.</a:t>
-            </a:r>
-            <a:endParaRPr lang="en-US" sz="1050" dirty="0"/>
-          </a:p>
-        </p:txBody>
-      </p:sp>
-      <p:sp>
-        <p:nvSpPr>
-          <p:cNvPr id="35" name="Shape 32"/>
-          <p:cNvSpPr/>
-          <p:nvPr/>
-        </p:nvSpPr>
-        <p:spPr>
-          <a:xfrm>
-            <a:off x="4306824" y="3877056"/>
-            <a:ext cx="3538728" cy="2212848"/>
+              <a:rPr lang="en-US" sz="1100" b="1" dirty="0">
+                <a:solidFill>
+                  <a:srgbClr val="1A2433"/>
+                </a:solidFill>
+                <a:latin typeface="Calibri" pitchFamily="34" charset="0"/>
+                <a:ea typeface="Calibri" pitchFamily="34" charset="-122"/>
+                <a:cs typeface="Calibri" pitchFamily="34" charset="-120"/>
+              </a:rPr>
+              <a:t>Ten reports run by people who are not us</a:t>
+            </a:r>
+            <a:endParaRPr lang="en-US" sz="1100" dirty="0"/>
+          </a:p>
+        </p:txBody>
+      </p:sp>
+      <p:sp>
+        <p:nvSpPr>
+          <p:cNvPr id="29" name="Shape 26"/>
+          <p:cNvSpPr/>
+          <p:nvPr/>
+        </p:nvSpPr>
+        <p:spPr>
+          <a:xfrm>
+            <a:off x="5888736" y="2624328"/>
+            <a:ext cx="2871216" cy="1005840"/>
           </a:xfrm>
           <a:prstGeom prst="roundRect">
             <a:avLst>
-              <a:gd name="adj" fmla="val 2479"/>
+              <a:gd name="adj" fmla="val 5455"/>
             </a:avLst>
           </a:prstGeom>
           <a:solidFill>
@@ -5838,200 +5940,53 @@
       </p:sp>
       <p:sp>
         <p:nvSpPr>
-          <p:cNvPr id="36" name="Shape 33"/>
-          <p:cNvSpPr/>
-          <p:nvPr/>
-        </p:nvSpPr>
-        <p:spPr>
-          <a:xfrm>
-            <a:off x="4544568" y="4114800"/>
-            <a:ext cx="420624" cy="420624"/>
-          </a:xfrm>
-          <a:prstGeom prst="roundRect">
-            <a:avLst>
-              <a:gd name="adj" fmla="val 10870"/>
-            </a:avLst>
-          </a:prstGeom>
-          <a:solidFill>
-            <a:srgbClr val="1A2433"/>
-          </a:solidFill>
-          <a:ln w="6350">
-            <a:solidFill>
-              <a:srgbClr val="1A2433"/>
-            </a:solidFill>
-            <a:prstDash val="solid"/>
-          </a:ln>
-        </p:spPr>
-      </p:sp>
-      <p:sp>
-        <p:nvSpPr>
-          <p:cNvPr id="37" name="Text 34"/>
-          <p:cNvSpPr/>
-          <p:nvPr/>
-        </p:nvSpPr>
-        <p:spPr>
-          <a:xfrm>
-            <a:off x="4544568" y="4114800"/>
-            <a:ext cx="420624" cy="420624"/>
-          </a:xfrm>
-          <a:prstGeom prst="rect">
-            <a:avLst/>
-          </a:prstGeom>
-          <a:noFill/>
-          <a:ln/>
-        </p:spPr>
-        <p:txBody>
-          <a:bodyPr wrap="square" lIns="0" tIns="0" rIns="0" bIns="0" rtlCol="0" anchor="ctr"/>
-          <a:lstStyle/>
-          <a:p>
-            <a:pPr algn="ctr" indent="0" marL="0">
-              <a:buNone/>
-            </a:pPr>
-            <a:r>
-              <a:rPr lang="en-US" sz="1150" b="1" dirty="0">
-                <a:solidFill>
-                  <a:srgbClr val="FFFFFF"/>
-                </a:solidFill>
-                <a:latin typeface="Calibri" pitchFamily="34" charset="0"/>
-                <a:ea typeface="Calibri" pitchFamily="34" charset="-122"/>
-                <a:cs typeface="Calibri" pitchFamily="34" charset="-120"/>
-              </a:rPr>
-              <a:t>M5</a:t>
-            </a:r>
-            <a:endParaRPr lang="en-US" sz="1150" dirty="0"/>
-          </a:p>
-        </p:txBody>
-      </p:sp>
-      <p:sp>
-        <p:nvSpPr>
-          <p:cNvPr id="38" name="Text 35"/>
-          <p:cNvSpPr/>
-          <p:nvPr/>
-        </p:nvSpPr>
-        <p:spPr>
-          <a:xfrm>
-            <a:off x="5056632" y="4151376"/>
-            <a:ext cx="2578608" cy="347472"/>
-          </a:xfrm>
-          <a:prstGeom prst="rect">
-            <a:avLst/>
-          </a:prstGeom>
-          <a:noFill/>
-          <a:ln/>
-        </p:spPr>
-        <p:txBody>
-          <a:bodyPr wrap="square" lIns="0" tIns="0" rIns="0" bIns="0" rtlCol="0" anchor="ctr"/>
-          <a:lstStyle/>
-          <a:p>
-            <a:pPr indent="0" marL="0">
-              <a:buNone/>
-            </a:pPr>
-            <a:r>
-              <a:rPr lang="en-US" sz="950" b="1" spc="120" kern="0" dirty="0">
-                <a:solidFill>
-                  <a:srgbClr val="68707E"/>
-                </a:solidFill>
-                <a:latin typeface="Calibri" pitchFamily="34" charset="0"/>
-                <a:ea typeface="Calibri" pitchFamily="34" charset="-122"/>
-                <a:cs typeface="Calibri" pitchFamily="34" charset="-120"/>
-              </a:rPr>
-              <a:t>Weeks 9–10 · Oct 12 – Oct 25</a:t>
-            </a:r>
-            <a:endParaRPr lang="en-US" sz="950" dirty="0"/>
-          </a:p>
-        </p:txBody>
-      </p:sp>
-      <p:sp>
-        <p:nvSpPr>
-          <p:cNvPr id="39" name="Text 36"/>
-          <p:cNvSpPr/>
-          <p:nvPr/>
-        </p:nvSpPr>
-        <p:spPr>
-          <a:xfrm>
-            <a:off x="4544568" y="4645152"/>
-            <a:ext cx="3063240" cy="475488"/>
-          </a:xfrm>
-          <a:prstGeom prst="rect">
-            <a:avLst/>
-          </a:prstGeom>
-          <a:noFill/>
-          <a:ln/>
-        </p:spPr>
-        <p:txBody>
-          <a:bodyPr wrap="square" lIns="0" tIns="0" rIns="0" bIns="0" rtlCol="0" anchor="t"/>
-          <a:lstStyle/>
-          <a:p>
-            <a:pPr indent="0" marL="0">
-              <a:lnSpc>
-                <a:spcPct val="100000"/>
-              </a:lnSpc>
-              <a:buNone/>
-            </a:pPr>
-            <a:r>
-              <a:rPr lang="en-US" sz="1700" dirty="0">
-                <a:solidFill>
-                  <a:srgbClr val="1A2433"/>
-                </a:solidFill>
-                <a:latin typeface="Georgia" pitchFamily="34" charset="0"/>
-                <a:ea typeface="Georgia" pitchFamily="34" charset="-122"/>
-                <a:cs typeface="Georgia" pitchFamily="34" charset="-120"/>
-              </a:rPr>
-              <a:t>Corpus density</a:t>
-            </a:r>
-            <a:endParaRPr lang="en-US" sz="1700" dirty="0"/>
-          </a:p>
-        </p:txBody>
-      </p:sp>
-      <p:sp>
-        <p:nvSpPr>
-          <p:cNvPr id="40" name="Text 37"/>
-          <p:cNvSpPr/>
-          <p:nvPr/>
-        </p:nvSpPr>
-        <p:spPr>
-          <a:xfrm>
-            <a:off x="4544568" y="5175504"/>
-            <a:ext cx="1828800" cy="201168"/>
-          </a:xfrm>
-          <a:prstGeom prst="rect">
-            <a:avLst/>
-          </a:prstGeom>
-          <a:noFill/>
-          <a:ln/>
-        </p:spPr>
-        <p:txBody>
-          <a:bodyPr wrap="square" lIns="0" tIns="0" rIns="0" bIns="0" rtlCol="0" anchor="ctr"/>
-          <a:lstStyle/>
-          <a:p>
-            <a:pPr indent="0" marL="0">
-              <a:buNone/>
-            </a:pPr>
-            <a:r>
-              <a:rPr lang="en-US" sz="950" b="1" spc="130" kern="0" dirty="0">
-                <a:solidFill>
-                  <a:srgbClr val="B91C1C"/>
-                </a:solidFill>
-                <a:latin typeface="Calibri" pitchFamily="34" charset="0"/>
-                <a:ea typeface="Calibri" pitchFamily="34" charset="-122"/>
-                <a:cs typeface="Calibri" pitchFamily="34" charset="-120"/>
-              </a:rPr>
-              <a:t>DONE WHEN</a:t>
-            </a:r>
-            <a:endParaRPr lang="en-US" sz="950" dirty="0"/>
-          </a:p>
-        </p:txBody>
-      </p:sp>
-      <p:sp>
-        <p:nvSpPr>
-          <p:cNvPr id="41" name="Text 38"/>
-          <p:cNvSpPr/>
-          <p:nvPr/>
-        </p:nvSpPr>
-        <p:spPr>
-          <a:xfrm>
-            <a:off x="4544568" y="5376672"/>
-            <a:ext cx="3063240" cy="512064"/>
+          <p:cNvPr id="30" name="Text 27"/>
+          <p:cNvSpPr/>
+          <p:nvPr/>
+        </p:nvSpPr>
+        <p:spPr>
+          <a:xfrm>
+            <a:off x="6071616" y="2770632"/>
+            <a:ext cx="2505456" cy="219456"/>
+          </a:xfrm>
+          <a:prstGeom prst="rect">
+            <a:avLst/>
+          </a:prstGeom>
+          <a:noFill/>
+          <a:ln/>
+        </p:spPr>
+        <p:txBody>
+          <a:bodyPr wrap="square" lIns="0" tIns="0" rIns="0" bIns="0" rtlCol="0" anchor="ctr"/>
+          <a:lstStyle/>
+          <a:p>
+            <a:pPr indent="0" marL="0">
+              <a:buNone/>
+            </a:pPr>
+            <a:r>
+              <a:rPr lang="en-US" sz="900" b="1" spc="110" kern="0" dirty="0">
+                <a:solidFill>
+                  <a:srgbClr val="7F1D1D"/>
+                </a:solidFill>
+                <a:latin typeface="Calibri" pitchFamily="34" charset="0"/>
+                <a:ea typeface="Calibri" pitchFamily="34" charset="-122"/>
+                <a:cs typeface="Calibri" pitchFamily="34" charset="-120"/>
+              </a:rPr>
+              <a:t>U2  ·  Week 6</a:t>
+            </a:r>
+            <a:endParaRPr lang="en-US" sz="900" dirty="0"/>
+          </a:p>
+        </p:txBody>
+      </p:sp>
+      <p:sp>
+        <p:nvSpPr>
+          <p:cNvPr id="31" name="Text 28"/>
+          <p:cNvSpPr/>
+          <p:nvPr/>
+        </p:nvSpPr>
+        <p:spPr>
+          <a:xfrm>
+            <a:off x="6071616" y="2990088"/>
+            <a:ext cx="2505456" cy="548640"/>
           </a:xfrm>
           <a:prstGeom prst="rect">
             <a:avLst/>
@@ -6050,34 +6005,34 @@
               <a:buNone/>
             </a:pPr>
             <a:r>
-              <a:rPr lang="en-US" sz="1050" dirty="0">
-                <a:solidFill>
-                  <a:srgbClr val="374253"/>
-                </a:solidFill>
-                <a:latin typeface="Calibri" pitchFamily="34" charset="0"/>
-                <a:ea typeface="Calibri" pitchFamily="34" charset="-122"/>
-                <a:cs typeface="Calibri" pitchFamily="34" charset="-120"/>
-              </a:rPr>
-              <a:t>Ten or more market/type buckets holding 8+ provenance-good comps — the roadmap's own gate for the browse page.</a:t>
-            </a:r>
-            <a:endParaRPr lang="en-US" sz="1050" dirty="0"/>
-          </a:p>
-        </p:txBody>
-      </p:sp>
-      <p:sp>
-        <p:nvSpPr>
-          <p:cNvPr id="42" name="Shape 39"/>
-          <p:cNvSpPr/>
-          <p:nvPr/>
-        </p:nvSpPr>
-        <p:spPr>
-          <a:xfrm>
-            <a:off x="8046720" y="3877056"/>
-            <a:ext cx="3538728" cy="2212848"/>
+              <a:rPr lang="en-US" sz="1100" b="1" dirty="0">
+                <a:solidFill>
+                  <a:srgbClr val="1A2433"/>
+                </a:solidFill>
+                <a:latin typeface="Calibri" pitchFamily="34" charset="0"/>
+                <a:ea typeface="Calibri" pitchFamily="34" charset="-122"/>
+                <a:cs typeface="Calibri" pitchFamily="34" charset="-120"/>
+              </a:rPr>
+              <a:t>Somebody returns without being prompted</a:t>
+            </a:r>
+            <a:endParaRPr lang="en-US" sz="1100" dirty="0"/>
+          </a:p>
+        </p:txBody>
+      </p:sp>
+      <p:sp>
+        <p:nvSpPr>
+          <p:cNvPr id="32" name="Shape 29"/>
+          <p:cNvSpPr/>
+          <p:nvPr/>
+        </p:nvSpPr>
+        <p:spPr>
+          <a:xfrm>
+            <a:off x="8906256" y="2624328"/>
+            <a:ext cx="2871216" cy="1005840"/>
           </a:xfrm>
           <a:prstGeom prst="roundRect">
             <a:avLst>
-              <a:gd name="adj" fmla="val 2479"/>
+              <a:gd name="adj" fmla="val 5455"/>
             </a:avLst>
           </a:prstGeom>
           <a:solidFill>
@@ -6093,26 +6048,134 @@
       </p:sp>
       <p:sp>
         <p:nvSpPr>
-          <p:cNvPr id="43" name="Shape 40"/>
-          <p:cNvSpPr/>
-          <p:nvPr/>
-        </p:nvSpPr>
-        <p:spPr>
-          <a:xfrm>
-            <a:off x="8284464" y="4114800"/>
-            <a:ext cx="420624" cy="420624"/>
+          <p:cNvPr id="33" name="Text 30"/>
+          <p:cNvSpPr/>
+          <p:nvPr/>
+        </p:nvSpPr>
+        <p:spPr>
+          <a:xfrm>
+            <a:off x="9089136" y="2770632"/>
+            <a:ext cx="2505456" cy="219456"/>
+          </a:xfrm>
+          <a:prstGeom prst="rect">
+            <a:avLst/>
+          </a:prstGeom>
+          <a:noFill/>
+          <a:ln/>
+        </p:spPr>
+        <p:txBody>
+          <a:bodyPr wrap="square" lIns="0" tIns="0" rIns="0" bIns="0" rtlCol="0" anchor="ctr"/>
+          <a:lstStyle/>
+          <a:p>
+            <a:pPr indent="0" marL="0">
+              <a:buNone/>
+            </a:pPr>
+            <a:r>
+              <a:rPr lang="en-US" sz="900" b="1" spc="110" kern="0" dirty="0">
+                <a:solidFill>
+                  <a:srgbClr val="7F1D1D"/>
+                </a:solidFill>
+                <a:latin typeface="Calibri" pitchFamily="34" charset="0"/>
+                <a:ea typeface="Calibri" pitchFamily="34" charset="-122"/>
+                <a:cs typeface="Calibri" pitchFamily="34" charset="-120"/>
+              </a:rPr>
+              <a:t>U3  ·  Week 10</a:t>
+            </a:r>
+            <a:endParaRPr lang="en-US" sz="900" dirty="0"/>
+          </a:p>
+        </p:txBody>
+      </p:sp>
+      <p:sp>
+        <p:nvSpPr>
+          <p:cNvPr id="34" name="Text 31"/>
+          <p:cNvSpPr/>
+          <p:nvPr/>
+        </p:nvSpPr>
+        <p:spPr>
+          <a:xfrm>
+            <a:off x="9089136" y="2990088"/>
+            <a:ext cx="2505456" cy="548640"/>
+          </a:xfrm>
+          <a:prstGeom prst="rect">
+            <a:avLst/>
+          </a:prstGeom>
+          <a:noFill/>
+          <a:ln/>
+        </p:spPr>
+        <p:txBody>
+          <a:bodyPr wrap="square" lIns="0" tIns="0" rIns="0" bIns="0" rtlCol="0" anchor="t"/>
+          <a:lstStyle/>
+          <a:p>
+            <a:pPr indent="0" marL="0">
+              <a:lnSpc>
+                <a:spcPct val="106000"/>
+              </a:lnSpc>
+              <a:buNone/>
+            </a:pPr>
+            <a:r>
+              <a:rPr lang="en-US" sz="1100" b="1" dirty="0">
+                <a:solidFill>
+                  <a:srgbClr val="1A2433"/>
+                </a:solidFill>
+                <a:latin typeface="Calibri" pitchFamily="34" charset="0"/>
+                <a:ea typeface="Calibri" pitchFamily="34" charset="-122"/>
+                <a:cs typeface="Calibri" pitchFamily="34" charset="-120"/>
+              </a:rPr>
+              <a:t>Ten market buckets hold eight good comps</a:t>
+            </a:r>
+            <a:endParaRPr lang="en-US" sz="1100" dirty="0"/>
+          </a:p>
+        </p:txBody>
+      </p:sp>
+      <p:sp>
+        <p:nvSpPr>
+          <p:cNvPr id="35" name="Shape 32"/>
+          <p:cNvSpPr/>
+          <p:nvPr/>
+        </p:nvSpPr>
+        <p:spPr>
+          <a:xfrm>
+            <a:off x="566928" y="3712464"/>
+            <a:ext cx="2157984" cy="1005840"/>
           </a:xfrm>
           <a:prstGeom prst="roundRect">
             <a:avLst>
-              <a:gd name="adj" fmla="val 10870"/>
+              <a:gd name="adj" fmla="val 5455"/>
             </a:avLst>
           </a:prstGeom>
           <a:solidFill>
-            <a:srgbClr val="1A2433"/>
+            <a:srgbClr val="EDE9F8"/>
+          </a:solidFill>
+          <a:ln w="9525">
+            <a:solidFill>
+              <a:srgbClr val="C4B5FD"/>
+            </a:solidFill>
+            <a:prstDash val="solid"/>
+          </a:ln>
+        </p:spPr>
+      </p:sp>
+      <p:sp>
+        <p:nvSpPr>
+          <p:cNvPr id="36" name="Shape 33"/>
+          <p:cNvSpPr/>
+          <p:nvPr/>
+        </p:nvSpPr>
+        <p:spPr>
+          <a:xfrm>
+            <a:off x="749808" y="3895344"/>
+            <a:ext cx="585216" cy="274320"/>
+          </a:xfrm>
+          <a:prstGeom prst="roundRect">
+            <a:avLst>
+              <a:gd name="adj" fmla="val 16667"/>
+            </a:avLst>
+          </a:prstGeom>
+          <a:solidFill>
+            <a:srgbClr val="4C3A8C"/>
           </a:solidFill>
           <a:ln w="6350">
             <a:solidFill>
-              <a:srgbClr val="1A2433"/>
+              <a:srgbClr val="4C3A8C"/>
             </a:solidFill>
             <a:prstDash val="solid"/>
           </a:ln>
@@ -6120,14 +6183,14 @@
       </p:sp>
       <p:sp>
         <p:nvSpPr>
-          <p:cNvPr id="44" name="Text 41"/>
-          <p:cNvSpPr/>
-          <p:nvPr/>
-        </p:nvSpPr>
-        <p:spPr>
-          <a:xfrm>
-            <a:off x="8284464" y="4114800"/>
-            <a:ext cx="420624" cy="420624"/>
+          <p:cNvPr id="37" name="Text 34"/>
+          <p:cNvSpPr/>
+          <p:nvPr/>
+        </p:nvSpPr>
+        <p:spPr>
+          <a:xfrm>
+            <a:off x="749808" y="3895344"/>
+            <a:ext cx="585216" cy="274320"/>
           </a:xfrm>
           <a:prstGeom prst="rect">
             <a:avLst/>
@@ -6143,7 +6206,7 @@
               <a:buNone/>
             </a:pPr>
             <a:r>
-              <a:rPr lang="en-US" sz="1150" b="1" dirty="0">
+              <a:rPr lang="en-US" sz="950" b="1" dirty="0">
                 <a:solidFill>
                   <a:srgbClr val="FFFFFF"/>
                 </a:solidFill>
@@ -6151,46 +6214,7 @@
                 <a:ea typeface="Calibri" pitchFamily="34" charset="-122"/>
                 <a:cs typeface="Calibri" pitchFamily="34" charset="-120"/>
               </a:rPr>
-              <a:t>M6</a:t>
-            </a:r>
-            <a:endParaRPr lang="en-US" sz="1150" dirty="0"/>
-          </a:p>
-        </p:txBody>
-      </p:sp>
-      <p:sp>
-        <p:nvSpPr>
-          <p:cNvPr id="45" name="Text 42"/>
-          <p:cNvSpPr/>
-          <p:nvPr/>
-        </p:nvSpPr>
-        <p:spPr>
-          <a:xfrm>
-            <a:off x="8796528" y="4151376"/>
-            <a:ext cx="2578608" cy="347472"/>
-          </a:xfrm>
-          <a:prstGeom prst="rect">
-            <a:avLst/>
-          </a:prstGeom>
-          <a:noFill/>
-          <a:ln/>
-        </p:spPr>
-        <p:txBody>
-          <a:bodyPr wrap="square" lIns="0" tIns="0" rIns="0" bIns="0" rtlCol="0" anchor="ctr"/>
-          <a:lstStyle/>
-          <a:p>
-            <a:pPr indent="0" marL="0">
-              <a:buNone/>
-            </a:pPr>
-            <a:r>
-              <a:rPr lang="en-US" sz="950" b="1" spc="120" kern="0" dirty="0">
-                <a:solidFill>
-                  <a:srgbClr val="68707E"/>
-                </a:solidFill>
-                <a:latin typeface="Calibri" pitchFamily="34" charset="0"/>
-                <a:ea typeface="Calibri" pitchFamily="34" charset="-122"/>
-                <a:cs typeface="Calibri" pitchFamily="34" charset="-120"/>
-              </a:rPr>
-              <a:t>Weeks 11–12 · Oct 26 – Nov 08</a:t>
+              <a:t>REL</a:t>
             </a:r>
             <a:endParaRPr lang="en-US" sz="950" dirty="0"/>
           </a:p>
@@ -6198,95 +6222,161 @@
       </p:sp>
       <p:sp>
         <p:nvSpPr>
-          <p:cNvPr id="46" name="Text 43"/>
-          <p:cNvSpPr/>
-          <p:nvPr/>
-        </p:nvSpPr>
-        <p:spPr>
-          <a:xfrm>
-            <a:off x="8284464" y="4645152"/>
-            <a:ext cx="3063240" cy="475488"/>
-          </a:xfrm>
-          <a:prstGeom prst="rect">
-            <a:avLst/>
-          </a:prstGeom>
-          <a:noFill/>
-          <a:ln/>
-        </p:spPr>
-        <p:txBody>
-          <a:bodyPr wrap="square" lIns="0" tIns="0" rIns="0" bIns="0" rtlCol="0" anchor="t"/>
-          <a:lstStyle/>
-          <a:p>
-            <a:pPr indent="0" marL="0">
-              <a:lnSpc>
-                <a:spcPct val="100000"/>
-              </a:lnSpc>
-              <a:buNone/>
-            </a:pPr>
-            <a:r>
-              <a:rPr lang="en-US" sz="1700" dirty="0">
-                <a:solidFill>
-                  <a:srgbClr val="1A2433"/>
+          <p:cNvPr id="38" name="Text 35"/>
+          <p:cNvSpPr/>
+          <p:nvPr/>
+        </p:nvSpPr>
+        <p:spPr>
+          <a:xfrm>
+            <a:off x="1389888" y="3867912"/>
+            <a:ext cx="1188720" cy="329184"/>
+          </a:xfrm>
+          <a:prstGeom prst="rect">
+            <a:avLst/>
+          </a:prstGeom>
+          <a:noFill/>
+          <a:ln/>
+        </p:spPr>
+        <p:txBody>
+          <a:bodyPr wrap="square" lIns="0" tIns="0" rIns="0" bIns="0" rtlCol="0" anchor="ctr"/>
+          <a:lstStyle/>
+          <a:p>
+            <a:pPr indent="0" marL="0">
+              <a:buNone/>
+            </a:pPr>
+            <a:r>
+              <a:rPr lang="en-US" sz="1350" dirty="0">
+                <a:solidFill>
+                  <a:srgbClr val="4C3A8C"/>
                 </a:solidFill>
                 <a:latin typeface="Georgia" pitchFamily="34" charset="0"/>
                 <a:ea typeface="Georgia" pitchFamily="34" charset="-122"/>
                 <a:cs typeface="Georgia" pitchFamily="34" charset="-120"/>
               </a:rPr>
-              <a:t>Clearance to grow</a:t>
-            </a:r>
-            <a:endParaRPr lang="en-US" sz="1700" dirty="0"/>
-          </a:p>
-        </p:txBody>
-      </p:sp>
-      <p:sp>
-        <p:nvSpPr>
-          <p:cNvPr id="47" name="Text 44"/>
-          <p:cNvSpPr/>
-          <p:nvPr/>
-        </p:nvSpPr>
-        <p:spPr>
-          <a:xfrm>
-            <a:off x="8284464" y="5175504"/>
-            <a:ext cx="1828800" cy="201168"/>
-          </a:xfrm>
-          <a:prstGeom prst="rect">
-            <a:avLst/>
-          </a:prstGeom>
-          <a:noFill/>
-          <a:ln/>
-        </p:spPr>
-        <p:txBody>
-          <a:bodyPr wrap="square" lIns="0" tIns="0" rIns="0" bIns="0" rtlCol="0" anchor="ctr"/>
-          <a:lstStyle/>
-          <a:p>
-            <a:pPr indent="0" marL="0">
-              <a:buNone/>
-            </a:pPr>
-            <a:r>
-              <a:rPr lang="en-US" sz="950" b="1" spc="130" kern="0" dirty="0">
-                <a:solidFill>
-                  <a:srgbClr val="B91C1C"/>
-                </a:solidFill>
-                <a:latin typeface="Calibri" pitchFamily="34" charset="0"/>
-                <a:ea typeface="Calibri" pitchFamily="34" charset="-122"/>
-                <a:cs typeface="Calibri" pitchFamily="34" charset="-120"/>
-              </a:rPr>
-              <a:t>DONE WHEN</a:t>
-            </a:r>
-            <a:endParaRPr lang="en-US" sz="950" dirty="0"/>
-          </a:p>
-        </p:txBody>
-      </p:sp>
-      <p:sp>
-        <p:nvSpPr>
-          <p:cNvPr id="48" name="Text 45"/>
-          <p:cNvSpPr/>
-          <p:nvPr/>
-        </p:nvSpPr>
-        <p:spPr>
-          <a:xfrm>
-            <a:off x="8284464" y="5376672"/>
-            <a:ext cx="3063240" cy="512064"/>
+              <a:t>Relationships</a:t>
+            </a:r>
+            <a:endParaRPr lang="en-US" sz="1350" dirty="0"/>
+          </a:p>
+        </p:txBody>
+      </p:sp>
+      <p:sp>
+        <p:nvSpPr>
+          <p:cNvPr id="39" name="Text 36"/>
+          <p:cNvSpPr/>
+          <p:nvPr/>
+        </p:nvSpPr>
+        <p:spPr>
+          <a:xfrm>
+            <a:off x="749808" y="4224528"/>
+            <a:ext cx="1810512" cy="420624"/>
+          </a:xfrm>
+          <a:prstGeom prst="rect">
+            <a:avLst/>
+          </a:prstGeom>
+          <a:noFill/>
+          <a:ln/>
+        </p:spPr>
+        <p:txBody>
+          <a:bodyPr wrap="square" lIns="0" tIns="0" rIns="0" bIns="0" rtlCol="0" anchor="t"/>
+          <a:lstStyle/>
+          <a:p>
+            <a:pPr indent="0" marL="0">
+              <a:lnSpc>
+                <a:spcPct val="104000"/>
+              </a:lnSpc>
+              <a:buNone/>
+            </a:pPr>
+            <a:r>
+              <a:rPr lang="en-US" sz="850" dirty="0">
+                <a:solidFill>
+                  <a:srgbClr val="68707E"/>
+                </a:solidFill>
+                <a:latin typeface="Calibri" pitchFamily="34" charset="0"/>
+                <a:ea typeface="Calibri" pitchFamily="34" charset="-122"/>
+                <a:cs typeface="Calibri" pitchFamily="34" charset="-120"/>
+              </a:rPr>
+              <a:t>Brokers, advisers and counsel — the answers we cannot write ourselves.</a:t>
+            </a:r>
+            <a:endParaRPr lang="en-US" sz="850" dirty="0"/>
+          </a:p>
+        </p:txBody>
+      </p:sp>
+      <p:sp>
+        <p:nvSpPr>
+          <p:cNvPr id="40" name="Shape 37"/>
+          <p:cNvSpPr/>
+          <p:nvPr/>
+        </p:nvSpPr>
+        <p:spPr>
+          <a:xfrm>
+            <a:off x="2871216" y="3712464"/>
+            <a:ext cx="2871216" cy="1005840"/>
+          </a:xfrm>
+          <a:prstGeom prst="roundRect">
+            <a:avLst>
+              <a:gd name="adj" fmla="val 5455"/>
+            </a:avLst>
+          </a:prstGeom>
+          <a:solidFill>
+            <a:srgbClr val="FFFFFF"/>
+          </a:solidFill>
+          <a:ln w="9525">
+            <a:solidFill>
+              <a:srgbClr val="D8D4C9"/>
+            </a:solidFill>
+            <a:prstDash val="solid"/>
+          </a:ln>
+        </p:spPr>
+      </p:sp>
+      <p:sp>
+        <p:nvSpPr>
+          <p:cNvPr id="41" name="Text 38"/>
+          <p:cNvSpPr/>
+          <p:nvPr/>
+        </p:nvSpPr>
+        <p:spPr>
+          <a:xfrm>
+            <a:off x="3054096" y="3858768"/>
+            <a:ext cx="2505456" cy="219456"/>
+          </a:xfrm>
+          <a:prstGeom prst="rect">
+            <a:avLst/>
+          </a:prstGeom>
+          <a:noFill/>
+          <a:ln/>
+        </p:spPr>
+        <p:txBody>
+          <a:bodyPr wrap="square" lIns="0" tIns="0" rIns="0" bIns="0" rtlCol="0" anchor="ctr"/>
+          <a:lstStyle/>
+          <a:p>
+            <a:pPr indent="0" marL="0">
+              <a:buNone/>
+            </a:pPr>
+            <a:r>
+              <a:rPr lang="en-US" sz="900" b="1" spc="110" kern="0" dirty="0">
+                <a:solidFill>
+                  <a:srgbClr val="4C3A8C"/>
+                </a:solidFill>
+                <a:latin typeface="Calibri" pitchFamily="34" charset="0"/>
+                <a:ea typeface="Calibri" pitchFamily="34" charset="-122"/>
+                <a:cs typeface="Calibri" pitchFamily="34" charset="-120"/>
+              </a:rPr>
+              <a:t>R1  ·  Week 4</a:t>
+            </a:r>
+            <a:endParaRPr lang="en-US" sz="900" dirty="0"/>
+          </a:p>
+        </p:txBody>
+      </p:sp>
+      <p:sp>
+        <p:nvSpPr>
+          <p:cNvPr id="42" name="Text 39"/>
+          <p:cNvSpPr/>
+          <p:nvPr/>
+        </p:nvSpPr>
+        <p:spPr>
+          <a:xfrm>
+            <a:off x="3054096" y="4078224"/>
+            <a:ext cx="2505456" cy="548640"/>
           </a:xfrm>
           <a:prstGeom prst="rect">
             <a:avLst/>
@@ -6305,15 +6395,768 @@
               <a:buNone/>
             </a:pPr>
             <a:r>
-              <a:rPr lang="en-US" sz="1050" dirty="0">
-                <a:solidFill>
-                  <a:srgbClr val="374253"/>
-                </a:solidFill>
-                <a:latin typeface="Calibri" pitchFamily="34" charset="0"/>
-                <a:ea typeface="Calibri" pitchFamily="34" charset="-122"/>
-                <a:cs typeface="Calibri" pitchFamily="34" charset="-120"/>
-              </a:rPr>
-              <a:t>The attorney's three answers in writing, and a decided shape for the broker network — or a written reason not to.</a:t>
+              <a:rPr lang="en-US" sz="1100" b="1" dirty="0">
+                <a:solidFill>
+                  <a:srgbClr val="1A2433"/>
+                </a:solidFill>
+                <a:latin typeface="Calibri" pitchFamily="34" charset="0"/>
+                <a:ea typeface="Calibri" pitchFamily="34" charset="-122"/>
+                <a:cs typeface="Calibri" pitchFamily="34" charset="-120"/>
+              </a:rPr>
+              <a:t>Three brokers hold a vault, handed over in person</a:t>
+            </a:r>
+            <a:endParaRPr lang="en-US" sz="1100" dirty="0"/>
+          </a:p>
+        </p:txBody>
+      </p:sp>
+      <p:sp>
+        <p:nvSpPr>
+          <p:cNvPr id="43" name="Shape 40"/>
+          <p:cNvSpPr/>
+          <p:nvPr/>
+        </p:nvSpPr>
+        <p:spPr>
+          <a:xfrm>
+            <a:off x="5888736" y="3712464"/>
+            <a:ext cx="2871216" cy="1005840"/>
+          </a:xfrm>
+          <a:prstGeom prst="roundRect">
+            <a:avLst>
+              <a:gd name="adj" fmla="val 5455"/>
+            </a:avLst>
+          </a:prstGeom>
+          <a:solidFill>
+            <a:srgbClr val="FFFFFF"/>
+          </a:solidFill>
+          <a:ln w="9525">
+            <a:solidFill>
+              <a:srgbClr val="D8D4C9"/>
+            </a:solidFill>
+            <a:prstDash val="solid"/>
+          </a:ln>
+        </p:spPr>
+      </p:sp>
+      <p:sp>
+        <p:nvSpPr>
+          <p:cNvPr id="44" name="Text 41"/>
+          <p:cNvSpPr/>
+          <p:nvPr/>
+        </p:nvSpPr>
+        <p:spPr>
+          <a:xfrm>
+            <a:off x="6071616" y="3858768"/>
+            <a:ext cx="2505456" cy="219456"/>
+          </a:xfrm>
+          <a:prstGeom prst="rect">
+            <a:avLst/>
+          </a:prstGeom>
+          <a:noFill/>
+          <a:ln/>
+        </p:spPr>
+        <p:txBody>
+          <a:bodyPr wrap="square" lIns="0" tIns="0" rIns="0" bIns="0" rtlCol="0" anchor="ctr"/>
+          <a:lstStyle/>
+          <a:p>
+            <a:pPr indent="0" marL="0">
+              <a:buNone/>
+            </a:pPr>
+            <a:r>
+              <a:rPr lang="en-US" sz="900" b="1" spc="110" kern="0" dirty="0">
+                <a:solidFill>
+                  <a:srgbClr val="4C3A8C"/>
+                </a:solidFill>
+                <a:latin typeface="Calibri" pitchFamily="34" charset="0"/>
+                <a:ea typeface="Calibri" pitchFamily="34" charset="-122"/>
+                <a:cs typeface="Calibri" pitchFamily="34" charset="-120"/>
+              </a:rPr>
+              <a:t>R2  ·  Week 9</a:t>
+            </a:r>
+            <a:endParaRPr lang="en-US" sz="900" dirty="0"/>
+          </a:p>
+        </p:txBody>
+      </p:sp>
+      <p:sp>
+        <p:nvSpPr>
+          <p:cNvPr id="45" name="Text 42"/>
+          <p:cNvSpPr/>
+          <p:nvPr/>
+        </p:nvSpPr>
+        <p:spPr>
+          <a:xfrm>
+            <a:off x="6071616" y="4078224"/>
+            <a:ext cx="2505456" cy="548640"/>
+          </a:xfrm>
+          <a:prstGeom prst="rect">
+            <a:avLst/>
+          </a:prstGeom>
+          <a:noFill/>
+          <a:ln/>
+        </p:spPr>
+        <p:txBody>
+          <a:bodyPr wrap="square" lIns="0" tIns="0" rIns="0" bIns="0" rtlCol="0" anchor="t"/>
+          <a:lstStyle/>
+          <a:p>
+            <a:pPr indent="0" marL="0">
+              <a:lnSpc>
+                <a:spcPct val="106000"/>
+              </a:lnSpc>
+              <a:buNone/>
+            </a:pPr>
+            <a:r>
+              <a:rPr lang="en-US" sz="1100" b="1" dirty="0">
+                <a:solidFill>
+                  <a:srgbClr val="1A2433"/>
+                </a:solidFill>
+                <a:latin typeface="Calibri" pitchFamily="34" charset="0"/>
+                <a:ea typeface="Calibri" pitchFamily="34" charset="-122"/>
+                <a:cs typeface="Calibri" pitchFamily="34" charset="-120"/>
+              </a:rPr>
+              <a:t>A broker publishes under their own credit name</a:t>
+            </a:r>
+            <a:endParaRPr lang="en-US" sz="1100" dirty="0"/>
+          </a:p>
+        </p:txBody>
+      </p:sp>
+      <p:sp>
+        <p:nvSpPr>
+          <p:cNvPr id="46" name="Shape 43"/>
+          <p:cNvSpPr/>
+          <p:nvPr/>
+        </p:nvSpPr>
+        <p:spPr>
+          <a:xfrm>
+            <a:off x="8906256" y="3712464"/>
+            <a:ext cx="2871216" cy="1005840"/>
+          </a:xfrm>
+          <a:prstGeom prst="roundRect">
+            <a:avLst>
+              <a:gd name="adj" fmla="val 5455"/>
+            </a:avLst>
+          </a:prstGeom>
+          <a:solidFill>
+            <a:srgbClr val="FFFFFF"/>
+          </a:solidFill>
+          <a:ln w="9525">
+            <a:solidFill>
+              <a:srgbClr val="D8D4C9"/>
+            </a:solidFill>
+            <a:prstDash val="solid"/>
+          </a:ln>
+        </p:spPr>
+      </p:sp>
+      <p:sp>
+        <p:nvSpPr>
+          <p:cNvPr id="47" name="Text 44"/>
+          <p:cNvSpPr/>
+          <p:nvPr/>
+        </p:nvSpPr>
+        <p:spPr>
+          <a:xfrm>
+            <a:off x="9089136" y="3858768"/>
+            <a:ext cx="2505456" cy="219456"/>
+          </a:xfrm>
+          <a:prstGeom prst="rect">
+            <a:avLst/>
+          </a:prstGeom>
+          <a:noFill/>
+          <a:ln/>
+        </p:spPr>
+        <p:txBody>
+          <a:bodyPr wrap="square" lIns="0" tIns="0" rIns="0" bIns="0" rtlCol="0" anchor="ctr"/>
+          <a:lstStyle/>
+          <a:p>
+            <a:pPr indent="0" marL="0">
+              <a:buNone/>
+            </a:pPr>
+            <a:r>
+              <a:rPr lang="en-US" sz="900" b="1" spc="110" kern="0" dirty="0">
+                <a:solidFill>
+                  <a:srgbClr val="4C3A8C"/>
+                </a:solidFill>
+                <a:latin typeface="Calibri" pitchFamily="34" charset="0"/>
+                <a:ea typeface="Calibri" pitchFamily="34" charset="-122"/>
+                <a:cs typeface="Calibri" pitchFamily="34" charset="-120"/>
+              </a:rPr>
+              <a:t>R3  ·  Week 11</a:t>
+            </a:r>
+            <a:endParaRPr lang="en-US" sz="900" dirty="0"/>
+          </a:p>
+        </p:txBody>
+      </p:sp>
+      <p:sp>
+        <p:nvSpPr>
+          <p:cNvPr id="48" name="Text 45"/>
+          <p:cNvSpPr/>
+          <p:nvPr/>
+        </p:nvSpPr>
+        <p:spPr>
+          <a:xfrm>
+            <a:off x="9089136" y="4078224"/>
+            <a:ext cx="2505456" cy="548640"/>
+          </a:xfrm>
+          <a:prstGeom prst="rect">
+            <a:avLst/>
+          </a:prstGeom>
+          <a:noFill/>
+          <a:ln/>
+        </p:spPr>
+        <p:txBody>
+          <a:bodyPr wrap="square" lIns="0" tIns="0" rIns="0" bIns="0" rtlCol="0" anchor="t"/>
+          <a:lstStyle/>
+          <a:p>
+            <a:pPr indent="0" marL="0">
+              <a:lnSpc>
+                <a:spcPct val="106000"/>
+              </a:lnSpc>
+              <a:buNone/>
+            </a:pPr>
+            <a:r>
+              <a:rPr lang="en-US" sz="1100" b="1" dirty="0">
+                <a:solidFill>
+                  <a:srgbClr val="1A2433"/>
+                </a:solidFill>
+                <a:latin typeface="Calibri" pitchFamily="34" charset="0"/>
+                <a:ea typeface="Calibri" pitchFamily="34" charset="-122"/>
+                <a:cs typeface="Calibri" pitchFamily="34" charset="-120"/>
+              </a:rPr>
+              <a:t>The attorney's three answers, in writing</a:t>
+            </a:r>
+            <a:endParaRPr lang="en-US" sz="1100" dirty="0"/>
+          </a:p>
+        </p:txBody>
+      </p:sp>
+      <p:sp>
+        <p:nvSpPr>
+          <p:cNvPr id="49" name="Shape 46"/>
+          <p:cNvSpPr/>
+          <p:nvPr/>
+        </p:nvSpPr>
+        <p:spPr>
+          <a:xfrm>
+            <a:off x="566928" y="4800600"/>
+            <a:ext cx="2157984" cy="1005840"/>
+          </a:xfrm>
+          <a:prstGeom prst="roundRect">
+            <a:avLst>
+              <a:gd name="adj" fmla="val 5455"/>
+            </a:avLst>
+          </a:prstGeom>
+          <a:solidFill>
+            <a:srgbClr val="E7F5EE"/>
+          </a:solidFill>
+          <a:ln w="9525">
+            <a:solidFill>
+              <a:srgbClr val="BFE5D2"/>
+            </a:solidFill>
+            <a:prstDash val="solid"/>
+          </a:ln>
+        </p:spPr>
+      </p:sp>
+      <p:sp>
+        <p:nvSpPr>
+          <p:cNvPr id="50" name="Shape 47"/>
+          <p:cNvSpPr/>
+          <p:nvPr/>
+        </p:nvSpPr>
+        <p:spPr>
+          <a:xfrm>
+            <a:off x="749808" y="4983480"/>
+            <a:ext cx="585216" cy="274320"/>
+          </a:xfrm>
+          <a:prstGeom prst="roundRect">
+            <a:avLst>
+              <a:gd name="adj" fmla="val 16667"/>
+            </a:avLst>
+          </a:prstGeom>
+          <a:solidFill>
+            <a:srgbClr val="06603A"/>
+          </a:solidFill>
+          <a:ln w="6350">
+            <a:solidFill>
+              <a:srgbClr val="06603A"/>
+            </a:solidFill>
+            <a:prstDash val="solid"/>
+          </a:ln>
+        </p:spPr>
+      </p:sp>
+      <p:sp>
+        <p:nvSpPr>
+          <p:cNvPr id="51" name="Text 48"/>
+          <p:cNvSpPr/>
+          <p:nvPr/>
+        </p:nvSpPr>
+        <p:spPr>
+          <a:xfrm>
+            <a:off x="749808" y="4983480"/>
+            <a:ext cx="585216" cy="274320"/>
+          </a:xfrm>
+          <a:prstGeom prst="rect">
+            <a:avLst/>
+          </a:prstGeom>
+          <a:noFill/>
+          <a:ln/>
+        </p:spPr>
+        <p:txBody>
+          <a:bodyPr wrap="square" lIns="0" tIns="0" rIns="0" bIns="0" rtlCol="0" anchor="ctr"/>
+          <a:lstStyle/>
+          <a:p>
+            <a:pPr algn="ctr" indent="0" marL="0">
+              <a:buNone/>
+            </a:pPr>
+            <a:r>
+              <a:rPr lang="en-US" sz="950" b="1" dirty="0">
+                <a:solidFill>
+                  <a:srgbClr val="FFFFFF"/>
+                </a:solidFill>
+                <a:latin typeface="Calibri" pitchFamily="34" charset="0"/>
+                <a:ea typeface="Calibri" pitchFamily="34" charset="-122"/>
+                <a:cs typeface="Calibri" pitchFamily="34" charset="-120"/>
+              </a:rPr>
+              <a:t>PRO</a:t>
+            </a:r>
+            <a:endParaRPr lang="en-US" sz="950" dirty="0"/>
+          </a:p>
+        </p:txBody>
+      </p:sp>
+      <p:sp>
+        <p:nvSpPr>
+          <p:cNvPr id="52" name="Text 49"/>
+          <p:cNvSpPr/>
+          <p:nvPr/>
+        </p:nvSpPr>
+        <p:spPr>
+          <a:xfrm>
+            <a:off x="1389888" y="4956048"/>
+            <a:ext cx="1188720" cy="329184"/>
+          </a:xfrm>
+          <a:prstGeom prst="rect">
+            <a:avLst/>
+          </a:prstGeom>
+          <a:noFill/>
+          <a:ln/>
+        </p:spPr>
+        <p:txBody>
+          <a:bodyPr wrap="square" lIns="0" tIns="0" rIns="0" bIns="0" rtlCol="0" anchor="ctr"/>
+          <a:lstStyle/>
+          <a:p>
+            <a:pPr indent="0" marL="0">
+              <a:buNone/>
+            </a:pPr>
+            <a:r>
+              <a:rPr lang="en-US" sz="1350" dirty="0">
+                <a:solidFill>
+                  <a:srgbClr val="06603A"/>
+                </a:solidFill>
+                <a:latin typeface="Georgia" pitchFamily="34" charset="0"/>
+                <a:ea typeface="Georgia" pitchFamily="34" charset="-122"/>
+                <a:cs typeface="Georgia" pitchFamily="34" charset="-120"/>
+              </a:rPr>
+              <a:t>Profit</a:t>
+            </a:r>
+            <a:endParaRPr lang="en-US" sz="1350" dirty="0"/>
+          </a:p>
+        </p:txBody>
+      </p:sp>
+      <p:sp>
+        <p:nvSpPr>
+          <p:cNvPr id="53" name="Text 50"/>
+          <p:cNvSpPr/>
+          <p:nvPr/>
+        </p:nvSpPr>
+        <p:spPr>
+          <a:xfrm>
+            <a:off x="749808" y="5312664"/>
+            <a:ext cx="1810512" cy="420624"/>
+          </a:xfrm>
+          <a:prstGeom prst="rect">
+            <a:avLst/>
+          </a:prstGeom>
+          <a:noFill/>
+          <a:ln/>
+        </p:spPr>
+        <p:txBody>
+          <a:bodyPr wrap="square" lIns="0" tIns="0" rIns="0" bIns="0" rtlCol="0" anchor="t"/>
+          <a:lstStyle/>
+          <a:p>
+            <a:pPr indent="0" marL="0">
+              <a:lnSpc>
+                <a:spcPct val="104000"/>
+              </a:lnSpc>
+              <a:buNone/>
+            </a:pPr>
+            <a:r>
+              <a:rPr lang="en-US" sz="850" dirty="0">
+                <a:solidFill>
+                  <a:srgbClr val="68707E"/>
+                </a:solidFill>
+                <a:latin typeface="Calibri" pitchFamily="34" charset="0"/>
+                <a:ea typeface="Calibri" pitchFamily="34" charset="-122"/>
+                <a:cs typeface="Calibri" pitchFamily="34" charset="-120"/>
+              </a:rPr>
+              <a:t>Money that arrives from somebody who was free to keep it.</a:t>
+            </a:r>
+            <a:endParaRPr lang="en-US" sz="850" dirty="0"/>
+          </a:p>
+        </p:txBody>
+      </p:sp>
+      <p:sp>
+        <p:nvSpPr>
+          <p:cNvPr id="54" name="Shape 51"/>
+          <p:cNvSpPr/>
+          <p:nvPr/>
+        </p:nvSpPr>
+        <p:spPr>
+          <a:xfrm>
+            <a:off x="2871216" y="4800600"/>
+            <a:ext cx="2871216" cy="1005840"/>
+          </a:xfrm>
+          <a:prstGeom prst="roundRect">
+            <a:avLst>
+              <a:gd name="adj" fmla="val 5455"/>
+            </a:avLst>
+          </a:prstGeom>
+          <a:solidFill>
+            <a:srgbClr val="FFFFFF"/>
+          </a:solidFill>
+          <a:ln w="9525">
+            <a:solidFill>
+              <a:srgbClr val="D8D4C9"/>
+            </a:solidFill>
+            <a:prstDash val="solid"/>
+          </a:ln>
+        </p:spPr>
+      </p:sp>
+      <p:sp>
+        <p:nvSpPr>
+          <p:cNvPr id="55" name="Text 52"/>
+          <p:cNvSpPr/>
+          <p:nvPr/>
+        </p:nvSpPr>
+        <p:spPr>
+          <a:xfrm>
+            <a:off x="3054096" y="4946904"/>
+            <a:ext cx="2505456" cy="219456"/>
+          </a:xfrm>
+          <a:prstGeom prst="rect">
+            <a:avLst/>
+          </a:prstGeom>
+          <a:noFill/>
+          <a:ln/>
+        </p:spPr>
+        <p:txBody>
+          <a:bodyPr wrap="square" lIns="0" tIns="0" rIns="0" bIns="0" rtlCol="0" anchor="ctr"/>
+          <a:lstStyle/>
+          <a:p>
+            <a:pPr indent="0" marL="0">
+              <a:buNone/>
+            </a:pPr>
+            <a:r>
+              <a:rPr lang="en-US" sz="900" b="1" spc="110" kern="0" dirty="0">
+                <a:solidFill>
+                  <a:srgbClr val="06603A"/>
+                </a:solidFill>
+                <a:latin typeface="Calibri" pitchFamily="34" charset="0"/>
+                <a:ea typeface="Calibri" pitchFamily="34" charset="-122"/>
+                <a:cs typeface="Calibri" pitchFamily="34" charset="-120"/>
+              </a:rPr>
+              <a:t>P1  ·  Week 7</a:t>
+            </a:r>
+            <a:endParaRPr lang="en-US" sz="900" dirty="0"/>
+          </a:p>
+        </p:txBody>
+      </p:sp>
+      <p:sp>
+        <p:nvSpPr>
+          <p:cNvPr id="56" name="Text 53"/>
+          <p:cNvSpPr/>
+          <p:nvPr/>
+        </p:nvSpPr>
+        <p:spPr>
+          <a:xfrm>
+            <a:off x="3054096" y="5166360"/>
+            <a:ext cx="2505456" cy="548640"/>
+          </a:xfrm>
+          <a:prstGeom prst="rect">
+            <a:avLst/>
+          </a:prstGeom>
+          <a:noFill/>
+          <a:ln/>
+        </p:spPr>
+        <p:txBody>
+          <a:bodyPr wrap="square" lIns="0" tIns="0" rIns="0" bIns="0" rtlCol="0" anchor="t"/>
+          <a:lstStyle/>
+          <a:p>
+            <a:pPr indent="0" marL="0">
+              <a:lnSpc>
+                <a:spcPct val="106000"/>
+              </a:lnSpc>
+              <a:buNone/>
+            </a:pPr>
+            <a:r>
+              <a:rPr lang="en-US" sz="1100" b="1" dirty="0">
+                <a:solidFill>
+                  <a:srgbClr val="1A2433"/>
+                </a:solidFill>
+                <a:latin typeface="Calibri" pitchFamily="34" charset="0"/>
+                <a:ea typeface="Calibri" pitchFamily="34" charset="-122"/>
+                <a:cs typeface="Calibri" pitchFamily="34" charset="-120"/>
+              </a:rPr>
+              <a:t>The tier becomes buyable at all</a:t>
+            </a:r>
+            <a:endParaRPr lang="en-US" sz="1100" dirty="0"/>
+          </a:p>
+        </p:txBody>
+      </p:sp>
+      <p:sp>
+        <p:nvSpPr>
+          <p:cNvPr id="57" name="Shape 54"/>
+          <p:cNvSpPr/>
+          <p:nvPr/>
+        </p:nvSpPr>
+        <p:spPr>
+          <a:xfrm>
+            <a:off x="5888736" y="4800600"/>
+            <a:ext cx="2871216" cy="1005840"/>
+          </a:xfrm>
+          <a:prstGeom prst="roundRect">
+            <a:avLst>
+              <a:gd name="adj" fmla="val 5455"/>
+            </a:avLst>
+          </a:prstGeom>
+          <a:solidFill>
+            <a:srgbClr val="FFFFFF"/>
+          </a:solidFill>
+          <a:ln w="9525">
+            <a:solidFill>
+              <a:srgbClr val="D8D4C9"/>
+            </a:solidFill>
+            <a:prstDash val="solid"/>
+          </a:ln>
+        </p:spPr>
+      </p:sp>
+      <p:sp>
+        <p:nvSpPr>
+          <p:cNvPr id="58" name="Text 55"/>
+          <p:cNvSpPr/>
+          <p:nvPr/>
+        </p:nvSpPr>
+        <p:spPr>
+          <a:xfrm>
+            <a:off x="6071616" y="4946904"/>
+            <a:ext cx="2505456" cy="219456"/>
+          </a:xfrm>
+          <a:prstGeom prst="rect">
+            <a:avLst/>
+          </a:prstGeom>
+          <a:noFill/>
+          <a:ln/>
+        </p:spPr>
+        <p:txBody>
+          <a:bodyPr wrap="square" lIns="0" tIns="0" rIns="0" bIns="0" rtlCol="0" anchor="ctr"/>
+          <a:lstStyle/>
+          <a:p>
+            <a:pPr indent="0" marL="0">
+              <a:buNone/>
+            </a:pPr>
+            <a:r>
+              <a:rPr lang="en-US" sz="900" b="1" spc="110" kern="0" dirty="0">
+                <a:solidFill>
+                  <a:srgbClr val="06603A"/>
+                </a:solidFill>
+                <a:latin typeface="Calibri" pitchFamily="34" charset="0"/>
+                <a:ea typeface="Calibri" pitchFamily="34" charset="-122"/>
+                <a:cs typeface="Calibri" pitchFamily="34" charset="-120"/>
+              </a:rPr>
+              <a:t>P2  ·  Week 8</a:t>
+            </a:r>
+            <a:endParaRPr lang="en-US" sz="900" dirty="0"/>
+          </a:p>
+        </p:txBody>
+      </p:sp>
+      <p:sp>
+        <p:nvSpPr>
+          <p:cNvPr id="59" name="Text 56"/>
+          <p:cNvSpPr/>
+          <p:nvPr/>
+        </p:nvSpPr>
+        <p:spPr>
+          <a:xfrm>
+            <a:off x="6071616" y="5166360"/>
+            <a:ext cx="2505456" cy="548640"/>
+          </a:xfrm>
+          <a:prstGeom prst="rect">
+            <a:avLst/>
+          </a:prstGeom>
+          <a:noFill/>
+          <a:ln/>
+        </p:spPr>
+        <p:txBody>
+          <a:bodyPr wrap="square" lIns="0" tIns="0" rIns="0" bIns="0" rtlCol="0" anchor="t"/>
+          <a:lstStyle/>
+          <a:p>
+            <a:pPr indent="0" marL="0">
+              <a:lnSpc>
+                <a:spcPct val="106000"/>
+              </a:lnSpc>
+              <a:buNone/>
+            </a:pPr>
+            <a:r>
+              <a:rPr lang="en-US" sz="1100" b="1" dirty="0">
+                <a:solidFill>
+                  <a:srgbClr val="1A2433"/>
+                </a:solidFill>
+                <a:latin typeface="Calibri" pitchFamily="34" charset="0"/>
+                <a:ea typeface="Calibri" pitchFamily="34" charset="-122"/>
+                <a:cs typeface="Calibri" pitchFamily="34" charset="-120"/>
+              </a:rPr>
+              <a:t>A stranger pays</a:t>
+            </a:r>
+            <a:endParaRPr lang="en-US" sz="1100" dirty="0"/>
+          </a:p>
+        </p:txBody>
+      </p:sp>
+      <p:sp>
+        <p:nvSpPr>
+          <p:cNvPr id="60" name="Shape 57"/>
+          <p:cNvSpPr/>
+          <p:nvPr/>
+        </p:nvSpPr>
+        <p:spPr>
+          <a:xfrm>
+            <a:off x="8906256" y="4800600"/>
+            <a:ext cx="2871216" cy="1005840"/>
+          </a:xfrm>
+          <a:prstGeom prst="roundRect">
+            <a:avLst>
+              <a:gd name="adj" fmla="val 5455"/>
+            </a:avLst>
+          </a:prstGeom>
+          <a:solidFill>
+            <a:srgbClr val="FFFFFF"/>
+          </a:solidFill>
+          <a:ln w="9525">
+            <a:solidFill>
+              <a:srgbClr val="D8D4C9"/>
+            </a:solidFill>
+            <a:prstDash val="solid"/>
+          </a:ln>
+        </p:spPr>
+      </p:sp>
+      <p:sp>
+        <p:nvSpPr>
+          <p:cNvPr id="61" name="Text 58"/>
+          <p:cNvSpPr/>
+          <p:nvPr/>
+        </p:nvSpPr>
+        <p:spPr>
+          <a:xfrm>
+            <a:off x="9089136" y="4946904"/>
+            <a:ext cx="2505456" cy="219456"/>
+          </a:xfrm>
+          <a:prstGeom prst="rect">
+            <a:avLst/>
+          </a:prstGeom>
+          <a:noFill/>
+          <a:ln/>
+        </p:spPr>
+        <p:txBody>
+          <a:bodyPr wrap="square" lIns="0" tIns="0" rIns="0" bIns="0" rtlCol="0" anchor="ctr"/>
+          <a:lstStyle/>
+          <a:p>
+            <a:pPr indent="0" marL="0">
+              <a:buNone/>
+            </a:pPr>
+            <a:r>
+              <a:rPr lang="en-US" sz="900" b="1" spc="110" kern="0" dirty="0">
+                <a:solidFill>
+                  <a:srgbClr val="06603A"/>
+                </a:solidFill>
+                <a:latin typeface="Calibri" pitchFamily="34" charset="0"/>
+                <a:ea typeface="Calibri" pitchFamily="34" charset="-122"/>
+                <a:cs typeface="Calibri" pitchFamily="34" charset="-120"/>
+              </a:rPr>
+              <a:t>P3  ·  Week 12</a:t>
+            </a:r>
+            <a:endParaRPr lang="en-US" sz="900" dirty="0"/>
+          </a:p>
+        </p:txBody>
+      </p:sp>
+      <p:sp>
+        <p:nvSpPr>
+          <p:cNvPr id="62" name="Text 59"/>
+          <p:cNvSpPr/>
+          <p:nvPr/>
+        </p:nvSpPr>
+        <p:spPr>
+          <a:xfrm>
+            <a:off x="9089136" y="5166360"/>
+            <a:ext cx="2505456" cy="548640"/>
+          </a:xfrm>
+          <a:prstGeom prst="rect">
+            <a:avLst/>
+          </a:prstGeom>
+          <a:noFill/>
+          <a:ln/>
+        </p:spPr>
+        <p:txBody>
+          <a:bodyPr wrap="square" lIns="0" tIns="0" rIns="0" bIns="0" rtlCol="0" anchor="t"/>
+          <a:lstStyle/>
+          <a:p>
+            <a:pPr indent="0" marL="0">
+              <a:lnSpc>
+                <a:spcPct val="106000"/>
+              </a:lnSpc>
+              <a:buNone/>
+            </a:pPr>
+            <a:r>
+              <a:rPr lang="en-US" sz="1100" b="1" dirty="0">
+                <a:solidFill>
+                  <a:srgbClr val="1A2433"/>
+                </a:solidFill>
+                <a:latin typeface="Calibri" pitchFamily="34" charset="0"/>
+                <a:ea typeface="Calibri" pitchFamily="34" charset="-122"/>
+                <a:cs typeface="Calibri" pitchFamily="34" charset="-120"/>
+              </a:rPr>
+              <a:t>The broker network's revenue shape is decided</a:t>
+            </a:r>
+            <a:endParaRPr lang="en-US" sz="1100" dirty="0"/>
+          </a:p>
+        </p:txBody>
+      </p:sp>
+      <p:sp>
+        <p:nvSpPr>
+          <p:cNvPr id="63" name="Text 60"/>
+          <p:cNvSpPr/>
+          <p:nvPr/>
+        </p:nvSpPr>
+        <p:spPr>
+          <a:xfrm>
+            <a:off x="566928" y="5925312"/>
+            <a:ext cx="9777679" cy="310896"/>
+          </a:xfrm>
+          <a:prstGeom prst="rect">
+            <a:avLst/>
+          </a:prstGeom>
+          <a:noFill/>
+          <a:ln/>
+        </p:spPr>
+        <p:txBody>
+          <a:bodyPr wrap="square" lIns="0" tIns="0" rIns="0" bIns="0" rtlCol="0" anchor="t"/>
+          <a:lstStyle/>
+          <a:p>
+            <a:pPr indent="0" marL="0">
+              <a:buNone/>
+            </a:pPr>
+            <a:r>
+              <a:rPr lang="en-US" sz="1050" i="1" dirty="0">
+                <a:solidFill>
+                  <a:srgbClr val="68707E"/>
+                </a:solidFill>
+                <a:latin typeface="Calibri" pitchFamily="34" charset="0"/>
+                <a:ea typeface="Calibri" pitchFamily="34" charset="-122"/>
+                <a:cs typeface="Calibri" pitchFamily="34" charset="-120"/>
+              </a:rPr>
+              <a:t>Read down a lane to see whether that half of the business is moving. A quarter where only DEV lands is a quarter that shipped a great deal and proved nothing.</a:t>
             </a:r>
             <a:endParaRPr lang="en-US" sz="1050" dirty="0"/>
           </a:p>
@@ -6384,7 +7227,7 @@
                 <a:ea typeface="Calibri" pitchFamily="34" charset="-122"/>
                 <a:cs typeface="Calibri" pitchFamily="34" charset="-120"/>
               </a:rPr>
-              <a:t>M1 FIRST OUTSIDE REPORTS · M2 FIRST OUTSIDE BROKER</a:t>
+              <a:t>DEV × 2  ·  USE × 1  ·  REL × 1</a:t>
             </a:r>
             <a:endParaRPr lang="en-US" sz="1000" dirty="0"/>
           </a:p>
@@ -6562,11 +7405,11 @@
             </a:avLst>
           </a:prstGeom>
           <a:solidFill>
-            <a:srgbClr val="FFFFFF"/>
+            <a:srgbClr val="F5F4EF"/>
           </a:solidFill>
           <a:ln w="9525">
             <a:solidFill>
-              <a:srgbClr val="E4E2DA"/>
+              <a:srgbClr val="D8D4C9"/>
             </a:solidFill>
             <a:prstDash val="solid"/>
           </a:ln>
@@ -6659,7 +7502,7 @@
         <p:spPr>
           <a:xfrm>
             <a:off x="1572768" y="1728216"/>
-            <a:ext cx="420624" cy="420624"/>
+            <a:ext cx="585216" cy="420624"/>
           </a:xfrm>
           <a:prstGeom prst="roundRect">
             <a:avLst>
@@ -6686,7 +7529,7 @@
         <p:spPr>
           <a:xfrm>
             <a:off x="1572768" y="1728216"/>
-            <a:ext cx="420624" cy="420624"/>
+            <a:ext cx="585216" cy="420624"/>
           </a:xfrm>
           <a:prstGeom prst="rect">
             <a:avLst/>
@@ -6702,7 +7545,7 @@
               <a:buNone/>
             </a:pPr>
             <a:r>
-              <a:rPr lang="en-US" sz="1150" b="1" dirty="0">
+              <a:rPr lang="en-US" sz="950" b="1" dirty="0">
                 <a:solidFill>
                   <a:srgbClr val="FFFFFF"/>
                 </a:solidFill>
@@ -6710,9 +7553,9 @@
                 <a:ea typeface="Calibri" pitchFamily="34" charset="-122"/>
                 <a:cs typeface="Calibri" pitchFamily="34" charset="-120"/>
               </a:rPr>
-              <a:t>M1</a:t>
-            </a:r>
-            <a:endParaRPr lang="en-US" sz="1150" dirty="0"/>
+              <a:t>DEV</a:t>
+            </a:r>
+            <a:endParaRPr lang="en-US" sz="950" dirty="0"/>
           </a:p>
         </p:txBody>
       </p:sp>
@@ -6724,8 +7567,8 @@
         </p:nvSpPr>
         <p:spPr>
           <a:xfrm>
-            <a:off x="2176272" y="1609344"/>
-            <a:ext cx="3474720" cy="676656"/>
+            <a:off x="2340864" y="1609344"/>
+            <a:ext cx="3364992" cy="676656"/>
           </a:xfrm>
           <a:prstGeom prst="rect">
             <a:avLst/>
@@ -6766,8 +7609,8 @@
         </p:nvSpPr>
         <p:spPr>
           <a:xfrm>
-            <a:off x="5806440" y="1609344"/>
-            <a:ext cx="4590288" cy="676656"/>
+            <a:off x="5852160" y="1609344"/>
+            <a:ext cx="4544568" cy="676656"/>
           </a:xfrm>
           <a:prstGeom prst="rect">
             <a:avLst/>
@@ -6803,6 +7646,72 @@
       <p:sp>
         <p:nvSpPr>
           <p:cNvPr id="14" name="Shape 11"/>
+          <p:cNvSpPr/>
+          <p:nvPr/>
+        </p:nvSpPr>
+        <p:spPr>
+          <a:xfrm>
+            <a:off x="10515600" y="1819656"/>
+            <a:ext cx="1005840" cy="237744"/>
+          </a:xfrm>
+          <a:prstGeom prst="roundRect">
+            <a:avLst>
+              <a:gd name="adj" fmla="val 11538"/>
+            </a:avLst>
+          </a:prstGeom>
+          <a:solidFill>
+            <a:srgbClr val="1A2433"/>
+          </a:solidFill>
+          <a:ln w="6350">
+            <a:solidFill>
+              <a:srgbClr val="1A2433"/>
+            </a:solidFill>
+            <a:prstDash val="solid"/>
+          </a:ln>
+        </p:spPr>
+      </p:sp>
+      <p:sp>
+        <p:nvSpPr>
+          <p:cNvPr id="15" name="Text 12"/>
+          <p:cNvSpPr/>
+          <p:nvPr/>
+        </p:nvSpPr>
+        <p:spPr>
+          <a:xfrm>
+            <a:off x="10515600" y="1819656"/>
+            <a:ext cx="1005840" cy="237744"/>
+          </a:xfrm>
+          <a:prstGeom prst="rect">
+            <a:avLst/>
+          </a:prstGeom>
+          <a:noFill/>
+          <a:ln/>
+        </p:spPr>
+        <p:txBody>
+          <a:bodyPr wrap="square" lIns="0" tIns="0" rIns="0" bIns="0" rtlCol="0" anchor="ctr"/>
+          <a:lstStyle/>
+          <a:p>
+            <a:pPr algn="ctr" indent="0" marL="0">
+              <a:buNone/>
+            </a:pPr>
+            <a:r>
+              <a:rPr lang="en-US" sz="850" b="1" spc="100" kern="0" dirty="0">
+                <a:solidFill>
+                  <a:srgbClr val="FFFFFF"/>
+                </a:solidFill>
+                <a:latin typeface="Calibri" pitchFamily="34" charset="0"/>
+                <a:ea typeface="Calibri" pitchFamily="34" charset="-122"/>
+                <a:cs typeface="Calibri" pitchFamily="34" charset="-120"/>
+              </a:rPr>
+              <a:t>D1 LANDS</a:t>
+            </a:r>
+            <a:endParaRPr lang="en-US" sz="850" dirty="0"/>
+          </a:p>
+        </p:txBody>
+      </p:sp>
+      <p:sp>
+        <p:nvSpPr>
+          <p:cNvPr id="16" name="Shape 13"/>
           <p:cNvSpPr/>
           <p:nvPr/>
         </p:nvSpPr>
@@ -6829,7 +7738,7 @@
       </p:sp>
       <p:sp>
         <p:nvSpPr>
-          <p:cNvPr id="15" name="Text 12"/>
+          <p:cNvPr id="17" name="Text 14"/>
           <p:cNvSpPr/>
           <p:nvPr/>
         </p:nvSpPr>
@@ -6854,7 +7763,7 @@
             <a:r>
               <a:rPr lang="en-US" sz="1900" dirty="0">
                 <a:solidFill>
-                  <a:srgbClr val="B91C1C"/>
+                  <a:srgbClr val="7F1D1D"/>
                 </a:solidFill>
                 <a:latin typeface="Georgia" pitchFamily="34" charset="0"/>
                 <a:ea typeface="Georgia" pitchFamily="34" charset="-122"/>
@@ -6868,7 +7777,7 @@
       </p:sp>
       <p:sp>
         <p:nvSpPr>
-          <p:cNvPr id="16" name="Text 13"/>
+          <p:cNvPr id="18" name="Text 15"/>
           <p:cNvSpPr/>
           <p:nvPr/>
         </p:nvSpPr>
@@ -6907,14 +7816,14 @@
       </p:sp>
       <p:sp>
         <p:nvSpPr>
-          <p:cNvPr id="17" name="Shape 14"/>
+          <p:cNvPr id="19" name="Shape 16"/>
           <p:cNvSpPr/>
           <p:nvPr/>
         </p:nvSpPr>
         <p:spPr>
           <a:xfrm>
             <a:off x="1572768" y="2761488"/>
-            <a:ext cx="420624" cy="420624"/>
+            <a:ext cx="585216" cy="420624"/>
           </a:xfrm>
           <a:prstGeom prst="roundRect">
             <a:avLst>
@@ -6934,14 +7843,14 @@
       </p:sp>
       <p:sp>
         <p:nvSpPr>
-          <p:cNvPr id="18" name="Text 15"/>
+          <p:cNvPr id="20" name="Text 17"/>
           <p:cNvSpPr/>
           <p:nvPr/>
         </p:nvSpPr>
         <p:spPr>
           <a:xfrm>
             <a:off x="1572768" y="2761488"/>
-            <a:ext cx="420624" cy="420624"/>
+            <a:ext cx="585216" cy="420624"/>
           </a:xfrm>
           <a:prstGeom prst="rect">
             <a:avLst/>
@@ -6957,7 +7866,7 @@
               <a:buNone/>
             </a:pPr>
             <a:r>
-              <a:rPr lang="en-US" sz="1150" b="1" dirty="0">
+              <a:rPr lang="en-US" sz="950" b="1" dirty="0">
                 <a:solidFill>
                   <a:srgbClr val="FFFFFF"/>
                 </a:solidFill>
@@ -6965,22 +7874,22 @@
                 <a:ea typeface="Calibri" pitchFamily="34" charset="-122"/>
                 <a:cs typeface="Calibri" pitchFamily="34" charset="-120"/>
               </a:rPr>
-              <a:t>M1</a:t>
-            </a:r>
-            <a:endParaRPr lang="en-US" sz="1150" dirty="0"/>
-          </a:p>
-        </p:txBody>
-      </p:sp>
-      <p:sp>
-        <p:nvSpPr>
-          <p:cNvPr id="19" name="Text 16"/>
-          <p:cNvSpPr/>
-          <p:nvPr/>
-        </p:nvSpPr>
-        <p:spPr>
-          <a:xfrm>
-            <a:off x="2176272" y="2642616"/>
-            <a:ext cx="3474720" cy="676656"/>
+              <a:t>USE</a:t>
+            </a:r>
+            <a:endParaRPr lang="en-US" sz="950" dirty="0"/>
+          </a:p>
+        </p:txBody>
+      </p:sp>
+      <p:sp>
+        <p:nvSpPr>
+          <p:cNvPr id="21" name="Text 18"/>
+          <p:cNvSpPr/>
+          <p:nvPr/>
+        </p:nvSpPr>
+        <p:spPr>
+          <a:xfrm>
+            <a:off x="2340864" y="2642616"/>
+            <a:ext cx="3364992" cy="676656"/>
           </a:xfrm>
           <a:prstGeom prst="rect">
             <a:avLst/>
@@ -7015,14 +7924,14 @@
       </p:sp>
       <p:sp>
         <p:nvSpPr>
-          <p:cNvPr id="20" name="Text 17"/>
-          <p:cNvSpPr/>
-          <p:nvPr/>
-        </p:nvSpPr>
-        <p:spPr>
-          <a:xfrm>
-            <a:off x="5806440" y="2642616"/>
-            <a:ext cx="4590288" cy="676656"/>
+          <p:cNvPr id="22" name="Text 19"/>
+          <p:cNvSpPr/>
+          <p:nvPr/>
+        </p:nvSpPr>
+        <p:spPr>
+          <a:xfrm>
+            <a:off x="5852160" y="2642616"/>
+            <a:ext cx="4544568" cy="676656"/>
           </a:xfrm>
           <a:prstGeom prst="rect">
             <a:avLst/>
@@ -7057,7 +7966,7 @@
       </p:sp>
       <p:sp>
         <p:nvSpPr>
-          <p:cNvPr id="21" name="Shape 18"/>
+          <p:cNvPr id="23" name="Shape 20"/>
           <p:cNvSpPr/>
           <p:nvPr/>
         </p:nvSpPr>
@@ -7084,7 +7993,7 @@
       </p:sp>
       <p:sp>
         <p:nvSpPr>
-          <p:cNvPr id="22" name="Text 19"/>
+          <p:cNvPr id="24" name="Text 21"/>
           <p:cNvSpPr/>
           <p:nvPr/>
         </p:nvSpPr>
@@ -7115,7 +8024,7 @@
                 <a:ea typeface="Calibri" pitchFamily="34" charset="-122"/>
                 <a:cs typeface="Calibri" pitchFamily="34" charset="-120"/>
               </a:rPr>
-              <a:t>MILESTONE</a:t>
+              <a:t>U1 LANDS</a:t>
             </a:r>
             <a:endParaRPr lang="en-US" sz="850" dirty="0"/>
           </a:p>
@@ -7123,7 +8032,7 @@
       </p:sp>
       <p:sp>
         <p:nvSpPr>
-          <p:cNvPr id="23" name="Shape 20"/>
+          <p:cNvPr id="25" name="Shape 22"/>
           <p:cNvSpPr/>
           <p:nvPr/>
         </p:nvSpPr>
@@ -7138,11 +8047,11 @@
             </a:avLst>
           </a:prstGeom>
           <a:solidFill>
-            <a:srgbClr val="FFFFFF"/>
+            <a:srgbClr val="F5F4EF"/>
           </a:solidFill>
           <a:ln w="9525">
             <a:solidFill>
-              <a:srgbClr val="E4E2DA"/>
+              <a:srgbClr val="D8D4C9"/>
             </a:solidFill>
             <a:prstDash val="solid"/>
           </a:ln>
@@ -7150,7 +8059,7 @@
       </p:sp>
       <p:sp>
         <p:nvSpPr>
-          <p:cNvPr id="24" name="Text 21"/>
+          <p:cNvPr id="26" name="Text 23"/>
           <p:cNvSpPr/>
           <p:nvPr/>
         </p:nvSpPr>
@@ -7189,7 +8098,7 @@
       </p:sp>
       <p:sp>
         <p:nvSpPr>
-          <p:cNvPr id="25" name="Text 22"/>
+          <p:cNvPr id="27" name="Text 24"/>
           <p:cNvSpPr/>
           <p:nvPr/>
         </p:nvSpPr>
@@ -7228,14 +8137,14 @@
       </p:sp>
       <p:sp>
         <p:nvSpPr>
-          <p:cNvPr id="26" name="Shape 23"/>
+          <p:cNvPr id="28" name="Shape 25"/>
           <p:cNvSpPr/>
           <p:nvPr/>
         </p:nvSpPr>
         <p:spPr>
           <a:xfrm>
             <a:off x="1572768" y="3794760"/>
-            <a:ext cx="420624" cy="420624"/>
+            <a:ext cx="585216" cy="420624"/>
           </a:xfrm>
           <a:prstGeom prst="roundRect">
             <a:avLst>
@@ -7255,14 +8164,14 @@
       </p:sp>
       <p:sp>
         <p:nvSpPr>
-          <p:cNvPr id="27" name="Text 24"/>
+          <p:cNvPr id="29" name="Text 26"/>
           <p:cNvSpPr/>
           <p:nvPr/>
         </p:nvSpPr>
         <p:spPr>
           <a:xfrm>
             <a:off x="1572768" y="3794760"/>
-            <a:ext cx="420624" cy="420624"/>
+            <a:ext cx="585216" cy="420624"/>
           </a:xfrm>
           <a:prstGeom prst="rect">
             <a:avLst/>
@@ -7278,7 +8187,7 @@
               <a:buNone/>
             </a:pPr>
             <a:r>
-              <a:rPr lang="en-US" sz="1150" b="1" dirty="0">
+              <a:rPr lang="en-US" sz="950" b="1" dirty="0">
                 <a:solidFill>
                   <a:srgbClr val="FFFFFF"/>
                 </a:solidFill>
@@ -7286,22 +8195,22 @@
                 <a:ea typeface="Calibri" pitchFamily="34" charset="-122"/>
                 <a:cs typeface="Calibri" pitchFamily="34" charset="-120"/>
               </a:rPr>
-              <a:t>M2</a:t>
-            </a:r>
-            <a:endParaRPr lang="en-US" sz="1150" dirty="0"/>
-          </a:p>
-        </p:txBody>
-      </p:sp>
-      <p:sp>
-        <p:nvSpPr>
-          <p:cNvPr id="28" name="Text 25"/>
-          <p:cNvSpPr/>
-          <p:nvPr/>
-        </p:nvSpPr>
-        <p:spPr>
-          <a:xfrm>
-            <a:off x="2176272" y="3675888"/>
-            <a:ext cx="3474720" cy="676656"/>
+              <a:t>DEV</a:t>
+            </a:r>
+            <a:endParaRPr lang="en-US" sz="950" dirty="0"/>
+          </a:p>
+        </p:txBody>
+      </p:sp>
+      <p:sp>
+        <p:nvSpPr>
+          <p:cNvPr id="30" name="Text 27"/>
+          <p:cNvSpPr/>
+          <p:nvPr/>
+        </p:nvSpPr>
+        <p:spPr>
+          <a:xfrm>
+            <a:off x="2340864" y="3675888"/>
+            <a:ext cx="3364992" cy="676656"/>
           </a:xfrm>
           <a:prstGeom prst="rect">
             <a:avLst/>
@@ -7336,14 +8245,14 @@
       </p:sp>
       <p:sp>
         <p:nvSpPr>
-          <p:cNvPr id="29" name="Text 26"/>
-          <p:cNvSpPr/>
-          <p:nvPr/>
-        </p:nvSpPr>
-        <p:spPr>
-          <a:xfrm>
-            <a:off x="5806440" y="3675888"/>
-            <a:ext cx="4590288" cy="676656"/>
+          <p:cNvPr id="31" name="Text 28"/>
+          <p:cNvSpPr/>
+          <p:nvPr/>
+        </p:nvSpPr>
+        <p:spPr>
+          <a:xfrm>
+            <a:off x="5852160" y="3675888"/>
+            <a:ext cx="4544568" cy="676656"/>
           </a:xfrm>
           <a:prstGeom prst="rect">
             <a:avLst/>
@@ -7370,7 +8279,7 @@
                 <a:ea typeface="Calibri" pitchFamily="34" charset="-122"/>
                 <a:cs typeface="Calibri" pitchFamily="34" charset="-120"/>
               </a:rPr>
-              <a:t>Decided 2026-08-12, not built: a licence field on the broker profile, and POST /api/vault/publish refuses without it. Verified means a named broker vouched; that must be enforced in code, not remembered. Build it alongside vault_beta, not after.</a:t>
+              <a:t>Decided 2026-08-12, not built: a licence field on the broker profile, and POST /api/vault/publish refuses without it. Verified means a named broker vouched; that must be enforced in code, not remembered. It has to land before R1, not after.</a:t>
             </a:r>
             <a:endParaRPr lang="en-US" sz="1050" dirty="0"/>
           </a:p>
@@ -7378,7 +8287,73 @@
       </p:sp>
       <p:sp>
         <p:nvSpPr>
-          <p:cNvPr id="30" name="Shape 27"/>
+          <p:cNvPr id="32" name="Shape 29"/>
+          <p:cNvSpPr/>
+          <p:nvPr/>
+        </p:nvSpPr>
+        <p:spPr>
+          <a:xfrm>
+            <a:off x="10515600" y="3886200"/>
+            <a:ext cx="1005840" cy="237744"/>
+          </a:xfrm>
+          <a:prstGeom prst="roundRect">
+            <a:avLst>
+              <a:gd name="adj" fmla="val 11538"/>
+            </a:avLst>
+          </a:prstGeom>
+          <a:solidFill>
+            <a:srgbClr val="1A2433"/>
+          </a:solidFill>
+          <a:ln w="6350">
+            <a:solidFill>
+              <a:srgbClr val="1A2433"/>
+            </a:solidFill>
+            <a:prstDash val="solid"/>
+          </a:ln>
+        </p:spPr>
+      </p:sp>
+      <p:sp>
+        <p:nvSpPr>
+          <p:cNvPr id="33" name="Text 30"/>
+          <p:cNvSpPr/>
+          <p:nvPr/>
+        </p:nvSpPr>
+        <p:spPr>
+          <a:xfrm>
+            <a:off x="10515600" y="3886200"/>
+            <a:ext cx="1005840" cy="237744"/>
+          </a:xfrm>
+          <a:prstGeom prst="rect">
+            <a:avLst/>
+          </a:prstGeom>
+          <a:noFill/>
+          <a:ln/>
+        </p:spPr>
+        <p:txBody>
+          <a:bodyPr wrap="square" lIns="0" tIns="0" rIns="0" bIns="0" rtlCol="0" anchor="ctr"/>
+          <a:lstStyle/>
+          <a:p>
+            <a:pPr algn="ctr" indent="0" marL="0">
+              <a:buNone/>
+            </a:pPr>
+            <a:r>
+              <a:rPr lang="en-US" sz="850" b="1" spc="100" kern="0" dirty="0">
+                <a:solidFill>
+                  <a:srgbClr val="FFFFFF"/>
+                </a:solidFill>
+                <a:latin typeface="Calibri" pitchFamily="34" charset="0"/>
+                <a:ea typeface="Calibri" pitchFamily="34" charset="-122"/>
+                <a:cs typeface="Calibri" pitchFamily="34" charset="-120"/>
+              </a:rPr>
+              <a:t>D2 LANDS</a:t>
+            </a:r>
+            <a:endParaRPr lang="en-US" sz="850" dirty="0"/>
+          </a:p>
+        </p:txBody>
+      </p:sp>
+      <p:sp>
+        <p:nvSpPr>
+          <p:cNvPr id="34" name="Shape 31"/>
           <p:cNvSpPr/>
           <p:nvPr/>
         </p:nvSpPr>
@@ -7393,11 +8368,11 @@
             </a:avLst>
           </a:prstGeom>
           <a:solidFill>
-            <a:srgbClr val="FCF1EF"/>
+            <a:srgbClr val="EDE9F8"/>
           </a:solidFill>
           <a:ln w="9525">
             <a:solidFill>
-              <a:srgbClr val="F0C7C7"/>
+              <a:srgbClr val="C4B5FD"/>
             </a:solidFill>
             <a:prstDash val="solid"/>
           </a:ln>
@@ -7405,7 +8380,7 @@
       </p:sp>
       <p:sp>
         <p:nvSpPr>
-          <p:cNvPr id="31" name="Text 28"/>
+          <p:cNvPr id="35" name="Text 32"/>
           <p:cNvSpPr/>
           <p:nvPr/>
         </p:nvSpPr>
@@ -7430,7 +8405,7 @@
             <a:r>
               <a:rPr lang="en-US" sz="1900" dirty="0">
                 <a:solidFill>
-                  <a:srgbClr val="B91C1C"/>
+                  <a:srgbClr val="4C3A8C"/>
                 </a:solidFill>
                 <a:latin typeface="Georgia" pitchFamily="34" charset="0"/>
                 <a:ea typeface="Georgia" pitchFamily="34" charset="-122"/>
@@ -7444,7 +8419,7 @@
       </p:sp>
       <p:sp>
         <p:nvSpPr>
-          <p:cNvPr id="32" name="Text 29"/>
+          <p:cNvPr id="36" name="Text 33"/>
           <p:cNvSpPr/>
           <p:nvPr/>
         </p:nvSpPr>
@@ -7483,14 +8458,14 @@
       </p:sp>
       <p:sp>
         <p:nvSpPr>
-          <p:cNvPr id="33" name="Shape 30"/>
+          <p:cNvPr id="37" name="Shape 34"/>
           <p:cNvSpPr/>
           <p:nvPr/>
         </p:nvSpPr>
         <p:spPr>
           <a:xfrm>
             <a:off x="1572768" y="4828032"/>
-            <a:ext cx="420624" cy="420624"/>
+            <a:ext cx="585216" cy="420624"/>
           </a:xfrm>
           <a:prstGeom prst="roundRect">
             <a:avLst>
@@ -7498,11 +8473,11 @@
             </a:avLst>
           </a:prstGeom>
           <a:solidFill>
-            <a:srgbClr val="B91C1C"/>
+            <a:srgbClr val="4C3A8C"/>
           </a:solidFill>
           <a:ln w="6350">
             <a:solidFill>
-              <a:srgbClr val="B91C1C"/>
+              <a:srgbClr val="4C3A8C"/>
             </a:solidFill>
             <a:prstDash val="solid"/>
           </a:ln>
@@ -7510,14 +8485,14 @@
       </p:sp>
       <p:sp>
         <p:nvSpPr>
-          <p:cNvPr id="34" name="Text 31"/>
+          <p:cNvPr id="38" name="Text 35"/>
           <p:cNvSpPr/>
           <p:nvPr/>
         </p:nvSpPr>
         <p:spPr>
           <a:xfrm>
             <a:off x="1572768" y="4828032"/>
-            <a:ext cx="420624" cy="420624"/>
+            <a:ext cx="585216" cy="420624"/>
           </a:xfrm>
           <a:prstGeom prst="rect">
             <a:avLst/>
@@ -7533,7 +8508,7 @@
               <a:buNone/>
             </a:pPr>
             <a:r>
-              <a:rPr lang="en-US" sz="1150" b="1" dirty="0">
+              <a:rPr lang="en-US" sz="950" b="1" dirty="0">
                 <a:solidFill>
                   <a:srgbClr val="FFFFFF"/>
                 </a:solidFill>
@@ -7541,22 +8516,22 @@
                 <a:ea typeface="Calibri" pitchFamily="34" charset="-122"/>
                 <a:cs typeface="Calibri" pitchFamily="34" charset="-120"/>
               </a:rPr>
-              <a:t>M2</a:t>
-            </a:r>
-            <a:endParaRPr lang="en-US" sz="1150" dirty="0"/>
-          </a:p>
-        </p:txBody>
-      </p:sp>
-      <p:sp>
-        <p:nvSpPr>
-          <p:cNvPr id="35" name="Text 32"/>
-          <p:cNvSpPr/>
-          <p:nvPr/>
-        </p:nvSpPr>
-        <p:spPr>
-          <a:xfrm>
-            <a:off x="2176272" y="4709160"/>
-            <a:ext cx="3474720" cy="676656"/>
+              <a:t>REL</a:t>
+            </a:r>
+            <a:endParaRPr lang="en-US" sz="950" dirty="0"/>
+          </a:p>
+        </p:txBody>
+      </p:sp>
+      <p:sp>
+        <p:nvSpPr>
+          <p:cNvPr id="39" name="Text 36"/>
+          <p:cNvSpPr/>
+          <p:nvPr/>
+        </p:nvSpPr>
+        <p:spPr>
+          <a:xfrm>
+            <a:off x="2340864" y="4709160"/>
+            <a:ext cx="3364992" cy="676656"/>
           </a:xfrm>
           <a:prstGeom prst="rect">
             <a:avLst/>
@@ -7591,14 +8566,14 @@
       </p:sp>
       <p:sp>
         <p:nvSpPr>
-          <p:cNvPr id="36" name="Text 33"/>
-          <p:cNvSpPr/>
-          <p:nvPr/>
-        </p:nvSpPr>
-        <p:spPr>
-          <a:xfrm>
-            <a:off x="5806440" y="4709160"/>
-            <a:ext cx="4590288" cy="676656"/>
+          <p:cNvPr id="40" name="Text 37"/>
+          <p:cNvSpPr/>
+          <p:nvPr/>
+        </p:nvSpPr>
+        <p:spPr>
+          <a:xfrm>
+            <a:off x="5852160" y="4709160"/>
+            <a:ext cx="4544568" cy="676656"/>
           </a:xfrm>
           <a:prstGeom prst="rect">
             <a:avLst/>
@@ -7625,7 +8600,7 @@
                 <a:ea typeface="Calibri" pitchFamily="34" charset="-122"/>
                 <a:cs typeface="Calibri" pitchFamily="34" charset="-120"/>
               </a:rPr>
-              <a:t>VAULT_PASSKEY exists precisely so onboarding does not wait on the SQL editor. Read their real exports for lat/lng coverage — that measurement is what buys or kills import-time geocoding, which has been deferred for want of a single real book.</a:t>
+              <a:t>VAULT_PASSKEY exists precisely so onboarding does not wait on the SQL editor. Read their real exports for lat/lng coverage — that measurement is what buys or kills import-time geocoding, deferred for want of a single real book.</a:t>
             </a:r>
             <a:endParaRPr lang="en-US" sz="1050" dirty="0"/>
           </a:p>
@@ -7633,7 +8608,7 @@
       </p:sp>
       <p:sp>
         <p:nvSpPr>
-          <p:cNvPr id="37" name="Shape 34"/>
+          <p:cNvPr id="41" name="Shape 38"/>
           <p:cNvSpPr/>
           <p:nvPr/>
         </p:nvSpPr>
@@ -7648,11 +8623,11 @@
             </a:avLst>
           </a:prstGeom>
           <a:solidFill>
-            <a:srgbClr val="B91C1C"/>
+            <a:srgbClr val="4C3A8C"/>
           </a:solidFill>
           <a:ln w="6350">
             <a:solidFill>
-              <a:srgbClr val="B91C1C"/>
+              <a:srgbClr val="4C3A8C"/>
             </a:solidFill>
             <a:prstDash val="solid"/>
           </a:ln>
@@ -7660,7 +8635,7 @@
       </p:sp>
       <p:sp>
         <p:nvSpPr>
-          <p:cNvPr id="38" name="Text 35"/>
+          <p:cNvPr id="42" name="Text 39"/>
           <p:cNvSpPr/>
           <p:nvPr/>
         </p:nvSpPr>
@@ -7691,7 +8666,7 @@
                 <a:ea typeface="Calibri" pitchFamily="34" charset="-122"/>
                 <a:cs typeface="Calibri" pitchFamily="34" charset="-120"/>
               </a:rPr>
-              <a:t>MILESTONE</a:t>
+              <a:t>R1 LANDS</a:t>
             </a:r>
             <a:endParaRPr lang="en-US" sz="850" dirty="0"/>
           </a:p>
@@ -7699,7 +8674,7 @@
       </p:sp>
       <p:sp>
         <p:nvSpPr>
-          <p:cNvPr id="39" name="Shape 36"/>
+          <p:cNvPr id="43" name="Shape 40"/>
           <p:cNvSpPr/>
           <p:nvPr/>
         </p:nvSpPr>
@@ -7726,7 +8701,7 @@
       </p:sp>
       <p:sp>
         <p:nvSpPr>
-          <p:cNvPr id="40" name="Text 37"/>
+          <p:cNvPr id="44" name="Text 41"/>
           <p:cNvSpPr/>
           <p:nvPr/>
         </p:nvSpPr>
@@ -7765,7 +8740,7 @@
       </p:sp>
       <p:sp>
         <p:nvSpPr>
-          <p:cNvPr id="41" name="Text 38"/>
+          <p:cNvPr id="45" name="Text 42"/>
           <p:cNvSpPr/>
           <p:nvPr/>
         </p:nvSpPr>
@@ -7796,7 +8771,7 @@
                 <a:ea typeface="Calibri" pitchFamily="34" charset="-122"/>
                 <a:cs typeface="Calibri" pitchFamily="34" charset="-120"/>
               </a:rPr>
-              <a:t>Both milestones are about people, and neither needs a feature that does not exist. Week 1 runs a tool already written; week 3 builds the one thing that must exist before a stranger holds a vault.</a:t>
+              <a:t>Two lanes open at once on purpose: the licence gate (D2) is the one piece of code that must exist before a stranger holds a vault, so it lands the week before R1 does.</a:t>
             </a:r>
             <a:endParaRPr lang="en-US" sz="1050" dirty="0"/>
           </a:p>
@@ -7867,7 +8842,7 @@
                 <a:ea typeface="Calibri" pitchFamily="34" charset="-122"/>
                 <a:cs typeface="Calibri" pitchFamily="34" charset="-120"/>
               </a:rPr>
-              <a:t>M3 SOMEONE COMES BACK · M4 FIRST PAID CONVERSION</a:t>
+              <a:t>DEV × 1  ·  USE × 1  ·  PRO × 2</a:t>
             </a:r>
             <a:endParaRPr lang="en-US" sz="1000" dirty="0"/>
           </a:p>
@@ -8045,11 +9020,11 @@
             </a:avLst>
           </a:prstGeom>
           <a:solidFill>
-            <a:srgbClr val="FFFFFF"/>
+            <a:srgbClr val="F5F4EF"/>
           </a:solidFill>
           <a:ln w="9525">
             <a:solidFill>
-              <a:srgbClr val="E4E2DA"/>
+              <a:srgbClr val="D8D4C9"/>
             </a:solidFill>
             <a:prstDash val="solid"/>
           </a:ln>
@@ -8142,7 +9117,7 @@
         <p:spPr>
           <a:xfrm>
             <a:off x="1572768" y="1728216"/>
-            <a:ext cx="420624" cy="420624"/>
+            <a:ext cx="585216" cy="420624"/>
           </a:xfrm>
           <a:prstGeom prst="roundRect">
             <a:avLst>
@@ -8169,7 +9144,7 @@
         <p:spPr>
           <a:xfrm>
             <a:off x="1572768" y="1728216"/>
-            <a:ext cx="420624" cy="420624"/>
+            <a:ext cx="585216" cy="420624"/>
           </a:xfrm>
           <a:prstGeom prst="rect">
             <a:avLst/>
@@ -8185,7 +9160,7 @@
               <a:buNone/>
             </a:pPr>
             <a:r>
-              <a:rPr lang="en-US" sz="1150" b="1" dirty="0">
+              <a:rPr lang="en-US" sz="950" b="1" dirty="0">
                 <a:solidFill>
                   <a:srgbClr val="FFFFFF"/>
                 </a:solidFill>
@@ -8193,9 +9168,9 @@
                 <a:ea typeface="Calibri" pitchFamily="34" charset="-122"/>
                 <a:cs typeface="Calibri" pitchFamily="34" charset="-120"/>
               </a:rPr>
-              <a:t>M3</a:t>
-            </a:r>
-            <a:endParaRPr lang="en-US" sz="1150" dirty="0"/>
+              <a:t>DEV</a:t>
+            </a:r>
+            <a:endParaRPr lang="en-US" sz="950" dirty="0"/>
           </a:p>
         </p:txBody>
       </p:sp>
@@ -8207,8 +9182,8 @@
         </p:nvSpPr>
         <p:spPr>
           <a:xfrm>
-            <a:off x="2176272" y="1609344"/>
-            <a:ext cx="3474720" cy="676656"/>
+            <a:off x="2340864" y="1609344"/>
+            <a:ext cx="3364992" cy="676656"/>
           </a:xfrm>
           <a:prstGeom prst="rect">
             <a:avLst/>
@@ -8249,8 +9224,8 @@
         </p:nvSpPr>
         <p:spPr>
           <a:xfrm>
-            <a:off x="5806440" y="1609344"/>
-            <a:ext cx="4590288" cy="676656"/>
+            <a:off x="5852160" y="1609344"/>
+            <a:ext cx="4544568" cy="676656"/>
           </a:xfrm>
           <a:prstGeom prst="rect">
             <a:avLst/>
@@ -8286,6 +9261,72 @@
       <p:sp>
         <p:nvSpPr>
           <p:cNvPr id="14" name="Shape 11"/>
+          <p:cNvSpPr/>
+          <p:nvPr/>
+        </p:nvSpPr>
+        <p:spPr>
+          <a:xfrm>
+            <a:off x="10515600" y="1819656"/>
+            <a:ext cx="1005840" cy="237744"/>
+          </a:xfrm>
+          <a:prstGeom prst="roundRect">
+            <a:avLst>
+              <a:gd name="adj" fmla="val 11538"/>
+            </a:avLst>
+          </a:prstGeom>
+          <a:solidFill>
+            <a:srgbClr val="1A2433"/>
+          </a:solidFill>
+          <a:ln w="6350">
+            <a:solidFill>
+              <a:srgbClr val="1A2433"/>
+            </a:solidFill>
+            <a:prstDash val="solid"/>
+          </a:ln>
+        </p:spPr>
+      </p:sp>
+      <p:sp>
+        <p:nvSpPr>
+          <p:cNvPr id="15" name="Text 12"/>
+          <p:cNvSpPr/>
+          <p:nvPr/>
+        </p:nvSpPr>
+        <p:spPr>
+          <a:xfrm>
+            <a:off x="10515600" y="1819656"/>
+            <a:ext cx="1005840" cy="237744"/>
+          </a:xfrm>
+          <a:prstGeom prst="rect">
+            <a:avLst/>
+          </a:prstGeom>
+          <a:noFill/>
+          <a:ln/>
+        </p:spPr>
+        <p:txBody>
+          <a:bodyPr wrap="square" lIns="0" tIns="0" rIns="0" bIns="0" rtlCol="0" anchor="ctr"/>
+          <a:lstStyle/>
+          <a:p>
+            <a:pPr algn="ctr" indent="0" marL="0">
+              <a:buNone/>
+            </a:pPr>
+            <a:r>
+              <a:rPr lang="en-US" sz="850" b="1" spc="100" kern="0" dirty="0">
+                <a:solidFill>
+                  <a:srgbClr val="FFFFFF"/>
+                </a:solidFill>
+                <a:latin typeface="Calibri" pitchFamily="34" charset="0"/>
+                <a:ea typeface="Calibri" pitchFamily="34" charset="-122"/>
+                <a:cs typeface="Calibri" pitchFamily="34" charset="-120"/>
+              </a:rPr>
+              <a:t>D3 LANDS</a:t>
+            </a:r>
+            <a:endParaRPr lang="en-US" sz="850" dirty="0"/>
+          </a:p>
+        </p:txBody>
+      </p:sp>
+      <p:sp>
+        <p:nvSpPr>
+          <p:cNvPr id="16" name="Shape 13"/>
           <p:cNvSpPr/>
           <p:nvPr/>
         </p:nvSpPr>
@@ -8312,7 +9353,7 @@
       </p:sp>
       <p:sp>
         <p:nvSpPr>
-          <p:cNvPr id="15" name="Text 12"/>
+          <p:cNvPr id="17" name="Text 14"/>
           <p:cNvSpPr/>
           <p:nvPr/>
         </p:nvSpPr>
@@ -8337,7 +9378,7 @@
             <a:r>
               <a:rPr lang="en-US" sz="1900" dirty="0">
                 <a:solidFill>
-                  <a:srgbClr val="B91C1C"/>
+                  <a:srgbClr val="7F1D1D"/>
                 </a:solidFill>
                 <a:latin typeface="Georgia" pitchFamily="34" charset="0"/>
                 <a:ea typeface="Georgia" pitchFamily="34" charset="-122"/>
@@ -8351,7 +9392,7 @@
       </p:sp>
       <p:sp>
         <p:nvSpPr>
-          <p:cNvPr id="16" name="Text 13"/>
+          <p:cNvPr id="18" name="Text 15"/>
           <p:cNvSpPr/>
           <p:nvPr/>
         </p:nvSpPr>
@@ -8390,14 +9431,14 @@
       </p:sp>
       <p:sp>
         <p:nvSpPr>
-          <p:cNvPr id="17" name="Shape 14"/>
+          <p:cNvPr id="19" name="Shape 16"/>
           <p:cNvSpPr/>
           <p:nvPr/>
         </p:nvSpPr>
         <p:spPr>
           <a:xfrm>
             <a:off x="1572768" y="2761488"/>
-            <a:ext cx="420624" cy="420624"/>
+            <a:ext cx="585216" cy="420624"/>
           </a:xfrm>
           <a:prstGeom prst="roundRect">
             <a:avLst>
@@ -8417,14 +9458,14 @@
       </p:sp>
       <p:sp>
         <p:nvSpPr>
-          <p:cNvPr id="18" name="Text 15"/>
+          <p:cNvPr id="20" name="Text 17"/>
           <p:cNvSpPr/>
           <p:nvPr/>
         </p:nvSpPr>
         <p:spPr>
           <a:xfrm>
             <a:off x="1572768" y="2761488"/>
-            <a:ext cx="420624" cy="420624"/>
+            <a:ext cx="585216" cy="420624"/>
           </a:xfrm>
           <a:prstGeom prst="rect">
             <a:avLst/>
@@ -8440,7 +9481,7 @@
               <a:buNone/>
             </a:pPr>
             <a:r>
-              <a:rPr lang="en-US" sz="1150" b="1" dirty="0">
+              <a:rPr lang="en-US" sz="950" b="1" dirty="0">
                 <a:solidFill>
                   <a:srgbClr val="FFFFFF"/>
                 </a:solidFill>
@@ -8448,22 +9489,22 @@
                 <a:ea typeface="Calibri" pitchFamily="34" charset="-122"/>
                 <a:cs typeface="Calibri" pitchFamily="34" charset="-120"/>
               </a:rPr>
-              <a:t>M3</a:t>
-            </a:r>
-            <a:endParaRPr lang="en-US" sz="1150" dirty="0"/>
-          </a:p>
-        </p:txBody>
-      </p:sp>
-      <p:sp>
-        <p:nvSpPr>
-          <p:cNvPr id="19" name="Text 16"/>
-          <p:cNvSpPr/>
-          <p:nvPr/>
-        </p:nvSpPr>
-        <p:spPr>
-          <a:xfrm>
-            <a:off x="2176272" y="2642616"/>
-            <a:ext cx="3474720" cy="676656"/>
+              <a:t>USE</a:t>
+            </a:r>
+            <a:endParaRPr lang="en-US" sz="950" dirty="0"/>
+          </a:p>
+        </p:txBody>
+      </p:sp>
+      <p:sp>
+        <p:nvSpPr>
+          <p:cNvPr id="21" name="Text 18"/>
+          <p:cNvSpPr/>
+          <p:nvPr/>
+        </p:nvSpPr>
+        <p:spPr>
+          <a:xfrm>
+            <a:off x="2340864" y="2642616"/>
+            <a:ext cx="3364992" cy="676656"/>
           </a:xfrm>
           <a:prstGeom prst="rect">
             <a:avLst/>
@@ -8498,14 +9539,14 @@
       </p:sp>
       <p:sp>
         <p:nvSpPr>
-          <p:cNvPr id="20" name="Text 17"/>
-          <p:cNvSpPr/>
-          <p:nvPr/>
-        </p:nvSpPr>
-        <p:spPr>
-          <a:xfrm>
-            <a:off x="5806440" y="2642616"/>
-            <a:ext cx="4590288" cy="676656"/>
+          <p:cNvPr id="22" name="Text 19"/>
+          <p:cNvSpPr/>
+          <p:nvPr/>
+        </p:nvSpPr>
+        <p:spPr>
+          <a:xfrm>
+            <a:off x="5852160" y="2642616"/>
+            <a:ext cx="4544568" cy="676656"/>
           </a:xfrm>
           <a:prstGeom prst="rect">
             <a:avLst/>
@@ -8540,7 +9581,7 @@
       </p:sp>
       <p:sp>
         <p:nvSpPr>
-          <p:cNvPr id="21" name="Shape 18"/>
+          <p:cNvPr id="23" name="Shape 20"/>
           <p:cNvSpPr/>
           <p:nvPr/>
         </p:nvSpPr>
@@ -8567,7 +9608,7 @@
       </p:sp>
       <p:sp>
         <p:nvSpPr>
-          <p:cNvPr id="22" name="Text 19"/>
+          <p:cNvPr id="24" name="Text 21"/>
           <p:cNvSpPr/>
           <p:nvPr/>
         </p:nvSpPr>
@@ -8598,7 +9639,7 @@
                 <a:ea typeface="Calibri" pitchFamily="34" charset="-122"/>
                 <a:cs typeface="Calibri" pitchFamily="34" charset="-120"/>
               </a:rPr>
-              <a:t>MILESTONE</a:t>
+              <a:t>U2 LANDS</a:t>
             </a:r>
             <a:endParaRPr lang="en-US" sz="850" dirty="0"/>
           </a:p>
@@ -8606,7 +9647,7 @@
       </p:sp>
       <p:sp>
         <p:nvSpPr>
-          <p:cNvPr id="23" name="Shape 20"/>
+          <p:cNvPr id="25" name="Shape 22"/>
           <p:cNvSpPr/>
           <p:nvPr/>
         </p:nvSpPr>
@@ -8621,11 +9662,11 @@
             </a:avLst>
           </a:prstGeom>
           <a:solidFill>
-            <a:srgbClr val="FFFFFF"/>
+            <a:srgbClr val="E7F5EE"/>
           </a:solidFill>
           <a:ln w="9525">
             <a:solidFill>
-              <a:srgbClr val="E4E2DA"/>
+              <a:srgbClr val="BFE5D2"/>
             </a:solidFill>
             <a:prstDash val="solid"/>
           </a:ln>
@@ -8633,7 +9674,7 @@
       </p:sp>
       <p:sp>
         <p:nvSpPr>
-          <p:cNvPr id="24" name="Text 21"/>
+          <p:cNvPr id="26" name="Text 23"/>
           <p:cNvSpPr/>
           <p:nvPr/>
         </p:nvSpPr>
@@ -8658,7 +9699,7 @@
             <a:r>
               <a:rPr lang="en-US" sz="1900" dirty="0">
                 <a:solidFill>
-                  <a:srgbClr val="1A2433"/>
+                  <a:srgbClr val="06603A"/>
                 </a:solidFill>
                 <a:latin typeface="Georgia" pitchFamily="34" charset="0"/>
                 <a:ea typeface="Georgia" pitchFamily="34" charset="-122"/>
@@ -8672,7 +9713,7 @@
       </p:sp>
       <p:sp>
         <p:nvSpPr>
-          <p:cNvPr id="25" name="Text 22"/>
+          <p:cNvPr id="27" name="Text 24"/>
           <p:cNvSpPr/>
           <p:nvPr/>
         </p:nvSpPr>
@@ -8711,14 +9752,14 @@
       </p:sp>
       <p:sp>
         <p:nvSpPr>
-          <p:cNvPr id="26" name="Shape 23"/>
+          <p:cNvPr id="28" name="Shape 25"/>
           <p:cNvSpPr/>
           <p:nvPr/>
         </p:nvSpPr>
         <p:spPr>
           <a:xfrm>
             <a:off x="1572768" y="3794760"/>
-            <a:ext cx="420624" cy="420624"/>
+            <a:ext cx="585216" cy="420624"/>
           </a:xfrm>
           <a:prstGeom prst="roundRect">
             <a:avLst>
@@ -8726,11 +9767,11 @@
             </a:avLst>
           </a:prstGeom>
           <a:solidFill>
-            <a:srgbClr val="1A2433"/>
+            <a:srgbClr val="06603A"/>
           </a:solidFill>
           <a:ln w="6350">
             <a:solidFill>
-              <a:srgbClr val="1A2433"/>
+              <a:srgbClr val="06603A"/>
             </a:solidFill>
             <a:prstDash val="solid"/>
           </a:ln>
@@ -8738,14 +9779,14 @@
       </p:sp>
       <p:sp>
         <p:nvSpPr>
-          <p:cNvPr id="27" name="Text 24"/>
+          <p:cNvPr id="29" name="Text 26"/>
           <p:cNvSpPr/>
           <p:nvPr/>
         </p:nvSpPr>
         <p:spPr>
           <a:xfrm>
             <a:off x="1572768" y="3794760"/>
-            <a:ext cx="420624" cy="420624"/>
+            <a:ext cx="585216" cy="420624"/>
           </a:xfrm>
           <a:prstGeom prst="rect">
             <a:avLst/>
@@ -8761,7 +9802,7 @@
               <a:buNone/>
             </a:pPr>
             <a:r>
-              <a:rPr lang="en-US" sz="1150" b="1" dirty="0">
+              <a:rPr lang="en-US" sz="950" b="1" dirty="0">
                 <a:solidFill>
                   <a:srgbClr val="FFFFFF"/>
                 </a:solidFill>
@@ -8769,22 +9810,22 @@
                 <a:ea typeface="Calibri" pitchFamily="34" charset="-122"/>
                 <a:cs typeface="Calibri" pitchFamily="34" charset="-120"/>
               </a:rPr>
-              <a:t>M4</a:t>
-            </a:r>
-            <a:endParaRPr lang="en-US" sz="1150" dirty="0"/>
-          </a:p>
-        </p:txBody>
-      </p:sp>
-      <p:sp>
-        <p:nvSpPr>
-          <p:cNvPr id="28" name="Text 25"/>
-          <p:cNvSpPr/>
-          <p:nvPr/>
-        </p:nvSpPr>
-        <p:spPr>
-          <a:xfrm>
-            <a:off x="2176272" y="3675888"/>
-            <a:ext cx="3474720" cy="676656"/>
+              <a:t>PRO</a:t>
+            </a:r>
+            <a:endParaRPr lang="en-US" sz="950" dirty="0"/>
+          </a:p>
+        </p:txBody>
+      </p:sp>
+      <p:sp>
+        <p:nvSpPr>
+          <p:cNvPr id="30" name="Text 27"/>
+          <p:cNvSpPr/>
+          <p:nvPr/>
+        </p:nvSpPr>
+        <p:spPr>
+          <a:xfrm>
+            <a:off x="2340864" y="3675888"/>
+            <a:ext cx="3364992" cy="676656"/>
           </a:xfrm>
           <a:prstGeom prst="rect">
             <a:avLst/>
@@ -8819,14 +9860,14 @@
       </p:sp>
       <p:sp>
         <p:nvSpPr>
-          <p:cNvPr id="29" name="Text 26"/>
-          <p:cNvSpPr/>
-          <p:nvPr/>
-        </p:nvSpPr>
-        <p:spPr>
-          <a:xfrm>
-            <a:off x="5806440" y="3675888"/>
-            <a:ext cx="4590288" cy="676656"/>
+          <p:cNvPr id="31" name="Text 28"/>
+          <p:cNvSpPr/>
+          <p:nvPr/>
+        </p:nvSpPr>
+        <p:spPr>
+          <a:xfrm>
+            <a:off x="5852160" y="3675888"/>
+            <a:ext cx="4544568" cy="676656"/>
           </a:xfrm>
           <a:prstGeom prst="rect">
             <a:avLst/>
@@ -8861,7 +9902,73 @@
       </p:sp>
       <p:sp>
         <p:nvSpPr>
-          <p:cNvPr id="30" name="Shape 27"/>
+          <p:cNvPr id="32" name="Shape 29"/>
+          <p:cNvSpPr/>
+          <p:nvPr/>
+        </p:nvSpPr>
+        <p:spPr>
+          <a:xfrm>
+            <a:off x="10515600" y="3886200"/>
+            <a:ext cx="1005840" cy="237744"/>
+          </a:xfrm>
+          <a:prstGeom prst="roundRect">
+            <a:avLst>
+              <a:gd name="adj" fmla="val 11538"/>
+            </a:avLst>
+          </a:prstGeom>
+          <a:solidFill>
+            <a:srgbClr val="06603A"/>
+          </a:solidFill>
+          <a:ln w="6350">
+            <a:solidFill>
+              <a:srgbClr val="06603A"/>
+            </a:solidFill>
+            <a:prstDash val="solid"/>
+          </a:ln>
+        </p:spPr>
+      </p:sp>
+      <p:sp>
+        <p:nvSpPr>
+          <p:cNvPr id="33" name="Text 30"/>
+          <p:cNvSpPr/>
+          <p:nvPr/>
+        </p:nvSpPr>
+        <p:spPr>
+          <a:xfrm>
+            <a:off x="10515600" y="3886200"/>
+            <a:ext cx="1005840" cy="237744"/>
+          </a:xfrm>
+          <a:prstGeom prst="rect">
+            <a:avLst/>
+          </a:prstGeom>
+          <a:noFill/>
+          <a:ln/>
+        </p:spPr>
+        <p:txBody>
+          <a:bodyPr wrap="square" lIns="0" tIns="0" rIns="0" bIns="0" rtlCol="0" anchor="ctr"/>
+          <a:lstStyle/>
+          <a:p>
+            <a:pPr algn="ctr" indent="0" marL="0">
+              <a:buNone/>
+            </a:pPr>
+            <a:r>
+              <a:rPr lang="en-US" sz="850" b="1" spc="100" kern="0" dirty="0">
+                <a:solidFill>
+                  <a:srgbClr val="FFFFFF"/>
+                </a:solidFill>
+                <a:latin typeface="Calibri" pitchFamily="34" charset="0"/>
+                <a:ea typeface="Calibri" pitchFamily="34" charset="-122"/>
+                <a:cs typeface="Calibri" pitchFamily="34" charset="-120"/>
+              </a:rPr>
+              <a:t>P1 LANDS</a:t>
+            </a:r>
+            <a:endParaRPr lang="en-US" sz="850" dirty="0"/>
+          </a:p>
+        </p:txBody>
+      </p:sp>
+      <p:sp>
+        <p:nvSpPr>
+          <p:cNvPr id="34" name="Shape 31"/>
           <p:cNvSpPr/>
           <p:nvPr/>
         </p:nvSpPr>
@@ -8876,11 +9983,11 @@
             </a:avLst>
           </a:prstGeom>
           <a:solidFill>
-            <a:srgbClr val="FCF1EF"/>
+            <a:srgbClr val="E7F5EE"/>
           </a:solidFill>
           <a:ln w="9525">
             <a:solidFill>
-              <a:srgbClr val="F0C7C7"/>
+              <a:srgbClr val="BFE5D2"/>
             </a:solidFill>
             <a:prstDash val="solid"/>
           </a:ln>
@@ -8888,7 +9995,7 @@
       </p:sp>
       <p:sp>
         <p:nvSpPr>
-          <p:cNvPr id="31" name="Text 28"/>
+          <p:cNvPr id="35" name="Text 32"/>
           <p:cNvSpPr/>
           <p:nvPr/>
         </p:nvSpPr>
@@ -8913,7 +10020,7 @@
             <a:r>
               <a:rPr lang="en-US" sz="1900" dirty="0">
                 <a:solidFill>
-                  <a:srgbClr val="B91C1C"/>
+                  <a:srgbClr val="06603A"/>
                 </a:solidFill>
                 <a:latin typeface="Georgia" pitchFamily="34" charset="0"/>
                 <a:ea typeface="Georgia" pitchFamily="34" charset="-122"/>
@@ -8927,7 +10034,7 @@
       </p:sp>
       <p:sp>
         <p:nvSpPr>
-          <p:cNvPr id="32" name="Text 29"/>
+          <p:cNvPr id="36" name="Text 33"/>
           <p:cNvSpPr/>
           <p:nvPr/>
         </p:nvSpPr>
@@ -8966,14 +10073,14 @@
       </p:sp>
       <p:sp>
         <p:nvSpPr>
-          <p:cNvPr id="33" name="Shape 30"/>
+          <p:cNvPr id="37" name="Shape 34"/>
           <p:cNvSpPr/>
           <p:nvPr/>
         </p:nvSpPr>
         <p:spPr>
           <a:xfrm>
             <a:off x="1572768" y="4828032"/>
-            <a:ext cx="420624" cy="420624"/>
+            <a:ext cx="585216" cy="420624"/>
           </a:xfrm>
           <a:prstGeom prst="roundRect">
             <a:avLst>
@@ -8981,11 +10088,11 @@
             </a:avLst>
           </a:prstGeom>
           <a:solidFill>
-            <a:srgbClr val="B91C1C"/>
+            <a:srgbClr val="06603A"/>
           </a:solidFill>
           <a:ln w="6350">
             <a:solidFill>
-              <a:srgbClr val="B91C1C"/>
+              <a:srgbClr val="06603A"/>
             </a:solidFill>
             <a:prstDash val="solid"/>
           </a:ln>
@@ -8993,14 +10100,14 @@
       </p:sp>
       <p:sp>
         <p:nvSpPr>
-          <p:cNvPr id="34" name="Text 31"/>
+          <p:cNvPr id="38" name="Text 35"/>
           <p:cNvSpPr/>
           <p:nvPr/>
         </p:nvSpPr>
         <p:spPr>
           <a:xfrm>
             <a:off x="1572768" y="4828032"/>
-            <a:ext cx="420624" cy="420624"/>
+            <a:ext cx="585216" cy="420624"/>
           </a:xfrm>
           <a:prstGeom prst="rect">
             <a:avLst/>
@@ -9016,7 +10123,7 @@
               <a:buNone/>
             </a:pPr>
             <a:r>
-              <a:rPr lang="en-US" sz="1150" b="1" dirty="0">
+              <a:rPr lang="en-US" sz="950" b="1" dirty="0">
                 <a:solidFill>
                   <a:srgbClr val="FFFFFF"/>
                 </a:solidFill>
@@ -9024,22 +10131,22 @@
                 <a:ea typeface="Calibri" pitchFamily="34" charset="-122"/>
                 <a:cs typeface="Calibri" pitchFamily="34" charset="-120"/>
               </a:rPr>
-              <a:t>M4</a:t>
-            </a:r>
-            <a:endParaRPr lang="en-US" sz="1150" dirty="0"/>
-          </a:p>
-        </p:txBody>
-      </p:sp>
-      <p:sp>
-        <p:nvSpPr>
-          <p:cNvPr id="35" name="Text 32"/>
-          <p:cNvSpPr/>
-          <p:nvPr/>
-        </p:nvSpPr>
-        <p:spPr>
-          <a:xfrm>
-            <a:off x="2176272" y="4709160"/>
-            <a:ext cx="3474720" cy="676656"/>
+              <a:t>PRO</a:t>
+            </a:r>
+            <a:endParaRPr lang="en-US" sz="950" dirty="0"/>
+          </a:p>
+        </p:txBody>
+      </p:sp>
+      <p:sp>
+        <p:nvSpPr>
+          <p:cNvPr id="39" name="Text 36"/>
+          <p:cNvSpPr/>
+          <p:nvPr/>
+        </p:nvSpPr>
+        <p:spPr>
+          <a:xfrm>
+            <a:off x="2340864" y="4709160"/>
+            <a:ext cx="3364992" cy="676656"/>
           </a:xfrm>
           <a:prstGeom prst="rect">
             <a:avLst/>
@@ -9074,14 +10181,14 @@
       </p:sp>
       <p:sp>
         <p:nvSpPr>
-          <p:cNvPr id="36" name="Text 33"/>
-          <p:cNvSpPr/>
-          <p:nvPr/>
-        </p:nvSpPr>
-        <p:spPr>
-          <a:xfrm>
-            <a:off x="5806440" y="4709160"/>
-            <a:ext cx="4590288" cy="676656"/>
+          <p:cNvPr id="40" name="Text 37"/>
+          <p:cNvSpPr/>
+          <p:nvPr/>
+        </p:nvSpPr>
+        <p:spPr>
+          <a:xfrm>
+            <a:off x="5852160" y="4709160"/>
+            <a:ext cx="4544568" cy="676656"/>
           </a:xfrm>
           <a:prstGeom prst="rect">
             <a:avLst/>
@@ -9116,7 +10223,7 @@
       </p:sp>
       <p:sp>
         <p:nvSpPr>
-          <p:cNvPr id="37" name="Shape 34"/>
+          <p:cNvPr id="41" name="Shape 38"/>
           <p:cNvSpPr/>
           <p:nvPr/>
         </p:nvSpPr>
@@ -9131,11 +10238,11 @@
             </a:avLst>
           </a:prstGeom>
           <a:solidFill>
-            <a:srgbClr val="B91C1C"/>
+            <a:srgbClr val="06603A"/>
           </a:solidFill>
           <a:ln w="6350">
             <a:solidFill>
-              <a:srgbClr val="B91C1C"/>
+              <a:srgbClr val="06603A"/>
             </a:solidFill>
             <a:prstDash val="solid"/>
           </a:ln>
@@ -9143,7 +10250,7 @@
       </p:sp>
       <p:sp>
         <p:nvSpPr>
-          <p:cNvPr id="38" name="Text 35"/>
+          <p:cNvPr id="42" name="Text 39"/>
           <p:cNvSpPr/>
           <p:nvPr/>
         </p:nvSpPr>
@@ -9174,7 +10281,7 @@
                 <a:ea typeface="Calibri" pitchFamily="34" charset="-122"/>
                 <a:cs typeface="Calibri" pitchFamily="34" charset="-120"/>
               </a:rPr>
-              <a:t>MILESTONE</a:t>
+              <a:t>P2 LANDS</a:t>
             </a:r>
             <a:endParaRPr lang="en-US" sz="850" dirty="0"/>
           </a:p>
@@ -9182,7 +10289,7 @@
       </p:sp>
       <p:sp>
         <p:nvSpPr>
-          <p:cNvPr id="39" name="Shape 36"/>
+          <p:cNvPr id="43" name="Shape 40"/>
           <p:cNvSpPr/>
           <p:nvPr/>
         </p:nvSpPr>
@@ -9209,7 +10316,7 @@
       </p:sp>
       <p:sp>
         <p:nvSpPr>
-          <p:cNvPr id="40" name="Text 37"/>
+          <p:cNvPr id="44" name="Text 41"/>
           <p:cNvSpPr/>
           <p:nvPr/>
         </p:nvSpPr>
@@ -9248,7 +10355,7 @@
       </p:sp>
       <p:sp>
         <p:nvSpPr>
-          <p:cNvPr id="41" name="Text 38"/>
+          <p:cNvPr id="45" name="Text 42"/>
           <p:cNvSpPr/>
           <p:nvPr/>
         </p:nvSpPr>
@@ -9279,7 +10386,7 @@
                 <a:ea typeface="Calibri" pitchFamily="34" charset="-122"/>
                 <a:cs typeface="Calibri" pitchFamily="34" charset="-120"/>
               </a:rPr>
-              <a:t>Retention is proved before the money is asked for, deliberately. A first payment from somebody who was never going to return is a refund with a delay on it.</a:t>
+              <a:t>Retention is proved before the money is asked for. A first payment from somebody who was never going to return is a refund with a delay on it.</a:t>
             </a:r>
             <a:endParaRPr lang="en-US" sz="1050" dirty="0"/>
           </a:p>
@@ -9350,7 +10457,7 @@
                 <a:ea typeface="Calibri" pitchFamily="34" charset="-122"/>
                 <a:cs typeface="Calibri" pitchFamily="34" charset="-120"/>
               </a:rPr>
-              <a:t>M5 CORPUS DENSITY · M6 CLEARANCE TO GROW</a:t>
+              <a:t>REL × 2  ·  USE × 1  ·  PRO × 1</a:t>
             </a:r>
             <a:endParaRPr lang="en-US" sz="1000" dirty="0"/>
           </a:p>
@@ -9389,7 +10496,7 @@
                 <a:ea typeface="Georgia" pitchFamily="34" charset="-122"/>
                 <a:cs typeface="Georgia" pitchFamily="34" charset="-120"/>
               </a:rPr>
-              <a:t>Weeks 9–12 · Density, accuracy, clearance</a:t>
+              <a:t>Weeks 9–12 · Credit, density, clearance</a:t>
             </a:r>
             <a:endParaRPr lang="en-US" sz="3000" dirty="0"/>
           </a:p>
@@ -9528,11 +10635,11 @@
             </a:avLst>
           </a:prstGeom>
           <a:solidFill>
-            <a:srgbClr val="FFFFFF"/>
+            <a:srgbClr val="EDE9F8"/>
           </a:solidFill>
           <a:ln w="9525">
             <a:solidFill>
-              <a:srgbClr val="E4E2DA"/>
+              <a:srgbClr val="C4B5FD"/>
             </a:solidFill>
             <a:prstDash val="solid"/>
           </a:ln>
@@ -9565,7 +10672,7 @@
             <a:r>
               <a:rPr lang="en-US" sz="1900" dirty="0">
                 <a:solidFill>
-                  <a:srgbClr val="1A2433"/>
+                  <a:srgbClr val="4C3A8C"/>
                 </a:solidFill>
                 <a:latin typeface="Georgia" pitchFamily="34" charset="0"/>
                 <a:ea typeface="Georgia" pitchFamily="34" charset="-122"/>
@@ -9625,7 +10732,7 @@
         <p:spPr>
           <a:xfrm>
             <a:off x="1572768" y="1728216"/>
-            <a:ext cx="420624" cy="420624"/>
+            <a:ext cx="585216" cy="420624"/>
           </a:xfrm>
           <a:prstGeom prst="roundRect">
             <a:avLst>
@@ -9633,11 +10740,11 @@
             </a:avLst>
           </a:prstGeom>
           <a:solidFill>
-            <a:srgbClr val="1A2433"/>
+            <a:srgbClr val="4C3A8C"/>
           </a:solidFill>
           <a:ln w="6350">
             <a:solidFill>
-              <a:srgbClr val="1A2433"/>
+              <a:srgbClr val="4C3A8C"/>
             </a:solidFill>
             <a:prstDash val="solid"/>
           </a:ln>
@@ -9652,7 +10759,7 @@
         <p:spPr>
           <a:xfrm>
             <a:off x="1572768" y="1728216"/>
-            <a:ext cx="420624" cy="420624"/>
+            <a:ext cx="585216" cy="420624"/>
           </a:xfrm>
           <a:prstGeom prst="rect">
             <a:avLst/>
@@ -9668,7 +10775,7 @@
               <a:buNone/>
             </a:pPr>
             <a:r>
-              <a:rPr lang="en-US" sz="1150" b="1" dirty="0">
+              <a:rPr lang="en-US" sz="950" b="1" dirty="0">
                 <a:solidFill>
                   <a:srgbClr val="FFFFFF"/>
                 </a:solidFill>
@@ -9676,9 +10783,9 @@
                 <a:ea typeface="Calibri" pitchFamily="34" charset="-122"/>
                 <a:cs typeface="Calibri" pitchFamily="34" charset="-120"/>
               </a:rPr>
-              <a:t>M5</a:t>
-            </a:r>
-            <a:endParaRPr lang="en-US" sz="1150" dirty="0"/>
+              <a:t>REL</a:t>
+            </a:r>
+            <a:endParaRPr lang="en-US" sz="950" dirty="0"/>
           </a:p>
         </p:txBody>
       </p:sp>
@@ -9690,8 +10797,8 @@
         </p:nvSpPr>
         <p:spPr>
           <a:xfrm>
-            <a:off x="2176272" y="1609344"/>
-            <a:ext cx="3474720" cy="676656"/>
+            <a:off x="2340864" y="1609344"/>
+            <a:ext cx="3364992" cy="676656"/>
           </a:xfrm>
           <a:prstGeom prst="rect">
             <a:avLst/>
@@ -9718,7 +10825,7 @@
                 <a:ea typeface="Calibri" pitchFamily="34" charset="-122"/>
                 <a:cs typeface="Calibri" pitchFamily="34" charset="-120"/>
               </a:rPr>
-              <a:t>Let real traffic feed the corpus</a:t>
+              <a:t>Close the credit loop for one broker</a:t>
             </a:r>
             <a:endParaRPr lang="en-US" sz="1250" dirty="0"/>
           </a:p>
@@ -9732,8 +10839,8 @@
         </p:nvSpPr>
         <p:spPr>
           <a:xfrm>
-            <a:off x="5806440" y="1609344"/>
-            <a:ext cx="4590288" cy="676656"/>
+            <a:off x="5852160" y="1609344"/>
+            <a:ext cx="4544568" cy="676656"/>
           </a:xfrm>
           <a:prstGeom prst="rect">
             <a:avLst/>
@@ -9760,7 +10867,7 @@
                 <a:ea typeface="Calibri" pitchFamily="34" charset="-122"/>
                 <a:cs typeface="Calibri" pitchFamily="34" charset="-120"/>
               </a:rPr>
-              <a:t>Every search harvests, billed or cached, and repeat markets cut the search budget. Watch bucket density and the corpus hit rate on /admin — judge the ratio going forward, since the lifetime figure counts weeks before retrieval existed.</a:t>
+              <a:t>A broker publishes a comp under a credit name they stated themselves, and sees the citation count rise on it. That loop is the entire currency the broker tier trades in — brokers are paid in credit, not cash — and nobody outside has ever been through it.</a:t>
             </a:r>
             <a:endParaRPr lang="en-US" sz="1050" dirty="0"/>
           </a:p>
@@ -9769,6 +10876,72 @@
       <p:sp>
         <p:nvSpPr>
           <p:cNvPr id="14" name="Shape 11"/>
+          <p:cNvSpPr/>
+          <p:nvPr/>
+        </p:nvSpPr>
+        <p:spPr>
+          <a:xfrm>
+            <a:off x="10515600" y="1819656"/>
+            <a:ext cx="1005840" cy="237744"/>
+          </a:xfrm>
+          <a:prstGeom prst="roundRect">
+            <a:avLst>
+              <a:gd name="adj" fmla="val 11538"/>
+            </a:avLst>
+          </a:prstGeom>
+          <a:solidFill>
+            <a:srgbClr val="4C3A8C"/>
+          </a:solidFill>
+          <a:ln w="6350">
+            <a:solidFill>
+              <a:srgbClr val="4C3A8C"/>
+            </a:solidFill>
+            <a:prstDash val="solid"/>
+          </a:ln>
+        </p:spPr>
+      </p:sp>
+      <p:sp>
+        <p:nvSpPr>
+          <p:cNvPr id="15" name="Text 12"/>
+          <p:cNvSpPr/>
+          <p:nvPr/>
+        </p:nvSpPr>
+        <p:spPr>
+          <a:xfrm>
+            <a:off x="10515600" y="1819656"/>
+            <a:ext cx="1005840" cy="237744"/>
+          </a:xfrm>
+          <a:prstGeom prst="rect">
+            <a:avLst/>
+          </a:prstGeom>
+          <a:noFill/>
+          <a:ln/>
+        </p:spPr>
+        <p:txBody>
+          <a:bodyPr wrap="square" lIns="0" tIns="0" rIns="0" bIns="0" rtlCol="0" anchor="ctr"/>
+          <a:lstStyle/>
+          <a:p>
+            <a:pPr algn="ctr" indent="0" marL="0">
+              <a:buNone/>
+            </a:pPr>
+            <a:r>
+              <a:rPr lang="en-US" sz="850" b="1" spc="100" kern="0" dirty="0">
+                <a:solidFill>
+                  <a:srgbClr val="FFFFFF"/>
+                </a:solidFill>
+                <a:latin typeface="Calibri" pitchFamily="34" charset="0"/>
+                <a:ea typeface="Calibri" pitchFamily="34" charset="-122"/>
+                <a:cs typeface="Calibri" pitchFamily="34" charset="-120"/>
+              </a:rPr>
+              <a:t>R2 LANDS</a:t>
+            </a:r>
+            <a:endParaRPr lang="en-US" sz="850" dirty="0"/>
+          </a:p>
+        </p:txBody>
+      </p:sp>
+      <p:sp>
+        <p:nvSpPr>
+          <p:cNvPr id="16" name="Shape 13"/>
           <p:cNvSpPr/>
           <p:nvPr/>
         </p:nvSpPr>
@@ -9795,7 +10968,7 @@
       </p:sp>
       <p:sp>
         <p:nvSpPr>
-          <p:cNvPr id="15" name="Text 12"/>
+          <p:cNvPr id="17" name="Text 14"/>
           <p:cNvSpPr/>
           <p:nvPr/>
         </p:nvSpPr>
@@ -9820,7 +10993,7 @@
             <a:r>
               <a:rPr lang="en-US" sz="1900" dirty="0">
                 <a:solidFill>
-                  <a:srgbClr val="B91C1C"/>
+                  <a:srgbClr val="7F1D1D"/>
                 </a:solidFill>
                 <a:latin typeface="Georgia" pitchFamily="34" charset="0"/>
                 <a:ea typeface="Georgia" pitchFamily="34" charset="-122"/>
@@ -9834,7 +11007,7 @@
       </p:sp>
       <p:sp>
         <p:nvSpPr>
-          <p:cNvPr id="16" name="Text 13"/>
+          <p:cNvPr id="18" name="Text 15"/>
           <p:cNvSpPr/>
           <p:nvPr/>
         </p:nvSpPr>
@@ -9873,14 +11046,14 @@
       </p:sp>
       <p:sp>
         <p:nvSpPr>
-          <p:cNvPr id="17" name="Shape 14"/>
+          <p:cNvPr id="19" name="Shape 16"/>
           <p:cNvSpPr/>
           <p:nvPr/>
         </p:nvSpPr>
         <p:spPr>
           <a:xfrm>
             <a:off x="1572768" y="2761488"/>
-            <a:ext cx="420624" cy="420624"/>
+            <a:ext cx="585216" cy="420624"/>
           </a:xfrm>
           <a:prstGeom prst="roundRect">
             <a:avLst>
@@ -9900,14 +11073,14 @@
       </p:sp>
       <p:sp>
         <p:nvSpPr>
-          <p:cNvPr id="18" name="Text 15"/>
+          <p:cNvPr id="20" name="Text 17"/>
           <p:cNvSpPr/>
           <p:nvPr/>
         </p:nvSpPr>
         <p:spPr>
           <a:xfrm>
             <a:off x="1572768" y="2761488"/>
-            <a:ext cx="420624" cy="420624"/>
+            <a:ext cx="585216" cy="420624"/>
           </a:xfrm>
           <a:prstGeom prst="rect">
             <a:avLst/>
@@ -9923,7 +11096,7 @@
               <a:buNone/>
             </a:pPr>
             <a:r>
-              <a:rPr lang="en-US" sz="1150" b="1" dirty="0">
+              <a:rPr lang="en-US" sz="950" b="1" dirty="0">
                 <a:solidFill>
                   <a:srgbClr val="FFFFFF"/>
                 </a:solidFill>
@@ -9931,22 +11104,22 @@
                 <a:ea typeface="Calibri" pitchFamily="34" charset="-122"/>
                 <a:cs typeface="Calibri" pitchFamily="34" charset="-120"/>
               </a:rPr>
-              <a:t>M5</a:t>
-            </a:r>
-            <a:endParaRPr lang="en-US" sz="1150" dirty="0"/>
-          </a:p>
-        </p:txBody>
-      </p:sp>
-      <p:sp>
-        <p:nvSpPr>
-          <p:cNvPr id="19" name="Text 16"/>
-          <p:cNvSpPr/>
-          <p:nvPr/>
-        </p:nvSpPr>
-        <p:spPr>
-          <a:xfrm>
-            <a:off x="2176272" y="2642616"/>
-            <a:ext cx="3474720" cy="676656"/>
+              <a:t>USE</a:t>
+            </a:r>
+            <a:endParaRPr lang="en-US" sz="950" dirty="0"/>
+          </a:p>
+        </p:txBody>
+      </p:sp>
+      <p:sp>
+        <p:nvSpPr>
+          <p:cNvPr id="21" name="Text 18"/>
+          <p:cNvSpPr/>
+          <p:nvPr/>
+        </p:nvSpPr>
+        <p:spPr>
+          <a:xfrm>
+            <a:off x="2340864" y="2642616"/>
+            <a:ext cx="3364992" cy="676656"/>
           </a:xfrm>
           <a:prstGeom prst="rect">
             <a:avLst/>
@@ -9973,7 +11146,7 @@
                 <a:ea typeface="Calibri" pitchFamily="34" charset="-122"/>
                 <a:cs typeface="Calibri" pitchFamily="34" charset="-120"/>
               </a:rPr>
-              <a:t>Cross the accuracy floor</a:t>
+              <a:t>Let real traffic thicken the corpus</a:t>
             </a:r>
             <a:endParaRPr lang="en-US" sz="1250" dirty="0"/>
           </a:p>
@@ -9981,14 +11154,14 @@
       </p:sp>
       <p:sp>
         <p:nvSpPr>
-          <p:cNvPr id="20" name="Text 17"/>
-          <p:cNvSpPr/>
-          <p:nvPr/>
-        </p:nvSpPr>
-        <p:spPr>
-          <a:xfrm>
-            <a:off x="5806440" y="2642616"/>
-            <a:ext cx="4590288" cy="676656"/>
+          <p:cNvPr id="22" name="Text 19"/>
+          <p:cNvSpPr/>
+          <p:nvPr/>
+        </p:nvSpPr>
+        <p:spPr>
+          <a:xfrm>
+            <a:off x="5852160" y="2642616"/>
+            <a:ext cx="4544568" cy="676656"/>
           </a:xfrm>
           <a:prstGeom prst="rect">
             <a:avLst/>
@@ -10015,7 +11188,7 @@
                 <a:ea typeface="Calibri" pitchFamily="34" charset="-122"/>
                 <a:cs typeface="Calibri" pitchFamily="34" charset="-120"/>
               </a:rPr>
-              <a:t>The backtest shows progress toward 20 scored subjects instead of a number, because a median over a handful swings too far. Cross it, read the error per type, and only then consider whether any of it may be said out loud.</a:t>
+              <a:t>Density is downstream of use, which is why it sits in this lane and not in DEV. Ten market/type buckets at eight good comps unblocks the browse page; the corpus_offer events on /admin are the gauge. Cross the backtest's 20-subject floor while watching.</a:t>
             </a:r>
             <a:endParaRPr lang="en-US" sz="1050" dirty="0"/>
           </a:p>
@@ -10023,7 +11196,7 @@
       </p:sp>
       <p:sp>
         <p:nvSpPr>
-          <p:cNvPr id="21" name="Shape 18"/>
+          <p:cNvPr id="23" name="Shape 20"/>
           <p:cNvSpPr/>
           <p:nvPr/>
         </p:nvSpPr>
@@ -10050,7 +11223,7 @@
       </p:sp>
       <p:sp>
         <p:nvSpPr>
-          <p:cNvPr id="22" name="Text 19"/>
+          <p:cNvPr id="24" name="Text 21"/>
           <p:cNvSpPr/>
           <p:nvPr/>
         </p:nvSpPr>
@@ -10081,7 +11254,7 @@
                 <a:ea typeface="Calibri" pitchFamily="34" charset="-122"/>
                 <a:cs typeface="Calibri" pitchFamily="34" charset="-120"/>
               </a:rPr>
-              <a:t>MILESTONE</a:t>
+              <a:t>U3 LANDS</a:t>
             </a:r>
             <a:endParaRPr lang="en-US" sz="850" dirty="0"/>
           </a:p>
@@ -10089,7 +11262,7 @@
       </p:sp>
       <p:sp>
         <p:nvSpPr>
-          <p:cNvPr id="23" name="Shape 20"/>
+          <p:cNvPr id="25" name="Shape 22"/>
           <p:cNvSpPr/>
           <p:nvPr/>
         </p:nvSpPr>
@@ -10104,11 +11277,11 @@
             </a:avLst>
           </a:prstGeom>
           <a:solidFill>
-            <a:srgbClr val="FFFFFF"/>
+            <a:srgbClr val="EDE9F8"/>
           </a:solidFill>
           <a:ln w="9525">
             <a:solidFill>
-              <a:srgbClr val="E4E2DA"/>
+              <a:srgbClr val="C4B5FD"/>
             </a:solidFill>
             <a:prstDash val="solid"/>
           </a:ln>
@@ -10116,7 +11289,7 @@
       </p:sp>
       <p:sp>
         <p:nvSpPr>
-          <p:cNvPr id="24" name="Text 21"/>
+          <p:cNvPr id="26" name="Text 23"/>
           <p:cNvSpPr/>
           <p:nvPr/>
         </p:nvSpPr>
@@ -10141,7 +11314,7 @@
             <a:r>
               <a:rPr lang="en-US" sz="1900" dirty="0">
                 <a:solidFill>
-                  <a:srgbClr val="1A2433"/>
+                  <a:srgbClr val="4C3A8C"/>
                 </a:solidFill>
                 <a:latin typeface="Georgia" pitchFamily="34" charset="0"/>
                 <a:ea typeface="Georgia" pitchFamily="34" charset="-122"/>
@@ -10155,7 +11328,7 @@
       </p:sp>
       <p:sp>
         <p:nvSpPr>
-          <p:cNvPr id="25" name="Text 22"/>
+          <p:cNvPr id="27" name="Text 24"/>
           <p:cNvSpPr/>
           <p:nvPr/>
         </p:nvSpPr>
@@ -10194,14 +11367,14 @@
       </p:sp>
       <p:sp>
         <p:nvSpPr>
-          <p:cNvPr id="26" name="Shape 23"/>
+          <p:cNvPr id="28" name="Shape 25"/>
           <p:cNvSpPr/>
           <p:nvPr/>
         </p:nvSpPr>
         <p:spPr>
           <a:xfrm>
             <a:off x="1572768" y="3794760"/>
-            <a:ext cx="420624" cy="420624"/>
+            <a:ext cx="585216" cy="420624"/>
           </a:xfrm>
           <a:prstGeom prst="roundRect">
             <a:avLst>
@@ -10209,11 +11382,11 @@
             </a:avLst>
           </a:prstGeom>
           <a:solidFill>
-            <a:srgbClr val="1A2433"/>
+            <a:srgbClr val="4C3A8C"/>
           </a:solidFill>
           <a:ln w="6350">
             <a:solidFill>
-              <a:srgbClr val="1A2433"/>
+              <a:srgbClr val="4C3A8C"/>
             </a:solidFill>
             <a:prstDash val="solid"/>
           </a:ln>
@@ -10221,14 +11394,14 @@
       </p:sp>
       <p:sp>
         <p:nvSpPr>
-          <p:cNvPr id="27" name="Text 24"/>
+          <p:cNvPr id="29" name="Text 26"/>
           <p:cNvSpPr/>
           <p:nvPr/>
         </p:nvSpPr>
         <p:spPr>
           <a:xfrm>
             <a:off x="1572768" y="3794760"/>
-            <a:ext cx="420624" cy="420624"/>
+            <a:ext cx="585216" cy="420624"/>
           </a:xfrm>
           <a:prstGeom prst="rect">
             <a:avLst/>
@@ -10244,7 +11417,7 @@
               <a:buNone/>
             </a:pPr>
             <a:r>
-              <a:rPr lang="en-US" sz="1150" b="1" dirty="0">
+              <a:rPr lang="en-US" sz="950" b="1" dirty="0">
                 <a:solidFill>
                   <a:srgbClr val="FFFFFF"/>
                 </a:solidFill>
@@ -10252,22 +11425,22 @@
                 <a:ea typeface="Calibri" pitchFamily="34" charset="-122"/>
                 <a:cs typeface="Calibri" pitchFamily="34" charset="-120"/>
               </a:rPr>
-              <a:t>M6</a:t>
-            </a:r>
-            <a:endParaRPr lang="en-US" sz="1150" dirty="0"/>
-          </a:p>
-        </p:txBody>
-      </p:sp>
-      <p:sp>
-        <p:nvSpPr>
-          <p:cNvPr id="28" name="Text 25"/>
-          <p:cNvSpPr/>
-          <p:nvPr/>
-        </p:nvSpPr>
-        <p:spPr>
-          <a:xfrm>
-            <a:off x="2176272" y="3675888"/>
-            <a:ext cx="3474720" cy="676656"/>
+              <a:t>REL</a:t>
+            </a:r>
+            <a:endParaRPr lang="en-US" sz="950" dirty="0"/>
+          </a:p>
+        </p:txBody>
+      </p:sp>
+      <p:sp>
+        <p:nvSpPr>
+          <p:cNvPr id="30" name="Text 27"/>
+          <p:cNvSpPr/>
+          <p:nvPr/>
+        </p:nvSpPr>
+        <p:spPr>
+          <a:xfrm>
+            <a:off x="2340864" y="3675888"/>
+            <a:ext cx="3364992" cy="676656"/>
           </a:xfrm>
           <a:prstGeom prst="rect">
             <a:avLst/>
@@ -10302,14 +11475,14 @@
       </p:sp>
       <p:sp>
         <p:nvSpPr>
-          <p:cNvPr id="29" name="Text 26"/>
-          <p:cNvSpPr/>
-          <p:nvPr/>
-        </p:nvSpPr>
-        <p:spPr>
-          <a:xfrm>
-            <a:off x="5806440" y="3675888"/>
-            <a:ext cx="4590288" cy="676656"/>
+          <p:cNvPr id="31" name="Text 28"/>
+          <p:cNvSpPr/>
+          <p:nvPr/>
+        </p:nvSpPr>
+        <p:spPr>
+          <a:xfrm>
+            <a:off x="5852160" y="3675888"/>
+            <a:ext cx="4544568" cy="676656"/>
           </a:xfrm>
           <a:prstGeom prst="rect">
             <a:avLst/>
@@ -10344,7 +11517,73 @@
       </p:sp>
       <p:sp>
         <p:nvSpPr>
-          <p:cNvPr id="30" name="Shape 27"/>
+          <p:cNvPr id="32" name="Shape 29"/>
+          <p:cNvSpPr/>
+          <p:nvPr/>
+        </p:nvSpPr>
+        <p:spPr>
+          <a:xfrm>
+            <a:off x="10515600" y="3886200"/>
+            <a:ext cx="1005840" cy="237744"/>
+          </a:xfrm>
+          <a:prstGeom prst="roundRect">
+            <a:avLst>
+              <a:gd name="adj" fmla="val 11538"/>
+            </a:avLst>
+          </a:prstGeom>
+          <a:solidFill>
+            <a:srgbClr val="4C3A8C"/>
+          </a:solidFill>
+          <a:ln w="6350">
+            <a:solidFill>
+              <a:srgbClr val="4C3A8C"/>
+            </a:solidFill>
+            <a:prstDash val="solid"/>
+          </a:ln>
+        </p:spPr>
+      </p:sp>
+      <p:sp>
+        <p:nvSpPr>
+          <p:cNvPr id="33" name="Text 30"/>
+          <p:cNvSpPr/>
+          <p:nvPr/>
+        </p:nvSpPr>
+        <p:spPr>
+          <a:xfrm>
+            <a:off x="10515600" y="3886200"/>
+            <a:ext cx="1005840" cy="237744"/>
+          </a:xfrm>
+          <a:prstGeom prst="rect">
+            <a:avLst/>
+          </a:prstGeom>
+          <a:noFill/>
+          <a:ln/>
+        </p:spPr>
+        <p:txBody>
+          <a:bodyPr wrap="square" lIns="0" tIns="0" rIns="0" bIns="0" rtlCol="0" anchor="ctr"/>
+          <a:lstStyle/>
+          <a:p>
+            <a:pPr algn="ctr" indent="0" marL="0">
+              <a:buNone/>
+            </a:pPr>
+            <a:r>
+              <a:rPr lang="en-US" sz="850" b="1" spc="100" kern="0" dirty="0">
+                <a:solidFill>
+                  <a:srgbClr val="FFFFFF"/>
+                </a:solidFill>
+                <a:latin typeface="Calibri" pitchFamily="34" charset="0"/>
+                <a:ea typeface="Calibri" pitchFamily="34" charset="-122"/>
+                <a:cs typeface="Calibri" pitchFamily="34" charset="-120"/>
+              </a:rPr>
+              <a:t>R3 LANDS</a:t>
+            </a:r>
+            <a:endParaRPr lang="en-US" sz="850" dirty="0"/>
+          </a:p>
+        </p:txBody>
+      </p:sp>
+      <p:sp>
+        <p:nvSpPr>
+          <p:cNvPr id="34" name="Shape 31"/>
           <p:cNvSpPr/>
           <p:nvPr/>
         </p:nvSpPr>
@@ -10359,11 +11598,11 @@
             </a:avLst>
           </a:prstGeom>
           <a:solidFill>
-            <a:srgbClr val="FCF1EF"/>
+            <a:srgbClr val="E7F5EE"/>
           </a:solidFill>
           <a:ln w="9525">
             <a:solidFill>
-              <a:srgbClr val="F0C7C7"/>
+              <a:srgbClr val="BFE5D2"/>
             </a:solidFill>
             <a:prstDash val="solid"/>
           </a:ln>
@@ -10371,7 +11610,7 @@
       </p:sp>
       <p:sp>
         <p:nvSpPr>
-          <p:cNvPr id="31" name="Text 28"/>
+          <p:cNvPr id="35" name="Text 32"/>
           <p:cNvSpPr/>
           <p:nvPr/>
         </p:nvSpPr>
@@ -10396,7 +11635,7 @@
             <a:r>
               <a:rPr lang="en-US" sz="1900" dirty="0">
                 <a:solidFill>
-                  <a:srgbClr val="B91C1C"/>
+                  <a:srgbClr val="06603A"/>
                 </a:solidFill>
                 <a:latin typeface="Georgia" pitchFamily="34" charset="0"/>
                 <a:ea typeface="Georgia" pitchFamily="34" charset="-122"/>
@@ -10410,7 +11649,7 @@
       </p:sp>
       <p:sp>
         <p:nvSpPr>
-          <p:cNvPr id="32" name="Text 29"/>
+          <p:cNvPr id="36" name="Text 33"/>
           <p:cNvSpPr/>
           <p:nvPr/>
         </p:nvSpPr>
@@ -10449,14 +11688,14 @@
       </p:sp>
       <p:sp>
         <p:nvSpPr>
-          <p:cNvPr id="33" name="Shape 30"/>
+          <p:cNvPr id="37" name="Shape 34"/>
           <p:cNvSpPr/>
           <p:nvPr/>
         </p:nvSpPr>
         <p:spPr>
           <a:xfrm>
             <a:off x="1572768" y="4828032"/>
-            <a:ext cx="420624" cy="420624"/>
+            <a:ext cx="585216" cy="420624"/>
           </a:xfrm>
           <a:prstGeom prst="roundRect">
             <a:avLst>
@@ -10464,11 +11703,11 @@
             </a:avLst>
           </a:prstGeom>
           <a:solidFill>
-            <a:srgbClr val="B91C1C"/>
+            <a:srgbClr val="06603A"/>
           </a:solidFill>
           <a:ln w="6350">
             <a:solidFill>
-              <a:srgbClr val="B91C1C"/>
+              <a:srgbClr val="06603A"/>
             </a:solidFill>
             <a:prstDash val="solid"/>
           </a:ln>
@@ -10476,14 +11715,14 @@
       </p:sp>
       <p:sp>
         <p:nvSpPr>
-          <p:cNvPr id="34" name="Text 31"/>
+          <p:cNvPr id="38" name="Text 35"/>
           <p:cNvSpPr/>
           <p:nvPr/>
         </p:nvSpPr>
         <p:spPr>
           <a:xfrm>
             <a:off x="1572768" y="4828032"/>
-            <a:ext cx="420624" cy="420624"/>
+            <a:ext cx="585216" cy="420624"/>
           </a:xfrm>
           <a:prstGeom prst="rect">
             <a:avLst/>
@@ -10499,7 +11738,7 @@
               <a:buNone/>
             </a:pPr>
             <a:r>
-              <a:rPr lang="en-US" sz="1150" b="1" dirty="0">
+              <a:rPr lang="en-US" sz="950" b="1" dirty="0">
                 <a:solidFill>
                   <a:srgbClr val="FFFFFF"/>
                 </a:solidFill>
@@ -10507,22 +11746,22 @@
                 <a:ea typeface="Calibri" pitchFamily="34" charset="-122"/>
                 <a:cs typeface="Calibri" pitchFamily="34" charset="-120"/>
               </a:rPr>
-              <a:t>M6</a:t>
-            </a:r>
-            <a:endParaRPr lang="en-US" sz="1150" dirty="0"/>
-          </a:p>
-        </p:txBody>
-      </p:sp>
-      <p:sp>
-        <p:nvSpPr>
-          <p:cNvPr id="35" name="Text 32"/>
-          <p:cNvSpPr/>
-          <p:nvPr/>
-        </p:nvSpPr>
-        <p:spPr>
-          <a:xfrm>
-            <a:off x="2176272" y="4709160"/>
-            <a:ext cx="3474720" cy="676656"/>
+              <a:t>PRO</a:t>
+            </a:r>
+            <a:endParaRPr lang="en-US" sz="950" dirty="0"/>
+          </a:p>
+        </p:txBody>
+      </p:sp>
+      <p:sp>
+        <p:nvSpPr>
+          <p:cNvPr id="39" name="Text 36"/>
+          <p:cNvSpPr/>
+          <p:nvPr/>
+        </p:nvSpPr>
+        <p:spPr>
+          <a:xfrm>
+            <a:off x="2340864" y="4709160"/>
+            <a:ext cx="3364992" cy="676656"/>
           </a:xfrm>
           <a:prstGeom prst="rect">
             <a:avLst/>
@@ -10549,7 +11788,7 @@
                 <a:ea typeface="Calibri" pitchFamily="34" charset="-122"/>
                 <a:cs typeface="Calibri" pitchFamily="34" charset="-120"/>
               </a:rPr>
-              <a:t>Decide the broker network's shape</a:t>
+              <a:t>Decide what the broker network is worth</a:t>
             </a:r>
             <a:endParaRPr lang="en-US" sz="1250" dirty="0"/>
           </a:p>
@@ -10557,14 +11796,14 @@
       </p:sp>
       <p:sp>
         <p:nvSpPr>
-          <p:cNvPr id="36" name="Text 33"/>
-          <p:cNvSpPr/>
-          <p:nvPr/>
-        </p:nvSpPr>
-        <p:spPr>
-          <a:xfrm>
-            <a:off x="5806440" y="4709160"/>
-            <a:ext cx="4590288" cy="676656"/>
+          <p:cNvPr id="40" name="Text 37"/>
+          <p:cNvSpPr/>
+          <p:nvPr/>
+        </p:nvSpPr>
+        <p:spPr>
+          <a:xfrm>
+            <a:off x="5852160" y="4709160"/>
+            <a:ext cx="4544568" cy="676656"/>
           </a:xfrm>
           <a:prstGeom prst="rect">
             <a:avLst/>
@@ -10591,7 +11830,7 @@
                 <a:ea typeface="Calibri" pitchFamily="34" charset="-122"/>
                 <a:cs typeface="Calibri" pitchFamily="34" charset="-120"/>
               </a:rPr>
-              <a:t>Hub ratings are the last v4 slice. Monetisation waits on the referral-fee answer; if fees are barred, the fallback is lead visibility as a subscription benefit. Decide it in writing either way and move the line to the Shipped log.</a:t>
+              <a:t>Hub ratings are the last v4 slice. Monetisation waits on the referral-fee answer from R3; if fees are barred, the fallback is lead visibility as a subscription benefit. Decide it in writing either way and move the line to the Shipped log.</a:t>
             </a:r>
             <a:endParaRPr lang="en-US" sz="1050" dirty="0"/>
           </a:p>
@@ -10599,7 +11838,7 @@
       </p:sp>
       <p:sp>
         <p:nvSpPr>
-          <p:cNvPr id="37" name="Shape 34"/>
+          <p:cNvPr id="41" name="Shape 38"/>
           <p:cNvSpPr/>
           <p:nvPr/>
         </p:nvSpPr>
@@ -10614,11 +11853,11 @@
             </a:avLst>
           </a:prstGeom>
           <a:solidFill>
-            <a:srgbClr val="B91C1C"/>
+            <a:srgbClr val="06603A"/>
           </a:solidFill>
           <a:ln w="6350">
             <a:solidFill>
-              <a:srgbClr val="B91C1C"/>
+              <a:srgbClr val="06603A"/>
             </a:solidFill>
             <a:prstDash val="solid"/>
           </a:ln>
@@ -10626,7 +11865,7 @@
       </p:sp>
       <p:sp>
         <p:nvSpPr>
-          <p:cNvPr id="38" name="Text 35"/>
+          <p:cNvPr id="42" name="Text 39"/>
           <p:cNvSpPr/>
           <p:nvPr/>
         </p:nvSpPr>
@@ -10657,7 +11896,7 @@
                 <a:ea typeface="Calibri" pitchFamily="34" charset="-122"/>
                 <a:cs typeface="Calibri" pitchFamily="34" charset="-120"/>
               </a:rPr>
-              <a:t>MILESTONE</a:t>
+              <a:t>P3 LANDS</a:t>
             </a:r>
             <a:endParaRPr lang="en-US" sz="850" dirty="0"/>
           </a:p>
@@ -10665,7 +11904,7 @@
       </p:sp>
       <p:sp>
         <p:nvSpPr>
-          <p:cNvPr id="39" name="Shape 36"/>
+          <p:cNvPr id="43" name="Shape 40"/>
           <p:cNvSpPr/>
           <p:nvPr/>
         </p:nvSpPr>
@@ -10692,7 +11931,7 @@
       </p:sp>
       <p:sp>
         <p:nvSpPr>
-          <p:cNvPr id="40" name="Text 37"/>
+          <p:cNvPr id="44" name="Text 41"/>
           <p:cNvSpPr/>
           <p:nvPr/>
         </p:nvSpPr>
@@ -10731,7 +11970,7 @@
       </p:sp>
       <p:sp>
         <p:nvSpPr>
-          <p:cNvPr id="41" name="Text 38"/>
+          <p:cNvPr id="45" name="Text 42"/>
           <p:cNvSpPr/>
           <p:nvPr/>
         </p:nvSpPr>
@@ -10762,7 +12001,7 @@
                 <a:ea typeface="Calibri" pitchFamily="34" charset="-122"/>
                 <a:cs typeface="Calibri" pitchFamily="34" charset="-120"/>
               </a:rPr>
-              <a:t>The last block is the one that compounds: a dense corpus makes every later search cheaper and every later report better, and the legal answers decide what may be sold at all.</a:t>
+              <a:t>No DEV milestone lands in the last block, and that is the test: if the quarter can only be finished by building something, the first eight weeks built the wrong thing.</a:t>
             </a:r>
             <a:endParaRPr lang="en-US" sz="1050" dirty="0"/>
           </a:p>
@@ -12923,7 +14162,7 @@
                 <a:ea typeface="Calibri" pitchFamily="34" charset="-122"/>
                 <a:cs typeface="Calibri" pitchFamily="34" charset="-120"/>
               </a:rPr>
-              <a:t>RUNNING UNDERNEATH THE MILESTONES</a:t>
+              <a:t>RUNNING UNDERNEATH THE FOUR LANES</a:t>
             </a:r>
             <a:endParaRPr lang="en-US" sz="1000" dirty="0"/>
           </a:p>
@@ -12962,7 +14201,7 @@
                 <a:ea typeface="Georgia" pitchFamily="34" charset="-122"/>
                 <a:cs typeface="Georgia" pitchFamily="34" charset="-120"/>
               </a:rPr>
-              <a:t>The track that needs no product decision.</a:t>
+              <a:t>The chores nobody has to approve.</a:t>
             </a:r>
             <a:endParaRPr lang="en-US" sz="3000" dirty="0"/>
           </a:p>
@@ -13144,7 +14383,7 @@
                 <a:ea typeface="Calibri" pitchFamily="34" charset="-122"/>
                 <a:cs typeface="Calibri" pitchFamily="34" charset="-120"/>
               </a:rPr>
-              <a:t>ENGINEERING TRACK — PICK UP ANY OF THESE</a:t>
+              <a:t>ENGINEERING CHORES — PICK UP ANY OF THESE</a:t>
             </a:r>
             <a:endParaRPr lang="en-US" sz="950" dirty="0"/>
           </a:p>
